--- a/260418_add/ppt/SuppFig_volcano_gene_pathwaycat_detailed_native_editable.pptx
+++ b/260418_add/ppt/SuppFig_volcano_gene_pathwaycat_detailed_native_editable.pptx
@@ -67072,7 +67072,7 @@
             <a:avLst/>
           </a:prstGeom>
           <a:solidFill>
-            <a:srgbClr val="00567D"/>
+            <a:srgbClr val="A24E78"/>
           </a:solidFill>
           <a:ln w="6350">
             <a:solidFill>
@@ -67118,7 +67118,7 @@
             <a:avLst/>
           </a:prstGeom>
           <a:solidFill>
-            <a:srgbClr val="C11456"/>
+            <a:srgbClr val="118AB2"/>
           </a:solidFill>
           <a:ln w="6350">
             <a:solidFill>
@@ -67164,7 +67164,7 @@
             <a:avLst/>
           </a:prstGeom>
           <a:solidFill>
-            <a:srgbClr val="00567D"/>
+            <a:srgbClr val="A24E78"/>
           </a:solidFill>
           <a:ln w="6350">
             <a:solidFill>
@@ -67210,7 +67210,7 @@
             <a:avLst/>
           </a:prstGeom>
           <a:solidFill>
-            <a:srgbClr val="B03219"/>
+            <a:srgbClr val="5A8261"/>
           </a:solidFill>
           <a:ln w="6350">
             <a:solidFill>
@@ -67256,7 +67256,7 @@
             <a:avLst/>
           </a:prstGeom>
           <a:solidFill>
-            <a:srgbClr val="C11456"/>
+            <a:srgbClr val="118AB2"/>
           </a:solidFill>
           <a:ln w="6350">
             <a:solidFill>
@@ -67302,7 +67302,7 @@
             <a:avLst/>
           </a:prstGeom>
           <a:solidFill>
-            <a:srgbClr val="B03219"/>
+            <a:srgbClr val="5A8261"/>
           </a:solidFill>
           <a:ln w="6350">
             <a:solidFill>
@@ -67348,7 +67348,7 @@
             <a:avLst/>
           </a:prstGeom>
           <a:solidFill>
-            <a:srgbClr val="B03219"/>
+            <a:srgbClr val="5A8261"/>
           </a:solidFill>
           <a:ln w="6350">
             <a:solidFill>
@@ -67394,7 +67394,7 @@
             <a:avLst/>
           </a:prstGeom>
           <a:solidFill>
-            <a:srgbClr val="B03219"/>
+            <a:srgbClr val="5A8261"/>
           </a:solidFill>
           <a:ln w="6350">
             <a:solidFill>
@@ -67440,7 +67440,7 @@
             <a:avLst/>
           </a:prstGeom>
           <a:solidFill>
-            <a:srgbClr val="C11456"/>
+            <a:srgbClr val="118AB2"/>
           </a:solidFill>
           <a:ln w="6350">
             <a:solidFill>
@@ -67486,7 +67486,7 @@
             <a:avLst/>
           </a:prstGeom>
           <a:solidFill>
-            <a:srgbClr val="00567D"/>
+            <a:srgbClr val="A24E78"/>
           </a:solidFill>
           <a:ln w="6350">
             <a:solidFill>
@@ -67532,7 +67532,7 @@
             <a:avLst/>
           </a:prstGeom>
           <a:solidFill>
-            <a:srgbClr val="C11456"/>
+            <a:srgbClr val="118AB2"/>
           </a:solidFill>
           <a:ln w="6350">
             <a:solidFill>
@@ -67578,7 +67578,7 @@
             <a:avLst/>
           </a:prstGeom>
           <a:solidFill>
-            <a:srgbClr val="B03219"/>
+            <a:srgbClr val="5A8261"/>
           </a:solidFill>
           <a:ln w="6350">
             <a:solidFill>
@@ -67624,7 +67624,7 @@
             <a:avLst/>
           </a:prstGeom>
           <a:solidFill>
-            <a:srgbClr val="C11456"/>
+            <a:srgbClr val="118AB2"/>
           </a:solidFill>
           <a:ln w="6350">
             <a:solidFill>
@@ -67670,7 +67670,7 @@
             <a:avLst/>
           </a:prstGeom>
           <a:solidFill>
-            <a:srgbClr val="057A64"/>
+            <a:srgbClr val="E39A1E"/>
           </a:solidFill>
           <a:ln w="6350">
             <a:solidFill>
@@ -67716,7 +67716,7 @@
             <a:avLst/>
           </a:prstGeom>
           <a:solidFill>
-            <a:srgbClr val="00567D"/>
+            <a:srgbClr val="A24E78"/>
           </a:solidFill>
           <a:ln w="6350">
             <a:solidFill>
@@ -67762,7 +67762,7 @@
             <a:avLst/>
           </a:prstGeom>
           <a:solidFill>
-            <a:srgbClr val="C11456"/>
+            <a:srgbClr val="118AB2"/>
           </a:solidFill>
           <a:ln w="6350">
             <a:solidFill>
@@ -67808,7 +67808,7 @@
             <a:avLst/>
           </a:prstGeom>
           <a:solidFill>
-            <a:srgbClr val="00567D"/>
+            <a:srgbClr val="A24E78"/>
           </a:solidFill>
           <a:ln w="6350">
             <a:solidFill>
@@ -67854,7 +67854,7 @@
             <a:avLst/>
           </a:prstGeom>
           <a:solidFill>
-            <a:srgbClr val="C11456"/>
+            <a:srgbClr val="118AB2"/>
           </a:solidFill>
           <a:ln w="6350">
             <a:solidFill>
@@ -67900,7 +67900,7 @@
             <a:avLst/>
           </a:prstGeom>
           <a:solidFill>
-            <a:srgbClr val="C11456"/>
+            <a:srgbClr val="118AB2"/>
           </a:solidFill>
           <a:ln w="6350">
             <a:solidFill>
@@ -67946,7 +67946,7 @@
             <a:avLst/>
           </a:prstGeom>
           <a:solidFill>
-            <a:srgbClr val="B03219"/>
+            <a:srgbClr val="5A8261"/>
           </a:solidFill>
           <a:ln w="6350">
             <a:solidFill>
@@ -67992,7 +67992,7 @@
             <a:avLst/>
           </a:prstGeom>
           <a:solidFill>
-            <a:srgbClr val="00567D"/>
+            <a:srgbClr val="A24E78"/>
           </a:solidFill>
           <a:ln w="6350">
             <a:solidFill>
@@ -68038,7 +68038,7 @@
             <a:avLst/>
           </a:prstGeom>
           <a:solidFill>
-            <a:srgbClr val="00567D"/>
+            <a:srgbClr val="A24E78"/>
           </a:solidFill>
           <a:ln w="6350">
             <a:solidFill>
@@ -68071,5815 +68071,7 @@
       </p:sp>
       <p:sp>
         <p:nvSpPr>
-          <p:cNvPr id="1477" name="Oval 1476"/>
-          <p:cNvSpPr/>
-          <p:nvPr/>
-        </p:nvSpPr>
-        <p:spPr>
-          <a:xfrm>
-            <a:off x="2911404" y="2984654"/>
-            <a:ext cx="76000" cy="76000"/>
-          </a:xfrm>
-          <a:prstGeom prst="ellipse">
-            <a:avLst/>
-          </a:prstGeom>
-          <a:noFill/>
-          <a:ln w="13970">
-            <a:solidFill>
-              <a:srgbClr val="D4A300"/>
-            </a:solidFill>
-          </a:ln>
-          <a:effectLst/>
-        </p:spPr>
-        <p:style>
-          <a:lnRef idx="1">
-            <a:schemeClr val="accent1"/>
-          </a:lnRef>
-          <a:fillRef idx="3">
-            <a:schemeClr val="accent1"/>
-          </a:fillRef>
-          <a:effectRef idx="2">
-            <a:schemeClr val="accent1"/>
-          </a:effectRef>
-          <a:fontRef idx="minor">
-            <a:schemeClr val="lt1"/>
-          </a:fontRef>
-        </p:style>
-        <p:txBody>
-          <a:bodyPr rtlCol="0" anchor="ctr"/>
-          <a:lstStyle/>
-          <a:p>
-            <a:pPr algn="ctr"/>
-          </a:p>
-        </p:txBody>
-      </p:sp>
-      <p:sp>
-        <p:nvSpPr>
-          <p:cNvPr id="1478" name="Oval 1477"/>
-          <p:cNvSpPr/>
-          <p:nvPr/>
-        </p:nvSpPr>
-        <p:spPr>
-          <a:xfrm>
-            <a:off x="2516455" y="3393650"/>
-            <a:ext cx="76000" cy="76000"/>
-          </a:xfrm>
-          <a:prstGeom prst="ellipse">
-            <a:avLst/>
-          </a:prstGeom>
-          <a:noFill/>
-          <a:ln w="13970">
-            <a:solidFill>
-              <a:srgbClr val="D4A300"/>
-            </a:solidFill>
-          </a:ln>
-          <a:effectLst/>
-        </p:spPr>
-        <p:style>
-          <a:lnRef idx="1">
-            <a:schemeClr val="accent1"/>
-          </a:lnRef>
-          <a:fillRef idx="3">
-            <a:schemeClr val="accent1"/>
-          </a:fillRef>
-          <a:effectRef idx="2">
-            <a:schemeClr val="accent1"/>
-          </a:effectRef>
-          <a:fontRef idx="minor">
-            <a:schemeClr val="lt1"/>
-          </a:fontRef>
-        </p:style>
-        <p:txBody>
-          <a:bodyPr rtlCol="0" anchor="ctr"/>
-          <a:lstStyle/>
-          <a:p>
-            <a:pPr algn="ctr"/>
-          </a:p>
-        </p:txBody>
-      </p:sp>
-      <p:sp>
-        <p:nvSpPr>
-          <p:cNvPr id="1479" name="Oval 1478"/>
-          <p:cNvSpPr/>
-          <p:nvPr/>
-        </p:nvSpPr>
-        <p:spPr>
-          <a:xfrm>
-            <a:off x="6779154" y="3433717"/>
-            <a:ext cx="76000" cy="76000"/>
-          </a:xfrm>
-          <a:prstGeom prst="ellipse">
-            <a:avLst/>
-          </a:prstGeom>
-          <a:noFill/>
-          <a:ln w="13970">
-            <a:solidFill>
-              <a:srgbClr val="D4A300"/>
-            </a:solidFill>
-          </a:ln>
-          <a:effectLst/>
-        </p:spPr>
-        <p:style>
-          <a:lnRef idx="1">
-            <a:schemeClr val="accent1"/>
-          </a:lnRef>
-          <a:fillRef idx="3">
-            <a:schemeClr val="accent1"/>
-          </a:fillRef>
-          <a:effectRef idx="2">
-            <a:schemeClr val="accent1"/>
-          </a:effectRef>
-          <a:fontRef idx="minor">
-            <a:schemeClr val="lt1"/>
-          </a:fontRef>
-        </p:style>
-        <p:txBody>
-          <a:bodyPr rtlCol="0" anchor="ctr"/>
-          <a:lstStyle/>
-          <a:p>
-            <a:pPr algn="ctr"/>
-          </a:p>
-        </p:txBody>
-      </p:sp>
-      <p:sp>
-        <p:nvSpPr>
-          <p:cNvPr id="1480" name="Oval 1479"/>
-          <p:cNvSpPr/>
-          <p:nvPr/>
-        </p:nvSpPr>
-        <p:spPr>
-          <a:xfrm>
-            <a:off x="4171283" y="3471824"/>
-            <a:ext cx="76000" cy="76000"/>
-          </a:xfrm>
-          <a:prstGeom prst="ellipse">
-            <a:avLst/>
-          </a:prstGeom>
-          <a:noFill/>
-          <a:ln w="13970">
-            <a:solidFill>
-              <a:srgbClr val="D4A300"/>
-            </a:solidFill>
-          </a:ln>
-          <a:effectLst/>
-        </p:spPr>
-        <p:style>
-          <a:lnRef idx="1">
-            <a:schemeClr val="accent1"/>
-          </a:lnRef>
-          <a:fillRef idx="3">
-            <a:schemeClr val="accent1"/>
-          </a:fillRef>
-          <a:effectRef idx="2">
-            <a:schemeClr val="accent1"/>
-          </a:effectRef>
-          <a:fontRef idx="minor">
-            <a:schemeClr val="lt1"/>
-          </a:fontRef>
-        </p:style>
-        <p:txBody>
-          <a:bodyPr rtlCol="0" anchor="ctr"/>
-          <a:lstStyle/>
-          <a:p>
-            <a:pPr algn="ctr"/>
-          </a:p>
-        </p:txBody>
-      </p:sp>
-      <p:sp>
-        <p:nvSpPr>
-          <p:cNvPr id="1481" name="Oval 1480"/>
-          <p:cNvSpPr/>
-          <p:nvPr/>
-        </p:nvSpPr>
-        <p:spPr>
-          <a:xfrm>
-            <a:off x="3979783" y="3671067"/>
-            <a:ext cx="76000" cy="76000"/>
-          </a:xfrm>
-          <a:prstGeom prst="ellipse">
-            <a:avLst/>
-          </a:prstGeom>
-          <a:noFill/>
-          <a:ln w="13970">
-            <a:solidFill>
-              <a:srgbClr val="D4A300"/>
-            </a:solidFill>
-          </a:ln>
-          <a:effectLst/>
-        </p:spPr>
-        <p:style>
-          <a:lnRef idx="1">
-            <a:schemeClr val="accent1"/>
-          </a:lnRef>
-          <a:fillRef idx="3">
-            <a:schemeClr val="accent1"/>
-          </a:fillRef>
-          <a:effectRef idx="2">
-            <a:schemeClr val="accent1"/>
-          </a:effectRef>
-          <a:fontRef idx="minor">
-            <a:schemeClr val="lt1"/>
-          </a:fontRef>
-        </p:style>
-        <p:txBody>
-          <a:bodyPr rtlCol="0" anchor="ctr"/>
-          <a:lstStyle/>
-          <a:p>
-            <a:pPr algn="ctr"/>
-          </a:p>
-        </p:txBody>
-      </p:sp>
-      <p:sp>
-        <p:nvSpPr>
-          <p:cNvPr id="1482" name="Oval 1481"/>
-          <p:cNvSpPr/>
-          <p:nvPr/>
-        </p:nvSpPr>
-        <p:spPr>
-          <a:xfrm>
-            <a:off x="9414190" y="3713886"/>
-            <a:ext cx="76000" cy="76000"/>
-          </a:xfrm>
-          <a:prstGeom prst="ellipse">
-            <a:avLst/>
-          </a:prstGeom>
-          <a:noFill/>
-          <a:ln w="13970">
-            <a:solidFill>
-              <a:srgbClr val="D4A300"/>
-            </a:solidFill>
-          </a:ln>
-          <a:effectLst/>
-        </p:spPr>
-        <p:style>
-          <a:lnRef idx="1">
-            <a:schemeClr val="accent1"/>
-          </a:lnRef>
-          <a:fillRef idx="3">
-            <a:schemeClr val="accent1"/>
-          </a:fillRef>
-          <a:effectRef idx="2">
-            <a:schemeClr val="accent1"/>
-          </a:effectRef>
-          <a:fontRef idx="minor">
-            <a:schemeClr val="lt1"/>
-          </a:fontRef>
-        </p:style>
-        <p:txBody>
-          <a:bodyPr rtlCol="0" anchor="ctr"/>
-          <a:lstStyle/>
-          <a:p>
-            <a:pPr algn="ctr"/>
-          </a:p>
-        </p:txBody>
-      </p:sp>
-      <p:sp>
-        <p:nvSpPr>
-          <p:cNvPr id="1483" name="Oval 1482"/>
-          <p:cNvSpPr/>
-          <p:nvPr/>
-        </p:nvSpPr>
-        <p:spPr>
-          <a:xfrm>
-            <a:off x="1453175" y="3717586"/>
-            <a:ext cx="76000" cy="76000"/>
-          </a:xfrm>
-          <a:prstGeom prst="ellipse">
-            <a:avLst/>
-          </a:prstGeom>
-          <a:noFill/>
-          <a:ln w="13970">
-            <a:solidFill>
-              <a:srgbClr val="D4A300"/>
-            </a:solidFill>
-          </a:ln>
-          <a:effectLst/>
-        </p:spPr>
-        <p:style>
-          <a:lnRef idx="1">
-            <a:schemeClr val="accent1"/>
-          </a:lnRef>
-          <a:fillRef idx="3">
-            <a:schemeClr val="accent1"/>
-          </a:fillRef>
-          <a:effectRef idx="2">
-            <a:schemeClr val="accent1"/>
-          </a:effectRef>
-          <a:fontRef idx="minor">
-            <a:schemeClr val="lt1"/>
-          </a:fontRef>
-        </p:style>
-        <p:txBody>
-          <a:bodyPr rtlCol="0" anchor="ctr"/>
-          <a:lstStyle/>
-          <a:p>
-            <a:pPr algn="ctr"/>
-          </a:p>
-        </p:txBody>
-      </p:sp>
-      <p:sp>
-        <p:nvSpPr>
-          <p:cNvPr id="1484" name="Oval 1483"/>
-          <p:cNvSpPr/>
-          <p:nvPr/>
-        </p:nvSpPr>
-        <p:spPr>
-          <a:xfrm>
-            <a:off x="4325822" y="3718793"/>
-            <a:ext cx="76000" cy="76000"/>
-          </a:xfrm>
-          <a:prstGeom prst="ellipse">
-            <a:avLst/>
-          </a:prstGeom>
-          <a:noFill/>
-          <a:ln w="13970">
-            <a:solidFill>
-              <a:srgbClr val="D4A300"/>
-            </a:solidFill>
-          </a:ln>
-          <a:effectLst/>
-        </p:spPr>
-        <p:style>
-          <a:lnRef idx="1">
-            <a:schemeClr val="accent1"/>
-          </a:lnRef>
-          <a:fillRef idx="3">
-            <a:schemeClr val="accent1"/>
-          </a:fillRef>
-          <a:effectRef idx="2">
-            <a:schemeClr val="accent1"/>
-          </a:effectRef>
-          <a:fontRef idx="minor">
-            <a:schemeClr val="lt1"/>
-          </a:fontRef>
-        </p:style>
-        <p:txBody>
-          <a:bodyPr rtlCol="0" anchor="ctr"/>
-          <a:lstStyle/>
-          <a:p>
-            <a:pPr algn="ctr"/>
-          </a:p>
-        </p:txBody>
-      </p:sp>
-      <p:sp>
-        <p:nvSpPr>
-          <p:cNvPr id="1485" name="Oval 1484"/>
-          <p:cNvSpPr/>
-          <p:nvPr/>
-        </p:nvSpPr>
-        <p:spPr>
-          <a:xfrm>
-            <a:off x="7246610" y="3726291"/>
-            <a:ext cx="76000" cy="76000"/>
-          </a:xfrm>
-          <a:prstGeom prst="ellipse">
-            <a:avLst/>
-          </a:prstGeom>
-          <a:noFill/>
-          <a:ln w="13970">
-            <a:solidFill>
-              <a:srgbClr val="D4A300"/>
-            </a:solidFill>
-          </a:ln>
-          <a:effectLst/>
-        </p:spPr>
-        <p:style>
-          <a:lnRef idx="1">
-            <a:schemeClr val="accent1"/>
-          </a:lnRef>
-          <a:fillRef idx="3">
-            <a:schemeClr val="accent1"/>
-          </a:fillRef>
-          <a:effectRef idx="2">
-            <a:schemeClr val="accent1"/>
-          </a:effectRef>
-          <a:fontRef idx="minor">
-            <a:schemeClr val="lt1"/>
-          </a:fontRef>
-        </p:style>
-        <p:txBody>
-          <a:bodyPr rtlCol="0" anchor="ctr"/>
-          <a:lstStyle/>
-          <a:p>
-            <a:pPr algn="ctr"/>
-          </a:p>
-        </p:txBody>
-      </p:sp>
-      <p:sp>
-        <p:nvSpPr>
-          <p:cNvPr id="1486" name="Oval 1485"/>
-          <p:cNvSpPr/>
-          <p:nvPr/>
-        </p:nvSpPr>
-        <p:spPr>
-          <a:xfrm>
-            <a:off x="7732266" y="3728061"/>
-            <a:ext cx="76000" cy="76000"/>
-          </a:xfrm>
-          <a:prstGeom prst="ellipse">
-            <a:avLst/>
-          </a:prstGeom>
-          <a:noFill/>
-          <a:ln w="13970">
-            <a:solidFill>
-              <a:srgbClr val="D4A300"/>
-            </a:solidFill>
-          </a:ln>
-          <a:effectLst/>
-        </p:spPr>
-        <p:style>
-          <a:lnRef idx="1">
-            <a:schemeClr val="accent1"/>
-          </a:lnRef>
-          <a:fillRef idx="3">
-            <a:schemeClr val="accent1"/>
-          </a:fillRef>
-          <a:effectRef idx="2">
-            <a:schemeClr val="accent1"/>
-          </a:effectRef>
-          <a:fontRef idx="minor">
-            <a:schemeClr val="lt1"/>
-          </a:fontRef>
-        </p:style>
-        <p:txBody>
-          <a:bodyPr rtlCol="0" anchor="ctr"/>
-          <a:lstStyle/>
-          <a:p>
-            <a:pPr algn="ctr"/>
-          </a:p>
-        </p:txBody>
-      </p:sp>
-      <p:sp>
-        <p:nvSpPr>
-          <p:cNvPr id="1487" name="Oval 1486"/>
-          <p:cNvSpPr/>
-          <p:nvPr/>
-        </p:nvSpPr>
-        <p:spPr>
-          <a:xfrm>
-            <a:off x="3957945" y="3728482"/>
-            <a:ext cx="76000" cy="76000"/>
-          </a:xfrm>
-          <a:prstGeom prst="ellipse">
-            <a:avLst/>
-          </a:prstGeom>
-          <a:noFill/>
-          <a:ln w="13970">
-            <a:solidFill>
-              <a:srgbClr val="D4A300"/>
-            </a:solidFill>
-          </a:ln>
-          <a:effectLst/>
-        </p:spPr>
-        <p:style>
-          <a:lnRef idx="1">
-            <a:schemeClr val="accent1"/>
-          </a:lnRef>
-          <a:fillRef idx="3">
-            <a:schemeClr val="accent1"/>
-          </a:fillRef>
-          <a:effectRef idx="2">
-            <a:schemeClr val="accent1"/>
-          </a:effectRef>
-          <a:fontRef idx="minor">
-            <a:schemeClr val="lt1"/>
-          </a:fontRef>
-        </p:style>
-        <p:txBody>
-          <a:bodyPr rtlCol="0" anchor="ctr"/>
-          <a:lstStyle/>
-          <a:p>
-            <a:pPr algn="ctr"/>
-          </a:p>
-        </p:txBody>
-      </p:sp>
-      <p:sp>
-        <p:nvSpPr>
-          <p:cNvPr id="1488" name="Oval 1487"/>
-          <p:cNvSpPr/>
-          <p:nvPr/>
-        </p:nvSpPr>
-        <p:spPr>
-          <a:xfrm>
-            <a:off x="6613764" y="3749007"/>
-            <a:ext cx="76000" cy="76000"/>
-          </a:xfrm>
-          <a:prstGeom prst="ellipse">
-            <a:avLst/>
-          </a:prstGeom>
-          <a:noFill/>
-          <a:ln w="13970">
-            <a:solidFill>
-              <a:srgbClr val="D4A300"/>
-            </a:solidFill>
-          </a:ln>
-          <a:effectLst/>
-        </p:spPr>
-        <p:style>
-          <a:lnRef idx="1">
-            <a:schemeClr val="accent1"/>
-          </a:lnRef>
-          <a:fillRef idx="3">
-            <a:schemeClr val="accent1"/>
-          </a:fillRef>
-          <a:effectRef idx="2">
-            <a:schemeClr val="accent1"/>
-          </a:effectRef>
-          <a:fontRef idx="minor">
-            <a:schemeClr val="lt1"/>
-          </a:fontRef>
-        </p:style>
-        <p:txBody>
-          <a:bodyPr rtlCol="0" anchor="ctr"/>
-          <a:lstStyle/>
-          <a:p>
-            <a:pPr algn="ctr"/>
-          </a:p>
-        </p:txBody>
-      </p:sp>
-      <p:sp>
-        <p:nvSpPr>
-          <p:cNvPr id="1489" name="Oval 1488"/>
-          <p:cNvSpPr/>
-          <p:nvPr/>
-        </p:nvSpPr>
-        <p:spPr>
-          <a:xfrm>
-            <a:off x="6481030" y="3755751"/>
-            <a:ext cx="76000" cy="76000"/>
-          </a:xfrm>
-          <a:prstGeom prst="ellipse">
-            <a:avLst/>
-          </a:prstGeom>
-          <a:noFill/>
-          <a:ln w="13970">
-            <a:solidFill>
-              <a:srgbClr val="D4A300"/>
-            </a:solidFill>
-          </a:ln>
-          <a:effectLst/>
-        </p:spPr>
-        <p:style>
-          <a:lnRef idx="1">
-            <a:schemeClr val="accent1"/>
-          </a:lnRef>
-          <a:fillRef idx="3">
-            <a:schemeClr val="accent1"/>
-          </a:fillRef>
-          <a:effectRef idx="2">
-            <a:schemeClr val="accent1"/>
-          </a:effectRef>
-          <a:fontRef idx="minor">
-            <a:schemeClr val="lt1"/>
-          </a:fontRef>
-        </p:style>
-        <p:txBody>
-          <a:bodyPr rtlCol="0" anchor="ctr"/>
-          <a:lstStyle/>
-          <a:p>
-            <a:pPr algn="ctr"/>
-          </a:p>
-        </p:txBody>
-      </p:sp>
-      <p:sp>
-        <p:nvSpPr>
-          <p:cNvPr id="1490" name="Oval 1489"/>
-          <p:cNvSpPr/>
-          <p:nvPr/>
-        </p:nvSpPr>
-        <p:spPr>
-          <a:xfrm>
-            <a:off x="6421088" y="3817906"/>
-            <a:ext cx="76000" cy="76000"/>
-          </a:xfrm>
-          <a:prstGeom prst="ellipse">
-            <a:avLst/>
-          </a:prstGeom>
-          <a:noFill/>
-          <a:ln w="13970">
-            <a:solidFill>
-              <a:srgbClr val="D4A300"/>
-            </a:solidFill>
-          </a:ln>
-          <a:effectLst/>
-        </p:spPr>
-        <p:style>
-          <a:lnRef idx="1">
-            <a:schemeClr val="accent1"/>
-          </a:lnRef>
-          <a:fillRef idx="3">
-            <a:schemeClr val="accent1"/>
-          </a:fillRef>
-          <a:effectRef idx="2">
-            <a:schemeClr val="accent1"/>
-          </a:effectRef>
-          <a:fontRef idx="minor">
-            <a:schemeClr val="lt1"/>
-          </a:fontRef>
-        </p:style>
-        <p:txBody>
-          <a:bodyPr rtlCol="0" anchor="ctr"/>
-          <a:lstStyle/>
-          <a:p>
-            <a:pPr algn="ctr"/>
-          </a:p>
-        </p:txBody>
-      </p:sp>
-      <p:sp>
-        <p:nvSpPr>
-          <p:cNvPr id="1491" name="Oval 1490"/>
-          <p:cNvSpPr/>
-          <p:nvPr/>
-        </p:nvSpPr>
-        <p:spPr>
-          <a:xfrm>
-            <a:off x="6818005" y="3825618"/>
-            <a:ext cx="76000" cy="76000"/>
-          </a:xfrm>
-          <a:prstGeom prst="ellipse">
-            <a:avLst/>
-          </a:prstGeom>
-          <a:noFill/>
-          <a:ln w="13970">
-            <a:solidFill>
-              <a:srgbClr val="D4A300"/>
-            </a:solidFill>
-          </a:ln>
-          <a:effectLst/>
-        </p:spPr>
-        <p:style>
-          <a:lnRef idx="1">
-            <a:schemeClr val="accent1"/>
-          </a:lnRef>
-          <a:fillRef idx="3">
-            <a:schemeClr val="accent1"/>
-          </a:fillRef>
-          <a:effectRef idx="2">
-            <a:schemeClr val="accent1"/>
-          </a:effectRef>
-          <a:fontRef idx="minor">
-            <a:schemeClr val="lt1"/>
-          </a:fontRef>
-        </p:style>
-        <p:txBody>
-          <a:bodyPr rtlCol="0" anchor="ctr"/>
-          <a:lstStyle/>
-          <a:p>
-            <a:pPr algn="ctr"/>
-          </a:p>
-        </p:txBody>
-      </p:sp>
-      <p:sp>
-        <p:nvSpPr>
-          <p:cNvPr id="1492" name="Oval 1491"/>
-          <p:cNvSpPr/>
-          <p:nvPr/>
-        </p:nvSpPr>
-        <p:spPr>
-          <a:xfrm>
-            <a:off x="8013665" y="3877376"/>
-            <a:ext cx="76000" cy="76000"/>
-          </a:xfrm>
-          <a:prstGeom prst="ellipse">
-            <a:avLst/>
-          </a:prstGeom>
-          <a:noFill/>
-          <a:ln w="13970">
-            <a:solidFill>
-              <a:srgbClr val="D4A300"/>
-            </a:solidFill>
-          </a:ln>
-          <a:effectLst/>
-        </p:spPr>
-        <p:style>
-          <a:lnRef idx="1">
-            <a:schemeClr val="accent1"/>
-          </a:lnRef>
-          <a:fillRef idx="3">
-            <a:schemeClr val="accent1"/>
-          </a:fillRef>
-          <a:effectRef idx="2">
-            <a:schemeClr val="accent1"/>
-          </a:effectRef>
-          <a:fontRef idx="minor">
-            <a:schemeClr val="lt1"/>
-          </a:fontRef>
-        </p:style>
-        <p:txBody>
-          <a:bodyPr rtlCol="0" anchor="ctr"/>
-          <a:lstStyle/>
-          <a:p>
-            <a:pPr algn="ctr"/>
-          </a:p>
-        </p:txBody>
-      </p:sp>
-      <p:sp>
-        <p:nvSpPr>
-          <p:cNvPr id="1493" name="Oval 1492"/>
-          <p:cNvSpPr/>
-          <p:nvPr/>
-        </p:nvSpPr>
-        <p:spPr>
-          <a:xfrm>
-            <a:off x="7592117" y="3904090"/>
-            <a:ext cx="76000" cy="76000"/>
-          </a:xfrm>
-          <a:prstGeom prst="ellipse">
-            <a:avLst/>
-          </a:prstGeom>
-          <a:noFill/>
-          <a:ln w="13970">
-            <a:solidFill>
-              <a:srgbClr val="D4A300"/>
-            </a:solidFill>
-          </a:ln>
-          <a:effectLst/>
-        </p:spPr>
-        <p:style>
-          <a:lnRef idx="1">
-            <a:schemeClr val="accent1"/>
-          </a:lnRef>
-          <a:fillRef idx="3">
-            <a:schemeClr val="accent1"/>
-          </a:fillRef>
-          <a:effectRef idx="2">
-            <a:schemeClr val="accent1"/>
-          </a:effectRef>
-          <a:fontRef idx="minor">
-            <a:schemeClr val="lt1"/>
-          </a:fontRef>
-        </p:style>
-        <p:txBody>
-          <a:bodyPr rtlCol="0" anchor="ctr"/>
-          <a:lstStyle/>
-          <a:p>
-            <a:pPr algn="ctr"/>
-          </a:p>
-        </p:txBody>
-      </p:sp>
-      <p:sp>
-        <p:nvSpPr>
-          <p:cNvPr id="1494" name="Oval 1493"/>
-          <p:cNvSpPr/>
-          <p:nvPr/>
-        </p:nvSpPr>
-        <p:spPr>
-          <a:xfrm>
-            <a:off x="4407600" y="3904258"/>
-            <a:ext cx="76000" cy="76000"/>
-          </a:xfrm>
-          <a:prstGeom prst="ellipse">
-            <a:avLst/>
-          </a:prstGeom>
-          <a:noFill/>
-          <a:ln w="13970">
-            <a:solidFill>
-              <a:srgbClr val="D4A300"/>
-            </a:solidFill>
-          </a:ln>
-          <a:effectLst/>
-        </p:spPr>
-        <p:style>
-          <a:lnRef idx="1">
-            <a:schemeClr val="accent1"/>
-          </a:lnRef>
-          <a:fillRef idx="3">
-            <a:schemeClr val="accent1"/>
-          </a:fillRef>
-          <a:effectRef idx="2">
-            <a:schemeClr val="accent1"/>
-          </a:effectRef>
-          <a:fontRef idx="minor">
-            <a:schemeClr val="lt1"/>
-          </a:fontRef>
-        </p:style>
-        <p:txBody>
-          <a:bodyPr rtlCol="0" anchor="ctr"/>
-          <a:lstStyle/>
-          <a:p>
-            <a:pPr algn="ctr"/>
-          </a:p>
-        </p:txBody>
-      </p:sp>
-      <p:sp>
-        <p:nvSpPr>
-          <p:cNvPr id="1495" name="Oval 1494"/>
-          <p:cNvSpPr/>
-          <p:nvPr/>
-        </p:nvSpPr>
-        <p:spPr>
-          <a:xfrm>
-            <a:off x="4708367" y="3911696"/>
-            <a:ext cx="76000" cy="76000"/>
-          </a:xfrm>
-          <a:prstGeom prst="ellipse">
-            <a:avLst/>
-          </a:prstGeom>
-          <a:noFill/>
-          <a:ln w="13970">
-            <a:solidFill>
-              <a:srgbClr val="D4A300"/>
-            </a:solidFill>
-          </a:ln>
-          <a:effectLst/>
-        </p:spPr>
-        <p:style>
-          <a:lnRef idx="1">
-            <a:schemeClr val="accent1"/>
-          </a:lnRef>
-          <a:fillRef idx="3">
-            <a:schemeClr val="accent1"/>
-          </a:fillRef>
-          <a:effectRef idx="2">
-            <a:schemeClr val="accent1"/>
-          </a:effectRef>
-          <a:fontRef idx="minor">
-            <a:schemeClr val="lt1"/>
-          </a:fontRef>
-        </p:style>
-        <p:txBody>
-          <a:bodyPr rtlCol="0" anchor="ctr"/>
-          <a:lstStyle/>
-          <a:p>
-            <a:pPr algn="ctr"/>
-          </a:p>
-        </p:txBody>
-      </p:sp>
-      <p:sp>
-        <p:nvSpPr>
-          <p:cNvPr id="1496" name="Oval 1495"/>
-          <p:cNvSpPr/>
-          <p:nvPr/>
-        </p:nvSpPr>
-        <p:spPr>
-          <a:xfrm>
-            <a:off x="6756607" y="3932739"/>
-            <a:ext cx="76000" cy="76000"/>
-          </a:xfrm>
-          <a:prstGeom prst="ellipse">
-            <a:avLst/>
-          </a:prstGeom>
-          <a:noFill/>
-          <a:ln w="13970">
-            <a:solidFill>
-              <a:srgbClr val="D4A300"/>
-            </a:solidFill>
-          </a:ln>
-          <a:effectLst/>
-        </p:spPr>
-        <p:style>
-          <a:lnRef idx="1">
-            <a:schemeClr val="accent1"/>
-          </a:lnRef>
-          <a:fillRef idx="3">
-            <a:schemeClr val="accent1"/>
-          </a:fillRef>
-          <a:effectRef idx="2">
-            <a:schemeClr val="accent1"/>
-          </a:effectRef>
-          <a:fontRef idx="minor">
-            <a:schemeClr val="lt1"/>
-          </a:fontRef>
-        </p:style>
-        <p:txBody>
-          <a:bodyPr rtlCol="0" anchor="ctr"/>
-          <a:lstStyle/>
-          <a:p>
-            <a:pPr algn="ctr"/>
-          </a:p>
-        </p:txBody>
-      </p:sp>
-      <p:sp>
-        <p:nvSpPr>
-          <p:cNvPr id="1497" name="Oval 1496"/>
-          <p:cNvSpPr/>
-          <p:nvPr/>
-        </p:nvSpPr>
-        <p:spPr>
-          <a:xfrm>
-            <a:off x="4659483" y="3942102"/>
-            <a:ext cx="76000" cy="76000"/>
-          </a:xfrm>
-          <a:prstGeom prst="ellipse">
-            <a:avLst/>
-          </a:prstGeom>
-          <a:noFill/>
-          <a:ln w="13970">
-            <a:solidFill>
-              <a:srgbClr val="D4A300"/>
-            </a:solidFill>
-          </a:ln>
-          <a:effectLst/>
-        </p:spPr>
-        <p:style>
-          <a:lnRef idx="1">
-            <a:schemeClr val="accent1"/>
-          </a:lnRef>
-          <a:fillRef idx="3">
-            <a:schemeClr val="accent1"/>
-          </a:fillRef>
-          <a:effectRef idx="2">
-            <a:schemeClr val="accent1"/>
-          </a:effectRef>
-          <a:fontRef idx="minor">
-            <a:schemeClr val="lt1"/>
-          </a:fontRef>
-        </p:style>
-        <p:txBody>
-          <a:bodyPr rtlCol="0" anchor="ctr"/>
-          <a:lstStyle/>
-          <a:p>
-            <a:pPr algn="ctr"/>
-          </a:p>
-        </p:txBody>
-      </p:sp>
-      <p:sp>
-        <p:nvSpPr>
-          <p:cNvPr id="1498" name="Oval 1497"/>
-          <p:cNvSpPr/>
-          <p:nvPr/>
-        </p:nvSpPr>
-        <p:spPr>
-          <a:xfrm>
-            <a:off x="4068629" y="3949214"/>
-            <a:ext cx="76000" cy="76000"/>
-          </a:xfrm>
-          <a:prstGeom prst="ellipse">
-            <a:avLst/>
-          </a:prstGeom>
-          <a:noFill/>
-          <a:ln w="13970">
-            <a:solidFill>
-              <a:srgbClr val="D4A300"/>
-            </a:solidFill>
-          </a:ln>
-          <a:effectLst/>
-        </p:spPr>
-        <p:style>
-          <a:lnRef idx="1">
-            <a:schemeClr val="accent1"/>
-          </a:lnRef>
-          <a:fillRef idx="3">
-            <a:schemeClr val="accent1"/>
-          </a:fillRef>
-          <a:effectRef idx="2">
-            <a:schemeClr val="accent1"/>
-          </a:effectRef>
-          <a:fontRef idx="minor">
-            <a:schemeClr val="lt1"/>
-          </a:fontRef>
-        </p:style>
-        <p:txBody>
-          <a:bodyPr rtlCol="0" anchor="ctr"/>
-          <a:lstStyle/>
-          <a:p>
-            <a:pPr algn="ctr"/>
-          </a:p>
-        </p:txBody>
-      </p:sp>
-      <p:sp>
-        <p:nvSpPr>
-          <p:cNvPr id="1499" name="Oval 1498"/>
-          <p:cNvSpPr/>
-          <p:nvPr/>
-        </p:nvSpPr>
-        <p:spPr>
-          <a:xfrm>
-            <a:off x="3516087" y="3983331"/>
-            <a:ext cx="76000" cy="76000"/>
-          </a:xfrm>
-          <a:prstGeom prst="ellipse">
-            <a:avLst/>
-          </a:prstGeom>
-          <a:noFill/>
-          <a:ln w="13970">
-            <a:solidFill>
-              <a:srgbClr val="D4A300"/>
-            </a:solidFill>
-          </a:ln>
-          <a:effectLst/>
-        </p:spPr>
-        <p:style>
-          <a:lnRef idx="1">
-            <a:schemeClr val="accent1"/>
-          </a:lnRef>
-          <a:fillRef idx="3">
-            <a:schemeClr val="accent1"/>
-          </a:fillRef>
-          <a:effectRef idx="2">
-            <a:schemeClr val="accent1"/>
-          </a:effectRef>
-          <a:fontRef idx="minor">
-            <a:schemeClr val="lt1"/>
-          </a:fontRef>
-        </p:style>
-        <p:txBody>
-          <a:bodyPr rtlCol="0" anchor="ctr"/>
-          <a:lstStyle/>
-          <a:p>
-            <a:pPr algn="ctr"/>
-          </a:p>
-        </p:txBody>
-      </p:sp>
-      <p:sp>
-        <p:nvSpPr>
-          <p:cNvPr id="1500" name="Oval 1499"/>
-          <p:cNvSpPr/>
-          <p:nvPr/>
-        </p:nvSpPr>
-        <p:spPr>
-          <a:xfrm>
-            <a:off x="3820301" y="3995729"/>
-            <a:ext cx="76000" cy="76000"/>
-          </a:xfrm>
-          <a:prstGeom prst="ellipse">
-            <a:avLst/>
-          </a:prstGeom>
-          <a:noFill/>
-          <a:ln w="13970">
-            <a:solidFill>
-              <a:srgbClr val="D4A300"/>
-            </a:solidFill>
-          </a:ln>
-          <a:effectLst/>
-        </p:spPr>
-        <p:style>
-          <a:lnRef idx="1">
-            <a:schemeClr val="accent1"/>
-          </a:lnRef>
-          <a:fillRef idx="3">
-            <a:schemeClr val="accent1"/>
-          </a:fillRef>
-          <a:effectRef idx="2">
-            <a:schemeClr val="accent1"/>
-          </a:effectRef>
-          <a:fontRef idx="minor">
-            <a:schemeClr val="lt1"/>
-          </a:fontRef>
-        </p:style>
-        <p:txBody>
-          <a:bodyPr rtlCol="0" anchor="ctr"/>
-          <a:lstStyle/>
-          <a:p>
-            <a:pPr algn="ctr"/>
-          </a:p>
-        </p:txBody>
-      </p:sp>
-      <p:sp>
-        <p:nvSpPr>
-          <p:cNvPr id="1501" name="Oval 1500"/>
-          <p:cNvSpPr/>
-          <p:nvPr/>
-        </p:nvSpPr>
-        <p:spPr>
-          <a:xfrm>
-            <a:off x="8117451" y="4005391"/>
-            <a:ext cx="76000" cy="76000"/>
-          </a:xfrm>
-          <a:prstGeom prst="ellipse">
-            <a:avLst/>
-          </a:prstGeom>
-          <a:noFill/>
-          <a:ln w="13970">
-            <a:solidFill>
-              <a:srgbClr val="D4A300"/>
-            </a:solidFill>
-          </a:ln>
-          <a:effectLst/>
-        </p:spPr>
-        <p:style>
-          <a:lnRef idx="1">
-            <a:schemeClr val="accent1"/>
-          </a:lnRef>
-          <a:fillRef idx="3">
-            <a:schemeClr val="accent1"/>
-          </a:fillRef>
-          <a:effectRef idx="2">
-            <a:schemeClr val="accent1"/>
-          </a:effectRef>
-          <a:fontRef idx="minor">
-            <a:schemeClr val="lt1"/>
-          </a:fontRef>
-        </p:style>
-        <p:txBody>
-          <a:bodyPr rtlCol="0" anchor="ctr"/>
-          <a:lstStyle/>
-          <a:p>
-            <a:pPr algn="ctr"/>
-          </a:p>
-        </p:txBody>
-      </p:sp>
-      <p:sp>
-        <p:nvSpPr>
-          <p:cNvPr id="1502" name="Oval 1501"/>
-          <p:cNvSpPr/>
-          <p:nvPr/>
-        </p:nvSpPr>
-        <p:spPr>
-          <a:xfrm>
-            <a:off x="2855236" y="4013262"/>
-            <a:ext cx="76000" cy="76000"/>
-          </a:xfrm>
-          <a:prstGeom prst="ellipse">
-            <a:avLst/>
-          </a:prstGeom>
-          <a:noFill/>
-          <a:ln w="13970">
-            <a:solidFill>
-              <a:srgbClr val="D4A300"/>
-            </a:solidFill>
-          </a:ln>
-          <a:effectLst/>
-        </p:spPr>
-        <p:style>
-          <a:lnRef idx="1">
-            <a:schemeClr val="accent1"/>
-          </a:lnRef>
-          <a:fillRef idx="3">
-            <a:schemeClr val="accent1"/>
-          </a:fillRef>
-          <a:effectRef idx="2">
-            <a:schemeClr val="accent1"/>
-          </a:effectRef>
-          <a:fontRef idx="minor">
-            <a:schemeClr val="lt1"/>
-          </a:fontRef>
-        </p:style>
-        <p:txBody>
-          <a:bodyPr rtlCol="0" anchor="ctr"/>
-          <a:lstStyle/>
-          <a:p>
-            <a:pPr algn="ctr"/>
-          </a:p>
-        </p:txBody>
-      </p:sp>
-      <p:sp>
-        <p:nvSpPr>
-          <p:cNvPr id="1503" name="Oval 1502"/>
-          <p:cNvSpPr/>
-          <p:nvPr/>
-        </p:nvSpPr>
-        <p:spPr>
-          <a:xfrm>
-            <a:off x="7592584" y="4024305"/>
-            <a:ext cx="76000" cy="76000"/>
-          </a:xfrm>
-          <a:prstGeom prst="ellipse">
-            <a:avLst/>
-          </a:prstGeom>
-          <a:noFill/>
-          <a:ln w="13970">
-            <a:solidFill>
-              <a:srgbClr val="D4A300"/>
-            </a:solidFill>
-          </a:ln>
-          <a:effectLst/>
-        </p:spPr>
-        <p:style>
-          <a:lnRef idx="1">
-            <a:schemeClr val="accent1"/>
-          </a:lnRef>
-          <a:fillRef idx="3">
-            <a:schemeClr val="accent1"/>
-          </a:fillRef>
-          <a:effectRef idx="2">
-            <a:schemeClr val="accent1"/>
-          </a:effectRef>
-          <a:fontRef idx="minor">
-            <a:schemeClr val="lt1"/>
-          </a:fontRef>
-        </p:style>
-        <p:txBody>
-          <a:bodyPr rtlCol="0" anchor="ctr"/>
-          <a:lstStyle/>
-          <a:p>
-            <a:pPr algn="ctr"/>
-          </a:p>
-        </p:txBody>
-      </p:sp>
-      <p:sp>
-        <p:nvSpPr>
-          <p:cNvPr id="1504" name="Oval 1503"/>
-          <p:cNvSpPr/>
-          <p:nvPr/>
-        </p:nvSpPr>
-        <p:spPr>
-          <a:xfrm>
-            <a:off x="4718688" y="4030862"/>
-            <a:ext cx="76000" cy="76000"/>
-          </a:xfrm>
-          <a:prstGeom prst="ellipse">
-            <a:avLst/>
-          </a:prstGeom>
-          <a:noFill/>
-          <a:ln w="13970">
-            <a:solidFill>
-              <a:srgbClr val="D4A300"/>
-            </a:solidFill>
-          </a:ln>
-          <a:effectLst/>
-        </p:spPr>
-        <p:style>
-          <a:lnRef idx="1">
-            <a:schemeClr val="accent1"/>
-          </a:lnRef>
-          <a:fillRef idx="3">
-            <a:schemeClr val="accent1"/>
-          </a:fillRef>
-          <a:effectRef idx="2">
-            <a:schemeClr val="accent1"/>
-          </a:effectRef>
-          <a:fontRef idx="minor">
-            <a:schemeClr val="lt1"/>
-          </a:fontRef>
-        </p:style>
-        <p:txBody>
-          <a:bodyPr rtlCol="0" anchor="ctr"/>
-          <a:lstStyle/>
-          <a:p>
-            <a:pPr algn="ctr"/>
-          </a:p>
-        </p:txBody>
-      </p:sp>
-      <p:sp>
-        <p:nvSpPr>
-          <p:cNvPr id="1505" name="Oval 1504"/>
-          <p:cNvSpPr/>
-          <p:nvPr/>
-        </p:nvSpPr>
-        <p:spPr>
-          <a:xfrm>
-            <a:off x="4214017" y="4036590"/>
-            <a:ext cx="76000" cy="76000"/>
-          </a:xfrm>
-          <a:prstGeom prst="ellipse">
-            <a:avLst/>
-          </a:prstGeom>
-          <a:noFill/>
-          <a:ln w="13970">
-            <a:solidFill>
-              <a:srgbClr val="D4A300"/>
-            </a:solidFill>
-          </a:ln>
-          <a:effectLst/>
-        </p:spPr>
-        <p:style>
-          <a:lnRef idx="1">
-            <a:schemeClr val="accent1"/>
-          </a:lnRef>
-          <a:fillRef idx="3">
-            <a:schemeClr val="accent1"/>
-          </a:fillRef>
-          <a:effectRef idx="2">
-            <a:schemeClr val="accent1"/>
-          </a:effectRef>
-          <a:fontRef idx="minor">
-            <a:schemeClr val="lt1"/>
-          </a:fontRef>
-        </p:style>
-        <p:txBody>
-          <a:bodyPr rtlCol="0" anchor="ctr"/>
-          <a:lstStyle/>
-          <a:p>
-            <a:pPr algn="ctr"/>
-          </a:p>
-        </p:txBody>
-      </p:sp>
-      <p:sp>
-        <p:nvSpPr>
-          <p:cNvPr id="1506" name="Oval 1505"/>
-          <p:cNvSpPr/>
-          <p:nvPr/>
-        </p:nvSpPr>
-        <p:spPr>
-          <a:xfrm>
-            <a:off x="3587466" y="4039926"/>
-            <a:ext cx="76000" cy="76000"/>
-          </a:xfrm>
-          <a:prstGeom prst="ellipse">
-            <a:avLst/>
-          </a:prstGeom>
-          <a:noFill/>
-          <a:ln w="13970">
-            <a:solidFill>
-              <a:srgbClr val="D4A300"/>
-            </a:solidFill>
-          </a:ln>
-          <a:effectLst/>
-        </p:spPr>
-        <p:style>
-          <a:lnRef idx="1">
-            <a:schemeClr val="accent1"/>
-          </a:lnRef>
-          <a:fillRef idx="3">
-            <a:schemeClr val="accent1"/>
-          </a:fillRef>
-          <a:effectRef idx="2">
-            <a:schemeClr val="accent1"/>
-          </a:effectRef>
-          <a:fontRef idx="minor">
-            <a:schemeClr val="lt1"/>
-          </a:fontRef>
-        </p:style>
-        <p:txBody>
-          <a:bodyPr rtlCol="0" anchor="ctr"/>
-          <a:lstStyle/>
-          <a:p>
-            <a:pPr algn="ctr"/>
-          </a:p>
-        </p:txBody>
-      </p:sp>
-      <p:sp>
-        <p:nvSpPr>
-          <p:cNvPr id="1507" name="Oval 1506"/>
-          <p:cNvSpPr/>
-          <p:nvPr/>
-        </p:nvSpPr>
-        <p:spPr>
-          <a:xfrm>
-            <a:off x="6475254" y="4050621"/>
-            <a:ext cx="76000" cy="76000"/>
-          </a:xfrm>
-          <a:prstGeom prst="ellipse">
-            <a:avLst/>
-          </a:prstGeom>
-          <a:noFill/>
-          <a:ln w="13970">
-            <a:solidFill>
-              <a:srgbClr val="D4A300"/>
-            </a:solidFill>
-          </a:ln>
-          <a:effectLst/>
-        </p:spPr>
-        <p:style>
-          <a:lnRef idx="1">
-            <a:schemeClr val="accent1"/>
-          </a:lnRef>
-          <a:fillRef idx="3">
-            <a:schemeClr val="accent1"/>
-          </a:fillRef>
-          <a:effectRef idx="2">
-            <a:schemeClr val="accent1"/>
-          </a:effectRef>
-          <a:fontRef idx="minor">
-            <a:schemeClr val="lt1"/>
-          </a:fontRef>
-        </p:style>
-        <p:txBody>
-          <a:bodyPr rtlCol="0" anchor="ctr"/>
-          <a:lstStyle/>
-          <a:p>
-            <a:pPr algn="ctr"/>
-          </a:p>
-        </p:txBody>
-      </p:sp>
-      <p:sp>
-        <p:nvSpPr>
-          <p:cNvPr id="1508" name="Oval 1507"/>
-          <p:cNvSpPr/>
-          <p:nvPr/>
-        </p:nvSpPr>
-        <p:spPr>
-          <a:xfrm>
-            <a:off x="4557511" y="4055421"/>
-            <a:ext cx="76000" cy="76000"/>
-          </a:xfrm>
-          <a:prstGeom prst="ellipse">
-            <a:avLst/>
-          </a:prstGeom>
-          <a:noFill/>
-          <a:ln w="13970">
-            <a:solidFill>
-              <a:srgbClr val="D4A300"/>
-            </a:solidFill>
-          </a:ln>
-          <a:effectLst/>
-        </p:spPr>
-        <p:style>
-          <a:lnRef idx="1">
-            <a:schemeClr val="accent1"/>
-          </a:lnRef>
-          <a:fillRef idx="3">
-            <a:schemeClr val="accent1"/>
-          </a:fillRef>
-          <a:effectRef idx="2">
-            <a:schemeClr val="accent1"/>
-          </a:effectRef>
-          <a:fontRef idx="minor">
-            <a:schemeClr val="lt1"/>
-          </a:fontRef>
-        </p:style>
-        <p:txBody>
-          <a:bodyPr rtlCol="0" anchor="ctr"/>
-          <a:lstStyle/>
-          <a:p>
-            <a:pPr algn="ctr"/>
-          </a:p>
-        </p:txBody>
-      </p:sp>
-      <p:sp>
-        <p:nvSpPr>
-          <p:cNvPr id="1509" name="Oval 1508"/>
-          <p:cNvSpPr/>
-          <p:nvPr/>
-        </p:nvSpPr>
-        <p:spPr>
-          <a:xfrm>
-            <a:off x="4051146" y="4071552"/>
-            <a:ext cx="76000" cy="76000"/>
-          </a:xfrm>
-          <a:prstGeom prst="ellipse">
-            <a:avLst/>
-          </a:prstGeom>
-          <a:noFill/>
-          <a:ln w="13970">
-            <a:solidFill>
-              <a:srgbClr val="D4A300"/>
-            </a:solidFill>
-          </a:ln>
-          <a:effectLst/>
-        </p:spPr>
-        <p:style>
-          <a:lnRef idx="1">
-            <a:schemeClr val="accent1"/>
-          </a:lnRef>
-          <a:fillRef idx="3">
-            <a:schemeClr val="accent1"/>
-          </a:fillRef>
-          <a:effectRef idx="2">
-            <a:schemeClr val="accent1"/>
-          </a:effectRef>
-          <a:fontRef idx="minor">
-            <a:schemeClr val="lt1"/>
-          </a:fontRef>
-        </p:style>
-        <p:txBody>
-          <a:bodyPr rtlCol="0" anchor="ctr"/>
-          <a:lstStyle/>
-          <a:p>
-            <a:pPr algn="ctr"/>
-          </a:p>
-        </p:txBody>
-      </p:sp>
-      <p:sp>
-        <p:nvSpPr>
-          <p:cNvPr id="1510" name="Oval 1509"/>
-          <p:cNvSpPr/>
-          <p:nvPr/>
-        </p:nvSpPr>
-        <p:spPr>
-          <a:xfrm>
-            <a:off x="3654275" y="4078128"/>
-            <a:ext cx="76000" cy="76000"/>
-          </a:xfrm>
-          <a:prstGeom prst="ellipse">
-            <a:avLst/>
-          </a:prstGeom>
-          <a:noFill/>
-          <a:ln w="13970">
-            <a:solidFill>
-              <a:srgbClr val="D4A300"/>
-            </a:solidFill>
-          </a:ln>
-          <a:effectLst/>
-        </p:spPr>
-        <p:style>
-          <a:lnRef idx="1">
-            <a:schemeClr val="accent1"/>
-          </a:lnRef>
-          <a:fillRef idx="3">
-            <a:schemeClr val="accent1"/>
-          </a:fillRef>
-          <a:effectRef idx="2">
-            <a:schemeClr val="accent1"/>
-          </a:effectRef>
-          <a:fontRef idx="minor">
-            <a:schemeClr val="lt1"/>
-          </a:fontRef>
-        </p:style>
-        <p:txBody>
-          <a:bodyPr rtlCol="0" anchor="ctr"/>
-          <a:lstStyle/>
-          <a:p>
-            <a:pPr algn="ctr"/>
-          </a:p>
-        </p:txBody>
-      </p:sp>
-      <p:sp>
-        <p:nvSpPr>
-          <p:cNvPr id="1511" name="Oval 1510"/>
-          <p:cNvSpPr/>
-          <p:nvPr/>
-        </p:nvSpPr>
-        <p:spPr>
-          <a:xfrm>
-            <a:off x="4007383" y="4087890"/>
-            <a:ext cx="76000" cy="76000"/>
-          </a:xfrm>
-          <a:prstGeom prst="ellipse">
-            <a:avLst/>
-          </a:prstGeom>
-          <a:noFill/>
-          <a:ln w="13970">
-            <a:solidFill>
-              <a:srgbClr val="D4A300"/>
-            </a:solidFill>
-          </a:ln>
-          <a:effectLst/>
-        </p:spPr>
-        <p:style>
-          <a:lnRef idx="1">
-            <a:schemeClr val="accent1"/>
-          </a:lnRef>
-          <a:fillRef idx="3">
-            <a:schemeClr val="accent1"/>
-          </a:fillRef>
-          <a:effectRef idx="2">
-            <a:schemeClr val="accent1"/>
-          </a:effectRef>
-          <a:fontRef idx="minor">
-            <a:schemeClr val="lt1"/>
-          </a:fontRef>
-        </p:style>
-        <p:txBody>
-          <a:bodyPr rtlCol="0" anchor="ctr"/>
-          <a:lstStyle/>
-          <a:p>
-            <a:pPr algn="ctr"/>
-          </a:p>
-        </p:txBody>
-      </p:sp>
-      <p:sp>
-        <p:nvSpPr>
-          <p:cNvPr id="1512" name="Oval 1511"/>
-          <p:cNvSpPr/>
-          <p:nvPr/>
-        </p:nvSpPr>
-        <p:spPr>
-          <a:xfrm>
-            <a:off x="4261596" y="4098861"/>
-            <a:ext cx="76000" cy="76000"/>
-          </a:xfrm>
-          <a:prstGeom prst="ellipse">
-            <a:avLst/>
-          </a:prstGeom>
-          <a:noFill/>
-          <a:ln w="13970">
-            <a:solidFill>
-              <a:srgbClr val="D4A300"/>
-            </a:solidFill>
-          </a:ln>
-          <a:effectLst/>
-        </p:spPr>
-        <p:style>
-          <a:lnRef idx="1">
-            <a:schemeClr val="accent1"/>
-          </a:lnRef>
-          <a:fillRef idx="3">
-            <a:schemeClr val="accent1"/>
-          </a:fillRef>
-          <a:effectRef idx="2">
-            <a:schemeClr val="accent1"/>
-          </a:effectRef>
-          <a:fontRef idx="minor">
-            <a:schemeClr val="lt1"/>
-          </a:fontRef>
-        </p:style>
-        <p:txBody>
-          <a:bodyPr rtlCol="0" anchor="ctr"/>
-          <a:lstStyle/>
-          <a:p>
-            <a:pPr algn="ctr"/>
-          </a:p>
-        </p:txBody>
-      </p:sp>
-      <p:sp>
-        <p:nvSpPr>
-          <p:cNvPr id="1513" name="Oval 1512"/>
-          <p:cNvSpPr/>
-          <p:nvPr/>
-        </p:nvSpPr>
-        <p:spPr>
-          <a:xfrm>
-            <a:off x="4102234" y="4101849"/>
-            <a:ext cx="76000" cy="76000"/>
-          </a:xfrm>
-          <a:prstGeom prst="ellipse">
-            <a:avLst/>
-          </a:prstGeom>
-          <a:noFill/>
-          <a:ln w="13970">
-            <a:solidFill>
-              <a:srgbClr val="D4A300"/>
-            </a:solidFill>
-          </a:ln>
-          <a:effectLst/>
-        </p:spPr>
-        <p:style>
-          <a:lnRef idx="1">
-            <a:schemeClr val="accent1"/>
-          </a:lnRef>
-          <a:fillRef idx="3">
-            <a:schemeClr val="accent1"/>
-          </a:fillRef>
-          <a:effectRef idx="2">
-            <a:schemeClr val="accent1"/>
-          </a:effectRef>
-          <a:fontRef idx="minor">
-            <a:schemeClr val="lt1"/>
-          </a:fontRef>
-        </p:style>
-        <p:txBody>
-          <a:bodyPr rtlCol="0" anchor="ctr"/>
-          <a:lstStyle/>
-          <a:p>
-            <a:pPr algn="ctr"/>
-          </a:p>
-        </p:txBody>
-      </p:sp>
-      <p:sp>
-        <p:nvSpPr>
-          <p:cNvPr id="1514" name="Oval 1513"/>
-          <p:cNvSpPr/>
-          <p:nvPr/>
-        </p:nvSpPr>
-        <p:spPr>
-          <a:xfrm>
-            <a:off x="3153277" y="4105317"/>
-            <a:ext cx="76000" cy="76000"/>
-          </a:xfrm>
-          <a:prstGeom prst="ellipse">
-            <a:avLst/>
-          </a:prstGeom>
-          <a:noFill/>
-          <a:ln w="13970">
-            <a:solidFill>
-              <a:srgbClr val="D4A300"/>
-            </a:solidFill>
-          </a:ln>
-          <a:effectLst/>
-        </p:spPr>
-        <p:style>
-          <a:lnRef idx="1">
-            <a:schemeClr val="accent1"/>
-          </a:lnRef>
-          <a:fillRef idx="3">
-            <a:schemeClr val="accent1"/>
-          </a:fillRef>
-          <a:effectRef idx="2">
-            <a:schemeClr val="accent1"/>
-          </a:effectRef>
-          <a:fontRef idx="minor">
-            <a:schemeClr val="lt1"/>
-          </a:fontRef>
-        </p:style>
-        <p:txBody>
-          <a:bodyPr rtlCol="0" anchor="ctr"/>
-          <a:lstStyle/>
-          <a:p>
-            <a:pPr algn="ctr"/>
-          </a:p>
-        </p:txBody>
-      </p:sp>
-      <p:sp>
-        <p:nvSpPr>
-          <p:cNvPr id="1515" name="Oval 1514"/>
-          <p:cNvSpPr/>
-          <p:nvPr/>
-        </p:nvSpPr>
-        <p:spPr>
-          <a:xfrm>
-            <a:off x="9717944" y="4110661"/>
-            <a:ext cx="76000" cy="76000"/>
-          </a:xfrm>
-          <a:prstGeom prst="ellipse">
-            <a:avLst/>
-          </a:prstGeom>
-          <a:noFill/>
-          <a:ln w="13970">
-            <a:solidFill>
-              <a:srgbClr val="D4A300"/>
-            </a:solidFill>
-          </a:ln>
-          <a:effectLst/>
-        </p:spPr>
-        <p:style>
-          <a:lnRef idx="1">
-            <a:schemeClr val="accent1"/>
-          </a:lnRef>
-          <a:fillRef idx="3">
-            <a:schemeClr val="accent1"/>
-          </a:fillRef>
-          <a:effectRef idx="2">
-            <a:schemeClr val="accent1"/>
-          </a:effectRef>
-          <a:fontRef idx="minor">
-            <a:schemeClr val="lt1"/>
-          </a:fontRef>
-        </p:style>
-        <p:txBody>
-          <a:bodyPr rtlCol="0" anchor="ctr"/>
-          <a:lstStyle/>
-          <a:p>
-            <a:pPr algn="ctr"/>
-          </a:p>
-        </p:txBody>
-      </p:sp>
-      <p:sp>
-        <p:nvSpPr>
-          <p:cNvPr id="1516" name="Oval 1515"/>
-          <p:cNvSpPr/>
-          <p:nvPr/>
-        </p:nvSpPr>
-        <p:spPr>
-          <a:xfrm>
-            <a:off x="3319532" y="4164696"/>
-            <a:ext cx="76000" cy="76000"/>
-          </a:xfrm>
-          <a:prstGeom prst="ellipse">
-            <a:avLst/>
-          </a:prstGeom>
-          <a:noFill/>
-          <a:ln w="13970">
-            <a:solidFill>
-              <a:srgbClr val="D4A300"/>
-            </a:solidFill>
-          </a:ln>
-          <a:effectLst/>
-        </p:spPr>
-        <p:style>
-          <a:lnRef idx="1">
-            <a:schemeClr val="accent1"/>
-          </a:lnRef>
-          <a:fillRef idx="3">
-            <a:schemeClr val="accent1"/>
-          </a:fillRef>
-          <a:effectRef idx="2">
-            <a:schemeClr val="accent1"/>
-          </a:effectRef>
-          <a:fontRef idx="minor">
-            <a:schemeClr val="lt1"/>
-          </a:fontRef>
-        </p:style>
-        <p:txBody>
-          <a:bodyPr rtlCol="0" anchor="ctr"/>
-          <a:lstStyle/>
-          <a:p>
-            <a:pPr algn="ctr"/>
-          </a:p>
-        </p:txBody>
-      </p:sp>
-      <p:sp>
-        <p:nvSpPr>
-          <p:cNvPr id="1517" name="Oval 1516"/>
-          <p:cNvSpPr/>
-          <p:nvPr/>
-        </p:nvSpPr>
-        <p:spPr>
-          <a:xfrm>
-            <a:off x="6550887" y="4167826"/>
-            <a:ext cx="76000" cy="76000"/>
-          </a:xfrm>
-          <a:prstGeom prst="ellipse">
-            <a:avLst/>
-          </a:prstGeom>
-          <a:noFill/>
-          <a:ln w="13970">
-            <a:solidFill>
-              <a:srgbClr val="D4A300"/>
-            </a:solidFill>
-          </a:ln>
-          <a:effectLst/>
-        </p:spPr>
-        <p:style>
-          <a:lnRef idx="1">
-            <a:schemeClr val="accent1"/>
-          </a:lnRef>
-          <a:fillRef idx="3">
-            <a:schemeClr val="accent1"/>
-          </a:fillRef>
-          <a:effectRef idx="2">
-            <a:schemeClr val="accent1"/>
-          </a:effectRef>
-          <a:fontRef idx="minor">
-            <a:schemeClr val="lt1"/>
-          </a:fontRef>
-        </p:style>
-        <p:txBody>
-          <a:bodyPr rtlCol="0" anchor="ctr"/>
-          <a:lstStyle/>
-          <a:p>
-            <a:pPr algn="ctr"/>
-          </a:p>
-        </p:txBody>
-      </p:sp>
-      <p:sp>
-        <p:nvSpPr>
-          <p:cNvPr id="1518" name="Oval 1517"/>
-          <p:cNvSpPr/>
-          <p:nvPr/>
-        </p:nvSpPr>
-        <p:spPr>
-          <a:xfrm>
-            <a:off x="9622227" y="4169199"/>
-            <a:ext cx="76000" cy="76000"/>
-          </a:xfrm>
-          <a:prstGeom prst="ellipse">
-            <a:avLst/>
-          </a:prstGeom>
-          <a:noFill/>
-          <a:ln w="13970">
-            <a:solidFill>
-              <a:srgbClr val="D4A300"/>
-            </a:solidFill>
-          </a:ln>
-          <a:effectLst/>
-        </p:spPr>
-        <p:style>
-          <a:lnRef idx="1">
-            <a:schemeClr val="accent1"/>
-          </a:lnRef>
-          <a:fillRef idx="3">
-            <a:schemeClr val="accent1"/>
-          </a:fillRef>
-          <a:effectRef idx="2">
-            <a:schemeClr val="accent1"/>
-          </a:effectRef>
-          <a:fontRef idx="minor">
-            <a:schemeClr val="lt1"/>
-          </a:fontRef>
-        </p:style>
-        <p:txBody>
-          <a:bodyPr rtlCol="0" anchor="ctr"/>
-          <a:lstStyle/>
-          <a:p>
-            <a:pPr algn="ctr"/>
-          </a:p>
-        </p:txBody>
-      </p:sp>
-      <p:sp>
-        <p:nvSpPr>
-          <p:cNvPr id="1519" name="Oval 1518"/>
-          <p:cNvSpPr/>
-          <p:nvPr/>
-        </p:nvSpPr>
-        <p:spPr>
-          <a:xfrm>
-            <a:off x="4273564" y="4170593"/>
-            <a:ext cx="76000" cy="76000"/>
-          </a:xfrm>
-          <a:prstGeom prst="ellipse">
-            <a:avLst/>
-          </a:prstGeom>
-          <a:noFill/>
-          <a:ln w="13970">
-            <a:solidFill>
-              <a:srgbClr val="D4A300"/>
-            </a:solidFill>
-          </a:ln>
-          <a:effectLst/>
-        </p:spPr>
-        <p:style>
-          <a:lnRef idx="1">
-            <a:schemeClr val="accent1"/>
-          </a:lnRef>
-          <a:fillRef idx="3">
-            <a:schemeClr val="accent1"/>
-          </a:fillRef>
-          <a:effectRef idx="2">
-            <a:schemeClr val="accent1"/>
-          </a:effectRef>
-          <a:fontRef idx="minor">
-            <a:schemeClr val="lt1"/>
-          </a:fontRef>
-        </p:style>
-        <p:txBody>
-          <a:bodyPr rtlCol="0" anchor="ctr"/>
-          <a:lstStyle/>
-          <a:p>
-            <a:pPr algn="ctr"/>
-          </a:p>
-        </p:txBody>
-      </p:sp>
-      <p:sp>
-        <p:nvSpPr>
-          <p:cNvPr id="1520" name="Oval 1519"/>
-          <p:cNvSpPr/>
-          <p:nvPr/>
-        </p:nvSpPr>
-        <p:spPr>
-          <a:xfrm>
-            <a:off x="3136147" y="4172417"/>
-            <a:ext cx="76000" cy="76000"/>
-          </a:xfrm>
-          <a:prstGeom prst="ellipse">
-            <a:avLst/>
-          </a:prstGeom>
-          <a:noFill/>
-          <a:ln w="13970">
-            <a:solidFill>
-              <a:srgbClr val="D4A300"/>
-            </a:solidFill>
-          </a:ln>
-          <a:effectLst/>
-        </p:spPr>
-        <p:style>
-          <a:lnRef idx="1">
-            <a:schemeClr val="accent1"/>
-          </a:lnRef>
-          <a:fillRef idx="3">
-            <a:schemeClr val="accent1"/>
-          </a:fillRef>
-          <a:effectRef idx="2">
-            <a:schemeClr val="accent1"/>
-          </a:effectRef>
-          <a:fontRef idx="minor">
-            <a:schemeClr val="lt1"/>
-          </a:fontRef>
-        </p:style>
-        <p:txBody>
-          <a:bodyPr rtlCol="0" anchor="ctr"/>
-          <a:lstStyle/>
-          <a:p>
-            <a:pPr algn="ctr"/>
-          </a:p>
-        </p:txBody>
-      </p:sp>
-      <p:sp>
-        <p:nvSpPr>
-          <p:cNvPr id="1521" name="Oval 1520"/>
-          <p:cNvSpPr/>
-          <p:nvPr/>
-        </p:nvSpPr>
-        <p:spPr>
-          <a:xfrm>
-            <a:off x="6843369" y="4185963"/>
-            <a:ext cx="76000" cy="76000"/>
-          </a:xfrm>
-          <a:prstGeom prst="ellipse">
-            <a:avLst/>
-          </a:prstGeom>
-          <a:noFill/>
-          <a:ln w="13970">
-            <a:solidFill>
-              <a:srgbClr val="D4A300"/>
-            </a:solidFill>
-          </a:ln>
-          <a:effectLst/>
-        </p:spPr>
-        <p:style>
-          <a:lnRef idx="1">
-            <a:schemeClr val="accent1"/>
-          </a:lnRef>
-          <a:fillRef idx="3">
-            <a:schemeClr val="accent1"/>
-          </a:fillRef>
-          <a:effectRef idx="2">
-            <a:schemeClr val="accent1"/>
-          </a:effectRef>
-          <a:fontRef idx="minor">
-            <a:schemeClr val="lt1"/>
-          </a:fontRef>
-        </p:style>
-        <p:txBody>
-          <a:bodyPr rtlCol="0" anchor="ctr"/>
-          <a:lstStyle/>
-          <a:p>
-            <a:pPr algn="ctr"/>
-          </a:p>
-        </p:txBody>
-      </p:sp>
-      <p:sp>
-        <p:nvSpPr>
-          <p:cNvPr id="1522" name="Oval 1521"/>
-          <p:cNvSpPr/>
-          <p:nvPr/>
-        </p:nvSpPr>
-        <p:spPr>
-          <a:xfrm>
-            <a:off x="4267311" y="4186092"/>
-            <a:ext cx="76000" cy="76000"/>
-          </a:xfrm>
-          <a:prstGeom prst="ellipse">
-            <a:avLst/>
-          </a:prstGeom>
-          <a:noFill/>
-          <a:ln w="13970">
-            <a:solidFill>
-              <a:srgbClr val="D4A300"/>
-            </a:solidFill>
-          </a:ln>
-          <a:effectLst/>
-        </p:spPr>
-        <p:style>
-          <a:lnRef idx="1">
-            <a:schemeClr val="accent1"/>
-          </a:lnRef>
-          <a:fillRef idx="3">
-            <a:schemeClr val="accent1"/>
-          </a:fillRef>
-          <a:effectRef idx="2">
-            <a:schemeClr val="accent1"/>
-          </a:effectRef>
-          <a:fontRef idx="minor">
-            <a:schemeClr val="lt1"/>
-          </a:fontRef>
-        </p:style>
-        <p:txBody>
-          <a:bodyPr rtlCol="0" anchor="ctr"/>
-          <a:lstStyle/>
-          <a:p>
-            <a:pPr algn="ctr"/>
-          </a:p>
-        </p:txBody>
-      </p:sp>
-      <p:sp>
-        <p:nvSpPr>
-          <p:cNvPr id="1523" name="Oval 1522"/>
-          <p:cNvSpPr/>
-          <p:nvPr/>
-        </p:nvSpPr>
-        <p:spPr>
-          <a:xfrm>
-            <a:off x="4041749" y="4198411"/>
-            <a:ext cx="76000" cy="76000"/>
-          </a:xfrm>
-          <a:prstGeom prst="ellipse">
-            <a:avLst/>
-          </a:prstGeom>
-          <a:noFill/>
-          <a:ln w="13970">
-            <a:solidFill>
-              <a:srgbClr val="D4A300"/>
-            </a:solidFill>
-          </a:ln>
-          <a:effectLst/>
-        </p:spPr>
-        <p:style>
-          <a:lnRef idx="1">
-            <a:schemeClr val="accent1"/>
-          </a:lnRef>
-          <a:fillRef idx="3">
-            <a:schemeClr val="accent1"/>
-          </a:fillRef>
-          <a:effectRef idx="2">
-            <a:schemeClr val="accent1"/>
-          </a:effectRef>
-          <a:fontRef idx="minor">
-            <a:schemeClr val="lt1"/>
-          </a:fontRef>
-        </p:style>
-        <p:txBody>
-          <a:bodyPr rtlCol="0" anchor="ctr"/>
-          <a:lstStyle/>
-          <a:p>
-            <a:pPr algn="ctr"/>
-          </a:p>
-        </p:txBody>
-      </p:sp>
-      <p:sp>
-        <p:nvSpPr>
-          <p:cNvPr id="1524" name="Oval 1523"/>
-          <p:cNvSpPr/>
-          <p:nvPr/>
-        </p:nvSpPr>
-        <p:spPr>
-          <a:xfrm>
-            <a:off x="7384628" y="4227926"/>
-            <a:ext cx="76000" cy="76000"/>
-          </a:xfrm>
-          <a:prstGeom prst="ellipse">
-            <a:avLst/>
-          </a:prstGeom>
-          <a:noFill/>
-          <a:ln w="13970">
-            <a:solidFill>
-              <a:srgbClr val="D4A300"/>
-            </a:solidFill>
-          </a:ln>
-          <a:effectLst/>
-        </p:spPr>
-        <p:style>
-          <a:lnRef idx="1">
-            <a:schemeClr val="accent1"/>
-          </a:lnRef>
-          <a:fillRef idx="3">
-            <a:schemeClr val="accent1"/>
-          </a:fillRef>
-          <a:effectRef idx="2">
-            <a:schemeClr val="accent1"/>
-          </a:effectRef>
-          <a:fontRef idx="minor">
-            <a:schemeClr val="lt1"/>
-          </a:fontRef>
-        </p:style>
-        <p:txBody>
-          <a:bodyPr rtlCol="0" anchor="ctr"/>
-          <a:lstStyle/>
-          <a:p>
-            <a:pPr algn="ctr"/>
-          </a:p>
-        </p:txBody>
-      </p:sp>
-      <p:sp>
-        <p:nvSpPr>
-          <p:cNvPr id="1525" name="Oval 1524"/>
-          <p:cNvSpPr/>
-          <p:nvPr/>
-        </p:nvSpPr>
-        <p:spPr>
-          <a:xfrm>
-            <a:off x="7483213" y="4232987"/>
-            <a:ext cx="76000" cy="76000"/>
-          </a:xfrm>
-          <a:prstGeom prst="ellipse">
-            <a:avLst/>
-          </a:prstGeom>
-          <a:noFill/>
-          <a:ln w="13970">
-            <a:solidFill>
-              <a:srgbClr val="D4A300"/>
-            </a:solidFill>
-          </a:ln>
-          <a:effectLst/>
-        </p:spPr>
-        <p:style>
-          <a:lnRef idx="1">
-            <a:schemeClr val="accent1"/>
-          </a:lnRef>
-          <a:fillRef idx="3">
-            <a:schemeClr val="accent1"/>
-          </a:fillRef>
-          <a:effectRef idx="2">
-            <a:schemeClr val="accent1"/>
-          </a:effectRef>
-          <a:fontRef idx="minor">
-            <a:schemeClr val="lt1"/>
-          </a:fontRef>
-        </p:style>
-        <p:txBody>
-          <a:bodyPr rtlCol="0" anchor="ctr"/>
-          <a:lstStyle/>
-          <a:p>
-            <a:pPr algn="ctr"/>
-          </a:p>
-        </p:txBody>
-      </p:sp>
-      <p:sp>
-        <p:nvSpPr>
-          <p:cNvPr id="1526" name="Oval 1525"/>
-          <p:cNvSpPr/>
-          <p:nvPr/>
-        </p:nvSpPr>
-        <p:spPr>
-          <a:xfrm>
-            <a:off x="7298634" y="4235714"/>
-            <a:ext cx="76000" cy="76000"/>
-          </a:xfrm>
-          <a:prstGeom prst="ellipse">
-            <a:avLst/>
-          </a:prstGeom>
-          <a:noFill/>
-          <a:ln w="13970">
-            <a:solidFill>
-              <a:srgbClr val="D4A300"/>
-            </a:solidFill>
-          </a:ln>
-          <a:effectLst/>
-        </p:spPr>
-        <p:style>
-          <a:lnRef idx="1">
-            <a:schemeClr val="accent1"/>
-          </a:lnRef>
-          <a:fillRef idx="3">
-            <a:schemeClr val="accent1"/>
-          </a:fillRef>
-          <a:effectRef idx="2">
-            <a:schemeClr val="accent1"/>
-          </a:effectRef>
-          <a:fontRef idx="minor">
-            <a:schemeClr val="lt1"/>
-          </a:fontRef>
-        </p:style>
-        <p:txBody>
-          <a:bodyPr rtlCol="0" anchor="ctr"/>
-          <a:lstStyle/>
-          <a:p>
-            <a:pPr algn="ctr"/>
-          </a:p>
-        </p:txBody>
-      </p:sp>
-      <p:sp>
-        <p:nvSpPr>
-          <p:cNvPr id="1527" name="Oval 1526"/>
-          <p:cNvSpPr/>
-          <p:nvPr/>
-        </p:nvSpPr>
-        <p:spPr>
-          <a:xfrm>
-            <a:off x="7461478" y="4237834"/>
-            <a:ext cx="76000" cy="76000"/>
-          </a:xfrm>
-          <a:prstGeom prst="ellipse">
-            <a:avLst/>
-          </a:prstGeom>
-          <a:noFill/>
-          <a:ln w="13970">
-            <a:solidFill>
-              <a:srgbClr val="D4A300"/>
-            </a:solidFill>
-          </a:ln>
-          <a:effectLst/>
-        </p:spPr>
-        <p:style>
-          <a:lnRef idx="1">
-            <a:schemeClr val="accent1"/>
-          </a:lnRef>
-          <a:fillRef idx="3">
-            <a:schemeClr val="accent1"/>
-          </a:fillRef>
-          <a:effectRef idx="2">
-            <a:schemeClr val="accent1"/>
-          </a:effectRef>
-          <a:fontRef idx="minor">
-            <a:schemeClr val="lt1"/>
-          </a:fontRef>
-        </p:style>
-        <p:txBody>
-          <a:bodyPr rtlCol="0" anchor="ctr"/>
-          <a:lstStyle/>
-          <a:p>
-            <a:pPr algn="ctr"/>
-          </a:p>
-        </p:txBody>
-      </p:sp>
-      <p:sp>
-        <p:nvSpPr>
-          <p:cNvPr id="1528" name="Oval 1527"/>
-          <p:cNvSpPr/>
-          <p:nvPr/>
-        </p:nvSpPr>
-        <p:spPr>
-          <a:xfrm>
-            <a:off x="4173682" y="4241764"/>
-            <a:ext cx="76000" cy="76000"/>
-          </a:xfrm>
-          <a:prstGeom prst="ellipse">
-            <a:avLst/>
-          </a:prstGeom>
-          <a:noFill/>
-          <a:ln w="13970">
-            <a:solidFill>
-              <a:srgbClr val="D4A300"/>
-            </a:solidFill>
-          </a:ln>
-          <a:effectLst/>
-        </p:spPr>
-        <p:style>
-          <a:lnRef idx="1">
-            <a:schemeClr val="accent1"/>
-          </a:lnRef>
-          <a:fillRef idx="3">
-            <a:schemeClr val="accent1"/>
-          </a:fillRef>
-          <a:effectRef idx="2">
-            <a:schemeClr val="accent1"/>
-          </a:effectRef>
-          <a:fontRef idx="minor">
-            <a:schemeClr val="lt1"/>
-          </a:fontRef>
-        </p:style>
-        <p:txBody>
-          <a:bodyPr rtlCol="0" anchor="ctr"/>
-          <a:lstStyle/>
-          <a:p>
-            <a:pPr algn="ctr"/>
-          </a:p>
-        </p:txBody>
-      </p:sp>
-      <p:sp>
-        <p:nvSpPr>
-          <p:cNvPr id="1529" name="Oval 1528"/>
-          <p:cNvSpPr/>
-          <p:nvPr/>
-        </p:nvSpPr>
-        <p:spPr>
-          <a:xfrm>
-            <a:off x="8179355" y="4254242"/>
-            <a:ext cx="76000" cy="76000"/>
-          </a:xfrm>
-          <a:prstGeom prst="ellipse">
-            <a:avLst/>
-          </a:prstGeom>
-          <a:noFill/>
-          <a:ln w="13970">
-            <a:solidFill>
-              <a:srgbClr val="D4A300"/>
-            </a:solidFill>
-          </a:ln>
-          <a:effectLst/>
-        </p:spPr>
-        <p:style>
-          <a:lnRef idx="1">
-            <a:schemeClr val="accent1"/>
-          </a:lnRef>
-          <a:fillRef idx="3">
-            <a:schemeClr val="accent1"/>
-          </a:fillRef>
-          <a:effectRef idx="2">
-            <a:schemeClr val="accent1"/>
-          </a:effectRef>
-          <a:fontRef idx="minor">
-            <a:schemeClr val="lt1"/>
-          </a:fontRef>
-        </p:style>
-        <p:txBody>
-          <a:bodyPr rtlCol="0" anchor="ctr"/>
-          <a:lstStyle/>
-          <a:p>
-            <a:pPr algn="ctr"/>
-          </a:p>
-        </p:txBody>
-      </p:sp>
-      <p:sp>
-        <p:nvSpPr>
-          <p:cNvPr id="1530" name="Oval 1529"/>
-          <p:cNvSpPr/>
-          <p:nvPr/>
-        </p:nvSpPr>
-        <p:spPr>
-          <a:xfrm>
-            <a:off x="1485507" y="4264225"/>
-            <a:ext cx="76000" cy="76000"/>
-          </a:xfrm>
-          <a:prstGeom prst="ellipse">
-            <a:avLst/>
-          </a:prstGeom>
-          <a:noFill/>
-          <a:ln w="13970">
-            <a:solidFill>
-              <a:srgbClr val="D4A300"/>
-            </a:solidFill>
-          </a:ln>
-          <a:effectLst/>
-        </p:spPr>
-        <p:style>
-          <a:lnRef idx="1">
-            <a:schemeClr val="accent1"/>
-          </a:lnRef>
-          <a:fillRef idx="3">
-            <a:schemeClr val="accent1"/>
-          </a:fillRef>
-          <a:effectRef idx="2">
-            <a:schemeClr val="accent1"/>
-          </a:effectRef>
-          <a:fontRef idx="minor">
-            <a:schemeClr val="lt1"/>
-          </a:fontRef>
-        </p:style>
-        <p:txBody>
-          <a:bodyPr rtlCol="0" anchor="ctr"/>
-          <a:lstStyle/>
-          <a:p>
-            <a:pPr algn="ctr"/>
-          </a:p>
-        </p:txBody>
-      </p:sp>
-      <p:sp>
-        <p:nvSpPr>
-          <p:cNvPr id="1531" name="Oval 1530"/>
-          <p:cNvSpPr/>
-          <p:nvPr/>
-        </p:nvSpPr>
-        <p:spPr>
-          <a:xfrm>
-            <a:off x="3886691" y="4271082"/>
-            <a:ext cx="76000" cy="76000"/>
-          </a:xfrm>
-          <a:prstGeom prst="ellipse">
-            <a:avLst/>
-          </a:prstGeom>
-          <a:noFill/>
-          <a:ln w="13970">
-            <a:solidFill>
-              <a:srgbClr val="D4A300"/>
-            </a:solidFill>
-          </a:ln>
-          <a:effectLst/>
-        </p:spPr>
-        <p:style>
-          <a:lnRef idx="1">
-            <a:schemeClr val="accent1"/>
-          </a:lnRef>
-          <a:fillRef idx="3">
-            <a:schemeClr val="accent1"/>
-          </a:fillRef>
-          <a:effectRef idx="2">
-            <a:schemeClr val="accent1"/>
-          </a:effectRef>
-          <a:fontRef idx="minor">
-            <a:schemeClr val="lt1"/>
-          </a:fontRef>
-        </p:style>
-        <p:txBody>
-          <a:bodyPr rtlCol="0" anchor="ctr"/>
-          <a:lstStyle/>
-          <a:p>
-            <a:pPr algn="ctr"/>
-          </a:p>
-        </p:txBody>
-      </p:sp>
-      <p:sp>
-        <p:nvSpPr>
-          <p:cNvPr id="1532" name="Oval 1531"/>
-          <p:cNvSpPr/>
-          <p:nvPr/>
-        </p:nvSpPr>
-        <p:spPr>
-          <a:xfrm>
-            <a:off x="4232132" y="4272976"/>
-            <a:ext cx="76000" cy="76000"/>
-          </a:xfrm>
-          <a:prstGeom prst="ellipse">
-            <a:avLst/>
-          </a:prstGeom>
-          <a:noFill/>
-          <a:ln w="13970">
-            <a:solidFill>
-              <a:srgbClr val="D4A300"/>
-            </a:solidFill>
-          </a:ln>
-          <a:effectLst/>
-        </p:spPr>
-        <p:style>
-          <a:lnRef idx="1">
-            <a:schemeClr val="accent1"/>
-          </a:lnRef>
-          <a:fillRef idx="3">
-            <a:schemeClr val="accent1"/>
-          </a:fillRef>
-          <a:effectRef idx="2">
-            <a:schemeClr val="accent1"/>
-          </a:effectRef>
-          <a:fontRef idx="minor">
-            <a:schemeClr val="lt1"/>
-          </a:fontRef>
-        </p:style>
-        <p:txBody>
-          <a:bodyPr rtlCol="0" anchor="ctr"/>
-          <a:lstStyle/>
-          <a:p>
-            <a:pPr algn="ctr"/>
-          </a:p>
-        </p:txBody>
-      </p:sp>
-      <p:sp>
-        <p:nvSpPr>
-          <p:cNvPr id="1533" name="Oval 1532"/>
-          <p:cNvSpPr/>
-          <p:nvPr/>
-        </p:nvSpPr>
-        <p:spPr>
-          <a:xfrm>
-            <a:off x="4043434" y="4297585"/>
-            <a:ext cx="76000" cy="76000"/>
-          </a:xfrm>
-          <a:prstGeom prst="ellipse">
-            <a:avLst/>
-          </a:prstGeom>
-          <a:noFill/>
-          <a:ln w="13970">
-            <a:solidFill>
-              <a:srgbClr val="D4A300"/>
-            </a:solidFill>
-          </a:ln>
-          <a:effectLst/>
-        </p:spPr>
-        <p:style>
-          <a:lnRef idx="1">
-            <a:schemeClr val="accent1"/>
-          </a:lnRef>
-          <a:fillRef idx="3">
-            <a:schemeClr val="accent1"/>
-          </a:fillRef>
-          <a:effectRef idx="2">
-            <a:schemeClr val="accent1"/>
-          </a:effectRef>
-          <a:fontRef idx="minor">
-            <a:schemeClr val="lt1"/>
-          </a:fontRef>
-        </p:style>
-        <p:txBody>
-          <a:bodyPr rtlCol="0" anchor="ctr"/>
-          <a:lstStyle/>
-          <a:p>
-            <a:pPr algn="ctr"/>
-          </a:p>
-        </p:txBody>
-      </p:sp>
-      <p:sp>
-        <p:nvSpPr>
-          <p:cNvPr id="1534" name="Oval 1533"/>
-          <p:cNvSpPr/>
-          <p:nvPr/>
-        </p:nvSpPr>
-        <p:spPr>
-          <a:xfrm>
-            <a:off x="1671123" y="4300286"/>
-            <a:ext cx="76000" cy="76000"/>
-          </a:xfrm>
-          <a:prstGeom prst="ellipse">
-            <a:avLst/>
-          </a:prstGeom>
-          <a:noFill/>
-          <a:ln w="13970">
-            <a:solidFill>
-              <a:srgbClr val="D4A300"/>
-            </a:solidFill>
-          </a:ln>
-          <a:effectLst/>
-        </p:spPr>
-        <p:style>
-          <a:lnRef idx="1">
-            <a:schemeClr val="accent1"/>
-          </a:lnRef>
-          <a:fillRef idx="3">
-            <a:schemeClr val="accent1"/>
-          </a:fillRef>
-          <a:effectRef idx="2">
-            <a:schemeClr val="accent1"/>
-          </a:effectRef>
-          <a:fontRef idx="minor">
-            <a:schemeClr val="lt1"/>
-          </a:fontRef>
-        </p:style>
-        <p:txBody>
-          <a:bodyPr rtlCol="0" anchor="ctr"/>
-          <a:lstStyle/>
-          <a:p>
-            <a:pPr algn="ctr"/>
-          </a:p>
-        </p:txBody>
-      </p:sp>
-      <p:sp>
-        <p:nvSpPr>
-          <p:cNvPr id="1535" name="Oval 1534"/>
-          <p:cNvSpPr/>
-          <p:nvPr/>
-        </p:nvSpPr>
-        <p:spPr>
-          <a:xfrm>
-            <a:off x="4300270" y="4317819"/>
-            <a:ext cx="76000" cy="76000"/>
-          </a:xfrm>
-          <a:prstGeom prst="ellipse">
-            <a:avLst/>
-          </a:prstGeom>
-          <a:noFill/>
-          <a:ln w="13970">
-            <a:solidFill>
-              <a:srgbClr val="D4A300"/>
-            </a:solidFill>
-          </a:ln>
-          <a:effectLst/>
-        </p:spPr>
-        <p:style>
-          <a:lnRef idx="1">
-            <a:schemeClr val="accent1"/>
-          </a:lnRef>
-          <a:fillRef idx="3">
-            <a:schemeClr val="accent1"/>
-          </a:fillRef>
-          <a:effectRef idx="2">
-            <a:schemeClr val="accent1"/>
-          </a:effectRef>
-          <a:fontRef idx="minor">
-            <a:schemeClr val="lt1"/>
-          </a:fontRef>
-        </p:style>
-        <p:txBody>
-          <a:bodyPr rtlCol="0" anchor="ctr"/>
-          <a:lstStyle/>
-          <a:p>
-            <a:pPr algn="ctr"/>
-          </a:p>
-        </p:txBody>
-      </p:sp>
-      <p:sp>
-        <p:nvSpPr>
-          <p:cNvPr id="1536" name="Oval 1535"/>
-          <p:cNvSpPr/>
-          <p:nvPr/>
-        </p:nvSpPr>
-        <p:spPr>
-          <a:xfrm>
-            <a:off x="6845156" y="4332124"/>
-            <a:ext cx="76000" cy="76000"/>
-          </a:xfrm>
-          <a:prstGeom prst="ellipse">
-            <a:avLst/>
-          </a:prstGeom>
-          <a:noFill/>
-          <a:ln w="13970">
-            <a:solidFill>
-              <a:srgbClr val="D4A300"/>
-            </a:solidFill>
-          </a:ln>
-          <a:effectLst/>
-        </p:spPr>
-        <p:style>
-          <a:lnRef idx="1">
-            <a:schemeClr val="accent1"/>
-          </a:lnRef>
-          <a:fillRef idx="3">
-            <a:schemeClr val="accent1"/>
-          </a:fillRef>
-          <a:effectRef idx="2">
-            <a:schemeClr val="accent1"/>
-          </a:effectRef>
-          <a:fontRef idx="minor">
-            <a:schemeClr val="lt1"/>
-          </a:fontRef>
-        </p:style>
-        <p:txBody>
-          <a:bodyPr rtlCol="0" anchor="ctr"/>
-          <a:lstStyle/>
-          <a:p>
-            <a:pPr algn="ctr"/>
-          </a:p>
-        </p:txBody>
-      </p:sp>
-      <p:sp>
-        <p:nvSpPr>
-          <p:cNvPr id="1537" name="Oval 1536"/>
-          <p:cNvSpPr/>
-          <p:nvPr/>
-        </p:nvSpPr>
-        <p:spPr>
-          <a:xfrm>
-            <a:off x="4057402" y="4353167"/>
-            <a:ext cx="76000" cy="76000"/>
-          </a:xfrm>
-          <a:prstGeom prst="ellipse">
-            <a:avLst/>
-          </a:prstGeom>
-          <a:noFill/>
-          <a:ln w="13970">
-            <a:solidFill>
-              <a:srgbClr val="D4A300"/>
-            </a:solidFill>
-          </a:ln>
-          <a:effectLst/>
-        </p:spPr>
-        <p:style>
-          <a:lnRef idx="1">
-            <a:schemeClr val="accent1"/>
-          </a:lnRef>
-          <a:fillRef idx="3">
-            <a:schemeClr val="accent1"/>
-          </a:fillRef>
-          <a:effectRef idx="2">
-            <a:schemeClr val="accent1"/>
-          </a:effectRef>
-          <a:fontRef idx="minor">
-            <a:schemeClr val="lt1"/>
-          </a:fontRef>
-        </p:style>
-        <p:txBody>
-          <a:bodyPr rtlCol="0" anchor="ctr"/>
-          <a:lstStyle/>
-          <a:p>
-            <a:pPr algn="ctr"/>
-          </a:p>
-        </p:txBody>
-      </p:sp>
-      <p:sp>
-        <p:nvSpPr>
-          <p:cNvPr id="1538" name="Oval 1537"/>
-          <p:cNvSpPr/>
-          <p:nvPr/>
-        </p:nvSpPr>
-        <p:spPr>
-          <a:xfrm>
-            <a:off x="3404313" y="4354132"/>
-            <a:ext cx="76000" cy="76000"/>
-          </a:xfrm>
-          <a:prstGeom prst="ellipse">
-            <a:avLst/>
-          </a:prstGeom>
-          <a:noFill/>
-          <a:ln w="13970">
-            <a:solidFill>
-              <a:srgbClr val="D4A300"/>
-            </a:solidFill>
-          </a:ln>
-          <a:effectLst/>
-        </p:spPr>
-        <p:style>
-          <a:lnRef idx="1">
-            <a:schemeClr val="accent1"/>
-          </a:lnRef>
-          <a:fillRef idx="3">
-            <a:schemeClr val="accent1"/>
-          </a:fillRef>
-          <a:effectRef idx="2">
-            <a:schemeClr val="accent1"/>
-          </a:effectRef>
-          <a:fontRef idx="minor">
-            <a:schemeClr val="lt1"/>
-          </a:fontRef>
-        </p:style>
-        <p:txBody>
-          <a:bodyPr rtlCol="0" anchor="ctr"/>
-          <a:lstStyle/>
-          <a:p>
-            <a:pPr algn="ctr"/>
-          </a:p>
-        </p:txBody>
-      </p:sp>
-      <p:sp>
-        <p:nvSpPr>
-          <p:cNvPr id="1539" name="Oval 1538"/>
-          <p:cNvSpPr/>
-          <p:nvPr/>
-        </p:nvSpPr>
-        <p:spPr>
-          <a:xfrm>
-            <a:off x="4289991" y="4362121"/>
-            <a:ext cx="76000" cy="76000"/>
-          </a:xfrm>
-          <a:prstGeom prst="ellipse">
-            <a:avLst/>
-          </a:prstGeom>
-          <a:noFill/>
-          <a:ln w="13970">
-            <a:solidFill>
-              <a:srgbClr val="D4A300"/>
-            </a:solidFill>
-          </a:ln>
-          <a:effectLst/>
-        </p:spPr>
-        <p:style>
-          <a:lnRef idx="1">
-            <a:schemeClr val="accent1"/>
-          </a:lnRef>
-          <a:fillRef idx="3">
-            <a:schemeClr val="accent1"/>
-          </a:fillRef>
-          <a:effectRef idx="2">
-            <a:schemeClr val="accent1"/>
-          </a:effectRef>
-          <a:fontRef idx="minor">
-            <a:schemeClr val="lt1"/>
-          </a:fontRef>
-        </p:style>
-        <p:txBody>
-          <a:bodyPr rtlCol="0" anchor="ctr"/>
-          <a:lstStyle/>
-          <a:p>
-            <a:pPr algn="ctr"/>
-          </a:p>
-        </p:txBody>
-      </p:sp>
-      <p:sp>
-        <p:nvSpPr>
-          <p:cNvPr id="1540" name="Oval 1539"/>
-          <p:cNvSpPr/>
-          <p:nvPr/>
-        </p:nvSpPr>
-        <p:spPr>
-          <a:xfrm>
-            <a:off x="3897320" y="4371966"/>
-            <a:ext cx="76000" cy="76000"/>
-          </a:xfrm>
-          <a:prstGeom prst="ellipse">
-            <a:avLst/>
-          </a:prstGeom>
-          <a:noFill/>
-          <a:ln w="13970">
-            <a:solidFill>
-              <a:srgbClr val="D4A300"/>
-            </a:solidFill>
-          </a:ln>
-          <a:effectLst/>
-        </p:spPr>
-        <p:style>
-          <a:lnRef idx="1">
-            <a:schemeClr val="accent1"/>
-          </a:lnRef>
-          <a:fillRef idx="3">
-            <a:schemeClr val="accent1"/>
-          </a:fillRef>
-          <a:effectRef idx="2">
-            <a:schemeClr val="accent1"/>
-          </a:effectRef>
-          <a:fontRef idx="minor">
-            <a:schemeClr val="lt1"/>
-          </a:fontRef>
-        </p:style>
-        <p:txBody>
-          <a:bodyPr rtlCol="0" anchor="ctr"/>
-          <a:lstStyle/>
-          <a:p>
-            <a:pPr algn="ctr"/>
-          </a:p>
-        </p:txBody>
-      </p:sp>
-      <p:sp>
-        <p:nvSpPr>
-          <p:cNvPr id="1541" name="Oval 1540"/>
-          <p:cNvSpPr/>
-          <p:nvPr/>
-        </p:nvSpPr>
-        <p:spPr>
-          <a:xfrm>
-            <a:off x="7127480" y="4372403"/>
-            <a:ext cx="76000" cy="76000"/>
-          </a:xfrm>
-          <a:prstGeom prst="ellipse">
-            <a:avLst/>
-          </a:prstGeom>
-          <a:noFill/>
-          <a:ln w="13970">
-            <a:solidFill>
-              <a:srgbClr val="D4A300"/>
-            </a:solidFill>
-          </a:ln>
-          <a:effectLst/>
-        </p:spPr>
-        <p:style>
-          <a:lnRef idx="1">
-            <a:schemeClr val="accent1"/>
-          </a:lnRef>
-          <a:fillRef idx="3">
-            <a:schemeClr val="accent1"/>
-          </a:fillRef>
-          <a:effectRef idx="2">
-            <a:schemeClr val="accent1"/>
-          </a:effectRef>
-          <a:fontRef idx="minor">
-            <a:schemeClr val="lt1"/>
-          </a:fontRef>
-        </p:style>
-        <p:txBody>
-          <a:bodyPr rtlCol="0" anchor="ctr"/>
-          <a:lstStyle/>
-          <a:p>
-            <a:pPr algn="ctr"/>
-          </a:p>
-        </p:txBody>
-      </p:sp>
-      <p:sp>
-        <p:nvSpPr>
-          <p:cNvPr id="1542" name="Oval 1541"/>
-          <p:cNvSpPr/>
-          <p:nvPr/>
-        </p:nvSpPr>
-        <p:spPr>
-          <a:xfrm>
-            <a:off x="4565707" y="4380993"/>
-            <a:ext cx="76000" cy="76000"/>
-          </a:xfrm>
-          <a:prstGeom prst="ellipse">
-            <a:avLst/>
-          </a:prstGeom>
-          <a:noFill/>
-          <a:ln w="13970">
-            <a:solidFill>
-              <a:srgbClr val="D4A300"/>
-            </a:solidFill>
-          </a:ln>
-          <a:effectLst/>
-        </p:spPr>
-        <p:style>
-          <a:lnRef idx="1">
-            <a:schemeClr val="accent1"/>
-          </a:lnRef>
-          <a:fillRef idx="3">
-            <a:schemeClr val="accent1"/>
-          </a:fillRef>
-          <a:effectRef idx="2">
-            <a:schemeClr val="accent1"/>
-          </a:effectRef>
-          <a:fontRef idx="minor">
-            <a:schemeClr val="lt1"/>
-          </a:fontRef>
-        </p:style>
-        <p:txBody>
-          <a:bodyPr rtlCol="0" anchor="ctr"/>
-          <a:lstStyle/>
-          <a:p>
-            <a:pPr algn="ctr"/>
-          </a:p>
-        </p:txBody>
-      </p:sp>
-      <p:sp>
-        <p:nvSpPr>
-          <p:cNvPr id="1543" name="Oval 1542"/>
-          <p:cNvSpPr/>
-          <p:nvPr/>
-        </p:nvSpPr>
-        <p:spPr>
-          <a:xfrm>
-            <a:off x="7928976" y="4389306"/>
-            <a:ext cx="76000" cy="76000"/>
-          </a:xfrm>
-          <a:prstGeom prst="ellipse">
-            <a:avLst/>
-          </a:prstGeom>
-          <a:noFill/>
-          <a:ln w="13970">
-            <a:solidFill>
-              <a:srgbClr val="D4A300"/>
-            </a:solidFill>
-          </a:ln>
-          <a:effectLst/>
-        </p:spPr>
-        <p:style>
-          <a:lnRef idx="1">
-            <a:schemeClr val="accent1"/>
-          </a:lnRef>
-          <a:fillRef idx="3">
-            <a:schemeClr val="accent1"/>
-          </a:fillRef>
-          <a:effectRef idx="2">
-            <a:schemeClr val="accent1"/>
-          </a:effectRef>
-          <a:fontRef idx="minor">
-            <a:schemeClr val="lt1"/>
-          </a:fontRef>
-        </p:style>
-        <p:txBody>
-          <a:bodyPr rtlCol="0" anchor="ctr"/>
-          <a:lstStyle/>
-          <a:p>
-            <a:pPr algn="ctr"/>
-          </a:p>
-        </p:txBody>
-      </p:sp>
-      <p:sp>
-        <p:nvSpPr>
-          <p:cNvPr id="1544" name="Oval 1543"/>
-          <p:cNvSpPr/>
-          <p:nvPr/>
-        </p:nvSpPr>
-        <p:spPr>
-          <a:xfrm>
-            <a:off x="8535798" y="4391334"/>
-            <a:ext cx="76000" cy="76000"/>
-          </a:xfrm>
-          <a:prstGeom prst="ellipse">
-            <a:avLst/>
-          </a:prstGeom>
-          <a:noFill/>
-          <a:ln w="13970">
-            <a:solidFill>
-              <a:srgbClr val="D4A300"/>
-            </a:solidFill>
-          </a:ln>
-          <a:effectLst/>
-        </p:spPr>
-        <p:style>
-          <a:lnRef idx="1">
-            <a:schemeClr val="accent1"/>
-          </a:lnRef>
-          <a:fillRef idx="3">
-            <a:schemeClr val="accent1"/>
-          </a:fillRef>
-          <a:effectRef idx="2">
-            <a:schemeClr val="accent1"/>
-          </a:effectRef>
-          <a:fontRef idx="minor">
-            <a:schemeClr val="lt1"/>
-          </a:fontRef>
-        </p:style>
-        <p:txBody>
-          <a:bodyPr rtlCol="0" anchor="ctr"/>
-          <a:lstStyle/>
-          <a:p>
-            <a:pPr algn="ctr"/>
-          </a:p>
-        </p:txBody>
-      </p:sp>
-      <p:sp>
-        <p:nvSpPr>
-          <p:cNvPr id="1545" name="Oval 1544"/>
-          <p:cNvSpPr/>
-          <p:nvPr/>
-        </p:nvSpPr>
-        <p:spPr>
-          <a:xfrm>
-            <a:off x="4177499" y="4408136"/>
-            <a:ext cx="76000" cy="76000"/>
-          </a:xfrm>
-          <a:prstGeom prst="ellipse">
-            <a:avLst/>
-          </a:prstGeom>
-          <a:noFill/>
-          <a:ln w="13970">
-            <a:solidFill>
-              <a:srgbClr val="D4A300"/>
-            </a:solidFill>
-          </a:ln>
-          <a:effectLst/>
-        </p:spPr>
-        <p:style>
-          <a:lnRef idx="1">
-            <a:schemeClr val="accent1"/>
-          </a:lnRef>
-          <a:fillRef idx="3">
-            <a:schemeClr val="accent1"/>
-          </a:fillRef>
-          <a:effectRef idx="2">
-            <a:schemeClr val="accent1"/>
-          </a:effectRef>
-          <a:fontRef idx="minor">
-            <a:schemeClr val="lt1"/>
-          </a:fontRef>
-        </p:style>
-        <p:txBody>
-          <a:bodyPr rtlCol="0" anchor="ctr"/>
-          <a:lstStyle/>
-          <a:p>
-            <a:pPr algn="ctr"/>
-          </a:p>
-        </p:txBody>
-      </p:sp>
-      <p:sp>
-        <p:nvSpPr>
-          <p:cNvPr id="1546" name="Oval 1545"/>
-          <p:cNvSpPr/>
-          <p:nvPr/>
-        </p:nvSpPr>
-        <p:spPr>
-          <a:xfrm>
-            <a:off x="2653866" y="4408140"/>
-            <a:ext cx="76000" cy="76000"/>
-          </a:xfrm>
-          <a:prstGeom prst="ellipse">
-            <a:avLst/>
-          </a:prstGeom>
-          <a:noFill/>
-          <a:ln w="13970">
-            <a:solidFill>
-              <a:srgbClr val="D4A300"/>
-            </a:solidFill>
-          </a:ln>
-          <a:effectLst/>
-        </p:spPr>
-        <p:style>
-          <a:lnRef idx="1">
-            <a:schemeClr val="accent1"/>
-          </a:lnRef>
-          <a:fillRef idx="3">
-            <a:schemeClr val="accent1"/>
-          </a:fillRef>
-          <a:effectRef idx="2">
-            <a:schemeClr val="accent1"/>
-          </a:effectRef>
-          <a:fontRef idx="minor">
-            <a:schemeClr val="lt1"/>
-          </a:fontRef>
-        </p:style>
-        <p:txBody>
-          <a:bodyPr rtlCol="0" anchor="ctr"/>
-          <a:lstStyle/>
-          <a:p>
-            <a:pPr algn="ctr"/>
-          </a:p>
-        </p:txBody>
-      </p:sp>
-      <p:sp>
-        <p:nvSpPr>
-          <p:cNvPr id="1547" name="Oval 1546"/>
-          <p:cNvSpPr/>
-          <p:nvPr/>
-        </p:nvSpPr>
-        <p:spPr>
-          <a:xfrm>
-            <a:off x="4378218" y="4413048"/>
-            <a:ext cx="76000" cy="76000"/>
-          </a:xfrm>
-          <a:prstGeom prst="ellipse">
-            <a:avLst/>
-          </a:prstGeom>
-          <a:noFill/>
-          <a:ln w="13970">
-            <a:solidFill>
-              <a:srgbClr val="D4A300"/>
-            </a:solidFill>
-          </a:ln>
-          <a:effectLst/>
-        </p:spPr>
-        <p:style>
-          <a:lnRef idx="1">
-            <a:schemeClr val="accent1"/>
-          </a:lnRef>
-          <a:fillRef idx="3">
-            <a:schemeClr val="accent1"/>
-          </a:fillRef>
-          <a:effectRef idx="2">
-            <a:schemeClr val="accent1"/>
-          </a:effectRef>
-          <a:fontRef idx="minor">
-            <a:schemeClr val="lt1"/>
-          </a:fontRef>
-        </p:style>
-        <p:txBody>
-          <a:bodyPr rtlCol="0" anchor="ctr"/>
-          <a:lstStyle/>
-          <a:p>
-            <a:pPr algn="ctr"/>
-          </a:p>
-        </p:txBody>
-      </p:sp>
-      <p:sp>
-        <p:nvSpPr>
-          <p:cNvPr id="1548" name="Oval 1547"/>
-          <p:cNvSpPr/>
-          <p:nvPr/>
-        </p:nvSpPr>
-        <p:spPr>
-          <a:xfrm>
-            <a:off x="4051342" y="4418131"/>
-            <a:ext cx="76000" cy="76000"/>
-          </a:xfrm>
-          <a:prstGeom prst="ellipse">
-            <a:avLst/>
-          </a:prstGeom>
-          <a:noFill/>
-          <a:ln w="13970">
-            <a:solidFill>
-              <a:srgbClr val="D4A300"/>
-            </a:solidFill>
-          </a:ln>
-          <a:effectLst/>
-        </p:spPr>
-        <p:style>
-          <a:lnRef idx="1">
-            <a:schemeClr val="accent1"/>
-          </a:lnRef>
-          <a:fillRef idx="3">
-            <a:schemeClr val="accent1"/>
-          </a:fillRef>
-          <a:effectRef idx="2">
-            <a:schemeClr val="accent1"/>
-          </a:effectRef>
-          <a:fontRef idx="minor">
-            <a:schemeClr val="lt1"/>
-          </a:fontRef>
-        </p:style>
-        <p:txBody>
-          <a:bodyPr rtlCol="0" anchor="ctr"/>
-          <a:lstStyle/>
-          <a:p>
-            <a:pPr algn="ctr"/>
-          </a:p>
-        </p:txBody>
-      </p:sp>
-      <p:sp>
-        <p:nvSpPr>
-          <p:cNvPr id="1549" name="Oval 1548"/>
-          <p:cNvSpPr/>
-          <p:nvPr/>
-        </p:nvSpPr>
-        <p:spPr>
-          <a:xfrm>
-            <a:off x="4283688" y="4422585"/>
-            <a:ext cx="76000" cy="76000"/>
-          </a:xfrm>
-          <a:prstGeom prst="ellipse">
-            <a:avLst/>
-          </a:prstGeom>
-          <a:noFill/>
-          <a:ln w="13970">
-            <a:solidFill>
-              <a:srgbClr val="D4A300"/>
-            </a:solidFill>
-          </a:ln>
-          <a:effectLst/>
-        </p:spPr>
-        <p:style>
-          <a:lnRef idx="1">
-            <a:schemeClr val="accent1"/>
-          </a:lnRef>
-          <a:fillRef idx="3">
-            <a:schemeClr val="accent1"/>
-          </a:fillRef>
-          <a:effectRef idx="2">
-            <a:schemeClr val="accent1"/>
-          </a:effectRef>
-          <a:fontRef idx="minor">
-            <a:schemeClr val="lt1"/>
-          </a:fontRef>
-        </p:style>
-        <p:txBody>
-          <a:bodyPr rtlCol="0" anchor="ctr"/>
-          <a:lstStyle/>
-          <a:p>
-            <a:pPr algn="ctr"/>
-          </a:p>
-        </p:txBody>
-      </p:sp>
-      <p:sp>
-        <p:nvSpPr>
-          <p:cNvPr id="1550" name="Oval 1549"/>
-          <p:cNvSpPr/>
-          <p:nvPr/>
-        </p:nvSpPr>
-        <p:spPr>
-          <a:xfrm>
-            <a:off x="7370424" y="4429479"/>
-            <a:ext cx="76000" cy="76000"/>
-          </a:xfrm>
-          <a:prstGeom prst="ellipse">
-            <a:avLst/>
-          </a:prstGeom>
-          <a:noFill/>
-          <a:ln w="13970">
-            <a:solidFill>
-              <a:srgbClr val="D4A300"/>
-            </a:solidFill>
-          </a:ln>
-          <a:effectLst/>
-        </p:spPr>
-        <p:style>
-          <a:lnRef idx="1">
-            <a:schemeClr val="accent1"/>
-          </a:lnRef>
-          <a:fillRef idx="3">
-            <a:schemeClr val="accent1"/>
-          </a:fillRef>
-          <a:effectRef idx="2">
-            <a:schemeClr val="accent1"/>
-          </a:effectRef>
-          <a:fontRef idx="minor">
-            <a:schemeClr val="lt1"/>
-          </a:fontRef>
-        </p:style>
-        <p:txBody>
-          <a:bodyPr rtlCol="0" anchor="ctr"/>
-          <a:lstStyle/>
-          <a:p>
-            <a:pPr algn="ctr"/>
-          </a:p>
-        </p:txBody>
-      </p:sp>
-      <p:sp>
-        <p:nvSpPr>
-          <p:cNvPr id="1551" name="Oval 1550"/>
-          <p:cNvSpPr/>
-          <p:nvPr/>
-        </p:nvSpPr>
-        <p:spPr>
-          <a:xfrm>
-            <a:off x="1983113" y="4432889"/>
-            <a:ext cx="76000" cy="76000"/>
-          </a:xfrm>
-          <a:prstGeom prst="ellipse">
-            <a:avLst/>
-          </a:prstGeom>
-          <a:noFill/>
-          <a:ln w="13970">
-            <a:solidFill>
-              <a:srgbClr val="D4A300"/>
-            </a:solidFill>
-          </a:ln>
-          <a:effectLst/>
-        </p:spPr>
-        <p:style>
-          <a:lnRef idx="1">
-            <a:schemeClr val="accent1"/>
-          </a:lnRef>
-          <a:fillRef idx="3">
-            <a:schemeClr val="accent1"/>
-          </a:fillRef>
-          <a:effectRef idx="2">
-            <a:schemeClr val="accent1"/>
-          </a:effectRef>
-          <a:fontRef idx="minor">
-            <a:schemeClr val="lt1"/>
-          </a:fontRef>
-        </p:style>
-        <p:txBody>
-          <a:bodyPr rtlCol="0" anchor="ctr"/>
-          <a:lstStyle/>
-          <a:p>
-            <a:pPr algn="ctr"/>
-          </a:p>
-        </p:txBody>
-      </p:sp>
-      <p:sp>
-        <p:nvSpPr>
-          <p:cNvPr id="1552" name="Oval 1551"/>
-          <p:cNvSpPr/>
-          <p:nvPr/>
-        </p:nvSpPr>
-        <p:spPr>
-          <a:xfrm>
-            <a:off x="4712228" y="4434305"/>
-            <a:ext cx="76000" cy="76000"/>
-          </a:xfrm>
-          <a:prstGeom prst="ellipse">
-            <a:avLst/>
-          </a:prstGeom>
-          <a:noFill/>
-          <a:ln w="13970">
-            <a:solidFill>
-              <a:srgbClr val="D4A300"/>
-            </a:solidFill>
-          </a:ln>
-          <a:effectLst/>
-        </p:spPr>
-        <p:style>
-          <a:lnRef idx="1">
-            <a:schemeClr val="accent1"/>
-          </a:lnRef>
-          <a:fillRef idx="3">
-            <a:schemeClr val="accent1"/>
-          </a:fillRef>
-          <a:effectRef idx="2">
-            <a:schemeClr val="accent1"/>
-          </a:effectRef>
-          <a:fontRef idx="minor">
-            <a:schemeClr val="lt1"/>
-          </a:fontRef>
-        </p:style>
-        <p:txBody>
-          <a:bodyPr rtlCol="0" anchor="ctr"/>
-          <a:lstStyle/>
-          <a:p>
-            <a:pPr algn="ctr"/>
-          </a:p>
-        </p:txBody>
-      </p:sp>
-      <p:sp>
-        <p:nvSpPr>
-          <p:cNvPr id="1553" name="Oval 1552"/>
-          <p:cNvSpPr/>
-          <p:nvPr/>
-        </p:nvSpPr>
-        <p:spPr>
-          <a:xfrm>
-            <a:off x="2929008" y="4441437"/>
-            <a:ext cx="76000" cy="76000"/>
-          </a:xfrm>
-          <a:prstGeom prst="ellipse">
-            <a:avLst/>
-          </a:prstGeom>
-          <a:noFill/>
-          <a:ln w="13970">
-            <a:solidFill>
-              <a:srgbClr val="D4A300"/>
-            </a:solidFill>
-          </a:ln>
-          <a:effectLst/>
-        </p:spPr>
-        <p:style>
-          <a:lnRef idx="1">
-            <a:schemeClr val="accent1"/>
-          </a:lnRef>
-          <a:fillRef idx="3">
-            <a:schemeClr val="accent1"/>
-          </a:fillRef>
-          <a:effectRef idx="2">
-            <a:schemeClr val="accent1"/>
-          </a:effectRef>
-          <a:fontRef idx="minor">
-            <a:schemeClr val="lt1"/>
-          </a:fontRef>
-        </p:style>
-        <p:txBody>
-          <a:bodyPr rtlCol="0" anchor="ctr"/>
-          <a:lstStyle/>
-          <a:p>
-            <a:pPr algn="ctr"/>
-          </a:p>
-        </p:txBody>
-      </p:sp>
-      <p:sp>
-        <p:nvSpPr>
-          <p:cNvPr id="1554" name="Oval 1553"/>
-          <p:cNvSpPr/>
-          <p:nvPr/>
-        </p:nvSpPr>
-        <p:spPr>
-          <a:xfrm>
-            <a:off x="8383672" y="4442163"/>
-            <a:ext cx="76000" cy="76000"/>
-          </a:xfrm>
-          <a:prstGeom prst="ellipse">
-            <a:avLst/>
-          </a:prstGeom>
-          <a:noFill/>
-          <a:ln w="13970">
-            <a:solidFill>
-              <a:srgbClr val="D4A300"/>
-            </a:solidFill>
-          </a:ln>
-          <a:effectLst/>
-        </p:spPr>
-        <p:style>
-          <a:lnRef idx="1">
-            <a:schemeClr val="accent1"/>
-          </a:lnRef>
-          <a:fillRef idx="3">
-            <a:schemeClr val="accent1"/>
-          </a:fillRef>
-          <a:effectRef idx="2">
-            <a:schemeClr val="accent1"/>
-          </a:effectRef>
-          <a:fontRef idx="minor">
-            <a:schemeClr val="lt1"/>
-          </a:fontRef>
-        </p:style>
-        <p:txBody>
-          <a:bodyPr rtlCol="0" anchor="ctr"/>
-          <a:lstStyle/>
-          <a:p>
-            <a:pPr algn="ctr"/>
-          </a:p>
-        </p:txBody>
-      </p:sp>
-      <p:sp>
-        <p:nvSpPr>
-          <p:cNvPr id="1555" name="Oval 1554"/>
-          <p:cNvSpPr/>
-          <p:nvPr/>
-        </p:nvSpPr>
-        <p:spPr>
-          <a:xfrm>
-            <a:off x="4647226" y="4448116"/>
-            <a:ext cx="76000" cy="76000"/>
-          </a:xfrm>
-          <a:prstGeom prst="ellipse">
-            <a:avLst/>
-          </a:prstGeom>
-          <a:noFill/>
-          <a:ln w="13970">
-            <a:solidFill>
-              <a:srgbClr val="D4A300"/>
-            </a:solidFill>
-          </a:ln>
-          <a:effectLst/>
-        </p:spPr>
-        <p:style>
-          <a:lnRef idx="1">
-            <a:schemeClr val="accent1"/>
-          </a:lnRef>
-          <a:fillRef idx="3">
-            <a:schemeClr val="accent1"/>
-          </a:fillRef>
-          <a:effectRef idx="2">
-            <a:schemeClr val="accent1"/>
-          </a:effectRef>
-          <a:fontRef idx="minor">
-            <a:schemeClr val="lt1"/>
-          </a:fontRef>
-        </p:style>
-        <p:txBody>
-          <a:bodyPr rtlCol="0" anchor="ctr"/>
-          <a:lstStyle/>
-          <a:p>
-            <a:pPr algn="ctr"/>
-          </a:p>
-        </p:txBody>
-      </p:sp>
-      <p:sp>
-        <p:nvSpPr>
-          <p:cNvPr id="1556" name="Oval 1555"/>
-          <p:cNvSpPr/>
-          <p:nvPr/>
-        </p:nvSpPr>
-        <p:spPr>
-          <a:xfrm>
-            <a:off x="8305959" y="4453461"/>
-            <a:ext cx="76000" cy="76000"/>
-          </a:xfrm>
-          <a:prstGeom prst="ellipse">
-            <a:avLst/>
-          </a:prstGeom>
-          <a:noFill/>
-          <a:ln w="13970">
-            <a:solidFill>
-              <a:srgbClr val="D4A300"/>
-            </a:solidFill>
-          </a:ln>
-          <a:effectLst/>
-        </p:spPr>
-        <p:style>
-          <a:lnRef idx="1">
-            <a:schemeClr val="accent1"/>
-          </a:lnRef>
-          <a:fillRef idx="3">
-            <a:schemeClr val="accent1"/>
-          </a:fillRef>
-          <a:effectRef idx="2">
-            <a:schemeClr val="accent1"/>
-          </a:effectRef>
-          <a:fontRef idx="minor">
-            <a:schemeClr val="lt1"/>
-          </a:fontRef>
-        </p:style>
-        <p:txBody>
-          <a:bodyPr rtlCol="0" anchor="ctr"/>
-          <a:lstStyle/>
-          <a:p>
-            <a:pPr algn="ctr"/>
-          </a:p>
-        </p:txBody>
-      </p:sp>
-      <p:sp>
-        <p:nvSpPr>
-          <p:cNvPr id="1557" name="Oval 1556"/>
-          <p:cNvSpPr/>
-          <p:nvPr/>
-        </p:nvSpPr>
-        <p:spPr>
-          <a:xfrm>
-            <a:off x="8972425" y="4456935"/>
-            <a:ext cx="76000" cy="76000"/>
-          </a:xfrm>
-          <a:prstGeom prst="ellipse">
-            <a:avLst/>
-          </a:prstGeom>
-          <a:noFill/>
-          <a:ln w="13970">
-            <a:solidFill>
-              <a:srgbClr val="D4A300"/>
-            </a:solidFill>
-          </a:ln>
-          <a:effectLst/>
-        </p:spPr>
-        <p:style>
-          <a:lnRef idx="1">
-            <a:schemeClr val="accent1"/>
-          </a:lnRef>
-          <a:fillRef idx="3">
-            <a:schemeClr val="accent1"/>
-          </a:fillRef>
-          <a:effectRef idx="2">
-            <a:schemeClr val="accent1"/>
-          </a:effectRef>
-          <a:fontRef idx="minor">
-            <a:schemeClr val="lt1"/>
-          </a:fontRef>
-        </p:style>
-        <p:txBody>
-          <a:bodyPr rtlCol="0" anchor="ctr"/>
-          <a:lstStyle/>
-          <a:p>
-            <a:pPr algn="ctr"/>
-          </a:p>
-        </p:txBody>
-      </p:sp>
-      <p:sp>
-        <p:nvSpPr>
-          <p:cNvPr id="1558" name="Oval 1557"/>
-          <p:cNvSpPr/>
-          <p:nvPr/>
-        </p:nvSpPr>
-        <p:spPr>
-          <a:xfrm>
-            <a:off x="2286617" y="4459791"/>
-            <a:ext cx="76000" cy="76000"/>
-          </a:xfrm>
-          <a:prstGeom prst="ellipse">
-            <a:avLst/>
-          </a:prstGeom>
-          <a:noFill/>
-          <a:ln w="13970">
-            <a:solidFill>
-              <a:srgbClr val="D4A300"/>
-            </a:solidFill>
-          </a:ln>
-          <a:effectLst/>
-        </p:spPr>
-        <p:style>
-          <a:lnRef idx="1">
-            <a:schemeClr val="accent1"/>
-          </a:lnRef>
-          <a:fillRef idx="3">
-            <a:schemeClr val="accent1"/>
-          </a:fillRef>
-          <a:effectRef idx="2">
-            <a:schemeClr val="accent1"/>
-          </a:effectRef>
-          <a:fontRef idx="minor">
-            <a:schemeClr val="lt1"/>
-          </a:fontRef>
-        </p:style>
-        <p:txBody>
-          <a:bodyPr rtlCol="0" anchor="ctr"/>
-          <a:lstStyle/>
-          <a:p>
-            <a:pPr algn="ctr"/>
-          </a:p>
-        </p:txBody>
-      </p:sp>
-      <p:sp>
-        <p:nvSpPr>
-          <p:cNvPr id="1559" name="Oval 1558"/>
-          <p:cNvSpPr/>
-          <p:nvPr/>
-        </p:nvSpPr>
-        <p:spPr>
-          <a:xfrm>
-            <a:off x="7080343" y="4463735"/>
-            <a:ext cx="76000" cy="76000"/>
-          </a:xfrm>
-          <a:prstGeom prst="ellipse">
-            <a:avLst/>
-          </a:prstGeom>
-          <a:noFill/>
-          <a:ln w="13970">
-            <a:solidFill>
-              <a:srgbClr val="D4A300"/>
-            </a:solidFill>
-          </a:ln>
-          <a:effectLst/>
-        </p:spPr>
-        <p:style>
-          <a:lnRef idx="1">
-            <a:schemeClr val="accent1"/>
-          </a:lnRef>
-          <a:fillRef idx="3">
-            <a:schemeClr val="accent1"/>
-          </a:fillRef>
-          <a:effectRef idx="2">
-            <a:schemeClr val="accent1"/>
-          </a:effectRef>
-          <a:fontRef idx="minor">
-            <a:schemeClr val="lt1"/>
-          </a:fontRef>
-        </p:style>
-        <p:txBody>
-          <a:bodyPr rtlCol="0" anchor="ctr"/>
-          <a:lstStyle/>
-          <a:p>
-            <a:pPr algn="ctr"/>
-          </a:p>
-        </p:txBody>
-      </p:sp>
-      <p:sp>
-        <p:nvSpPr>
-          <p:cNvPr id="1560" name="Oval 1559"/>
-          <p:cNvSpPr/>
-          <p:nvPr/>
-        </p:nvSpPr>
-        <p:spPr>
-          <a:xfrm>
-            <a:off x="4012433" y="4464801"/>
-            <a:ext cx="76000" cy="76000"/>
-          </a:xfrm>
-          <a:prstGeom prst="ellipse">
-            <a:avLst/>
-          </a:prstGeom>
-          <a:noFill/>
-          <a:ln w="13970">
-            <a:solidFill>
-              <a:srgbClr val="D4A300"/>
-            </a:solidFill>
-          </a:ln>
-          <a:effectLst/>
-        </p:spPr>
-        <p:style>
-          <a:lnRef idx="1">
-            <a:schemeClr val="accent1"/>
-          </a:lnRef>
-          <a:fillRef idx="3">
-            <a:schemeClr val="accent1"/>
-          </a:fillRef>
-          <a:effectRef idx="2">
-            <a:schemeClr val="accent1"/>
-          </a:effectRef>
-          <a:fontRef idx="minor">
-            <a:schemeClr val="lt1"/>
-          </a:fontRef>
-        </p:style>
-        <p:txBody>
-          <a:bodyPr rtlCol="0" anchor="ctr"/>
-          <a:lstStyle/>
-          <a:p>
-            <a:pPr algn="ctr"/>
-          </a:p>
-        </p:txBody>
-      </p:sp>
-      <p:sp>
-        <p:nvSpPr>
-          <p:cNvPr id="1561" name="Oval 1560"/>
-          <p:cNvSpPr/>
-          <p:nvPr/>
-        </p:nvSpPr>
-        <p:spPr>
-          <a:xfrm>
-            <a:off x="4360951" y="4466463"/>
-            <a:ext cx="76000" cy="76000"/>
-          </a:xfrm>
-          <a:prstGeom prst="ellipse">
-            <a:avLst/>
-          </a:prstGeom>
-          <a:noFill/>
-          <a:ln w="13970">
-            <a:solidFill>
-              <a:srgbClr val="D4A300"/>
-            </a:solidFill>
-          </a:ln>
-          <a:effectLst/>
-        </p:spPr>
-        <p:style>
-          <a:lnRef idx="1">
-            <a:schemeClr val="accent1"/>
-          </a:lnRef>
-          <a:fillRef idx="3">
-            <a:schemeClr val="accent1"/>
-          </a:fillRef>
-          <a:effectRef idx="2">
-            <a:schemeClr val="accent1"/>
-          </a:effectRef>
-          <a:fontRef idx="minor">
-            <a:schemeClr val="lt1"/>
-          </a:fontRef>
-        </p:style>
-        <p:txBody>
-          <a:bodyPr rtlCol="0" anchor="ctr"/>
-          <a:lstStyle/>
-          <a:p>
-            <a:pPr algn="ctr"/>
-          </a:p>
-        </p:txBody>
-      </p:sp>
-      <p:sp>
-        <p:nvSpPr>
-          <p:cNvPr id="1562" name="Oval 1561"/>
-          <p:cNvSpPr/>
-          <p:nvPr/>
-        </p:nvSpPr>
-        <p:spPr>
-          <a:xfrm>
-            <a:off x="7865627" y="4468274"/>
-            <a:ext cx="76000" cy="76000"/>
-          </a:xfrm>
-          <a:prstGeom prst="ellipse">
-            <a:avLst/>
-          </a:prstGeom>
-          <a:noFill/>
-          <a:ln w="13970">
-            <a:solidFill>
-              <a:srgbClr val="D4A300"/>
-            </a:solidFill>
-          </a:ln>
-          <a:effectLst/>
-        </p:spPr>
-        <p:style>
-          <a:lnRef idx="1">
-            <a:schemeClr val="accent1"/>
-          </a:lnRef>
-          <a:fillRef idx="3">
-            <a:schemeClr val="accent1"/>
-          </a:fillRef>
-          <a:effectRef idx="2">
-            <a:schemeClr val="accent1"/>
-          </a:effectRef>
-          <a:fontRef idx="minor">
-            <a:schemeClr val="lt1"/>
-          </a:fontRef>
-        </p:style>
-        <p:txBody>
-          <a:bodyPr rtlCol="0" anchor="ctr"/>
-          <a:lstStyle/>
-          <a:p>
-            <a:pPr algn="ctr"/>
-          </a:p>
-        </p:txBody>
-      </p:sp>
-      <p:sp>
-        <p:nvSpPr>
-          <p:cNvPr id="1563" name="Oval 1562"/>
-          <p:cNvSpPr/>
-          <p:nvPr/>
-        </p:nvSpPr>
-        <p:spPr>
-          <a:xfrm>
-            <a:off x="7099100" y="4469308"/>
-            <a:ext cx="76000" cy="76000"/>
-          </a:xfrm>
-          <a:prstGeom prst="ellipse">
-            <a:avLst/>
-          </a:prstGeom>
-          <a:noFill/>
-          <a:ln w="13970">
-            <a:solidFill>
-              <a:srgbClr val="D4A300"/>
-            </a:solidFill>
-          </a:ln>
-          <a:effectLst/>
-        </p:spPr>
-        <p:style>
-          <a:lnRef idx="1">
-            <a:schemeClr val="accent1"/>
-          </a:lnRef>
-          <a:fillRef idx="3">
-            <a:schemeClr val="accent1"/>
-          </a:fillRef>
-          <a:effectRef idx="2">
-            <a:schemeClr val="accent1"/>
-          </a:effectRef>
-          <a:fontRef idx="minor">
-            <a:schemeClr val="lt1"/>
-          </a:fontRef>
-        </p:style>
-        <p:txBody>
-          <a:bodyPr rtlCol="0" anchor="ctr"/>
-          <a:lstStyle/>
-          <a:p>
-            <a:pPr algn="ctr"/>
-          </a:p>
-        </p:txBody>
-      </p:sp>
-      <p:sp>
-        <p:nvSpPr>
-          <p:cNvPr id="1564" name="Oval 1563"/>
-          <p:cNvSpPr/>
-          <p:nvPr/>
-        </p:nvSpPr>
-        <p:spPr>
-          <a:xfrm>
-            <a:off x="7350706" y="4473593"/>
-            <a:ext cx="76000" cy="76000"/>
-          </a:xfrm>
-          <a:prstGeom prst="ellipse">
-            <a:avLst/>
-          </a:prstGeom>
-          <a:noFill/>
-          <a:ln w="13970">
-            <a:solidFill>
-              <a:srgbClr val="D4A300"/>
-            </a:solidFill>
-          </a:ln>
-          <a:effectLst/>
-        </p:spPr>
-        <p:style>
-          <a:lnRef idx="1">
-            <a:schemeClr val="accent1"/>
-          </a:lnRef>
-          <a:fillRef idx="3">
-            <a:schemeClr val="accent1"/>
-          </a:fillRef>
-          <a:effectRef idx="2">
-            <a:schemeClr val="accent1"/>
-          </a:effectRef>
-          <a:fontRef idx="minor">
-            <a:schemeClr val="lt1"/>
-          </a:fontRef>
-        </p:style>
-        <p:txBody>
-          <a:bodyPr rtlCol="0" anchor="ctr"/>
-          <a:lstStyle/>
-          <a:p>
-            <a:pPr algn="ctr"/>
-          </a:p>
-        </p:txBody>
-      </p:sp>
-      <p:sp>
-        <p:nvSpPr>
-          <p:cNvPr id="1565" name="Oval 1564"/>
-          <p:cNvSpPr/>
-          <p:nvPr/>
-        </p:nvSpPr>
-        <p:spPr>
-          <a:xfrm>
-            <a:off x="9717944" y="4477308"/>
-            <a:ext cx="76000" cy="76000"/>
-          </a:xfrm>
-          <a:prstGeom prst="ellipse">
-            <a:avLst/>
-          </a:prstGeom>
-          <a:noFill/>
-          <a:ln w="13970">
-            <a:solidFill>
-              <a:srgbClr val="D4A300"/>
-            </a:solidFill>
-          </a:ln>
-          <a:effectLst/>
-        </p:spPr>
-        <p:style>
-          <a:lnRef idx="1">
-            <a:schemeClr val="accent1"/>
-          </a:lnRef>
-          <a:fillRef idx="3">
-            <a:schemeClr val="accent1"/>
-          </a:fillRef>
-          <a:effectRef idx="2">
-            <a:schemeClr val="accent1"/>
-          </a:effectRef>
-          <a:fontRef idx="minor">
-            <a:schemeClr val="lt1"/>
-          </a:fontRef>
-        </p:style>
-        <p:txBody>
-          <a:bodyPr rtlCol="0" anchor="ctr"/>
-          <a:lstStyle/>
-          <a:p>
-            <a:pPr algn="ctr"/>
-          </a:p>
-        </p:txBody>
-      </p:sp>
-      <p:sp>
-        <p:nvSpPr>
-          <p:cNvPr id="1566" name="Oval 1565"/>
-          <p:cNvSpPr/>
-          <p:nvPr/>
-        </p:nvSpPr>
-        <p:spPr>
-          <a:xfrm>
-            <a:off x="3664074" y="4477368"/>
-            <a:ext cx="76000" cy="76000"/>
-          </a:xfrm>
-          <a:prstGeom prst="ellipse">
-            <a:avLst/>
-          </a:prstGeom>
-          <a:noFill/>
-          <a:ln w="13970">
-            <a:solidFill>
-              <a:srgbClr val="D4A300"/>
-            </a:solidFill>
-          </a:ln>
-          <a:effectLst/>
-        </p:spPr>
-        <p:style>
-          <a:lnRef idx="1">
-            <a:schemeClr val="accent1"/>
-          </a:lnRef>
-          <a:fillRef idx="3">
-            <a:schemeClr val="accent1"/>
-          </a:fillRef>
-          <a:effectRef idx="2">
-            <a:schemeClr val="accent1"/>
-          </a:effectRef>
-          <a:fontRef idx="minor">
-            <a:schemeClr val="lt1"/>
-          </a:fontRef>
-        </p:style>
-        <p:txBody>
-          <a:bodyPr rtlCol="0" anchor="ctr"/>
-          <a:lstStyle/>
-          <a:p>
-            <a:pPr algn="ctr"/>
-          </a:p>
-        </p:txBody>
-      </p:sp>
-      <p:sp>
-        <p:nvSpPr>
-          <p:cNvPr id="1567" name="Oval 1566"/>
-          <p:cNvSpPr/>
-          <p:nvPr/>
-        </p:nvSpPr>
-        <p:spPr>
-          <a:xfrm>
-            <a:off x="9717944" y="4480122"/>
-            <a:ext cx="76000" cy="76000"/>
-          </a:xfrm>
-          <a:prstGeom prst="ellipse">
-            <a:avLst/>
-          </a:prstGeom>
-          <a:noFill/>
-          <a:ln w="13970">
-            <a:solidFill>
-              <a:srgbClr val="D4A300"/>
-            </a:solidFill>
-          </a:ln>
-          <a:effectLst/>
-        </p:spPr>
-        <p:style>
-          <a:lnRef idx="1">
-            <a:schemeClr val="accent1"/>
-          </a:lnRef>
-          <a:fillRef idx="3">
-            <a:schemeClr val="accent1"/>
-          </a:fillRef>
-          <a:effectRef idx="2">
-            <a:schemeClr val="accent1"/>
-          </a:effectRef>
-          <a:fontRef idx="minor">
-            <a:schemeClr val="lt1"/>
-          </a:fontRef>
-        </p:style>
-        <p:txBody>
-          <a:bodyPr rtlCol="0" anchor="ctr"/>
-          <a:lstStyle/>
-          <a:p>
-            <a:pPr algn="ctr"/>
-          </a:p>
-        </p:txBody>
-      </p:sp>
-      <p:sp>
-        <p:nvSpPr>
-          <p:cNvPr id="1568" name="Oval 1567"/>
-          <p:cNvSpPr/>
-          <p:nvPr/>
-        </p:nvSpPr>
-        <p:spPr>
-          <a:xfrm>
-            <a:off x="4510490" y="4480256"/>
-            <a:ext cx="76000" cy="76000"/>
-          </a:xfrm>
-          <a:prstGeom prst="ellipse">
-            <a:avLst/>
-          </a:prstGeom>
-          <a:noFill/>
-          <a:ln w="13970">
-            <a:solidFill>
-              <a:srgbClr val="D4A300"/>
-            </a:solidFill>
-          </a:ln>
-          <a:effectLst/>
-        </p:spPr>
-        <p:style>
-          <a:lnRef idx="1">
-            <a:schemeClr val="accent1"/>
-          </a:lnRef>
-          <a:fillRef idx="3">
-            <a:schemeClr val="accent1"/>
-          </a:fillRef>
-          <a:effectRef idx="2">
-            <a:schemeClr val="accent1"/>
-          </a:effectRef>
-          <a:fontRef idx="minor">
-            <a:schemeClr val="lt1"/>
-          </a:fontRef>
-        </p:style>
-        <p:txBody>
-          <a:bodyPr rtlCol="0" anchor="ctr"/>
-          <a:lstStyle/>
-          <a:p>
-            <a:pPr algn="ctr"/>
-          </a:p>
-        </p:txBody>
-      </p:sp>
-      <p:sp>
-        <p:nvSpPr>
-          <p:cNvPr id="1569" name="Oval 1568"/>
-          <p:cNvSpPr/>
-          <p:nvPr/>
-        </p:nvSpPr>
-        <p:spPr>
-          <a:xfrm>
-            <a:off x="4568049" y="4485925"/>
-            <a:ext cx="76000" cy="76000"/>
-          </a:xfrm>
-          <a:prstGeom prst="ellipse">
-            <a:avLst/>
-          </a:prstGeom>
-          <a:noFill/>
-          <a:ln w="13970">
-            <a:solidFill>
-              <a:srgbClr val="D4A300"/>
-            </a:solidFill>
-          </a:ln>
-          <a:effectLst/>
-        </p:spPr>
-        <p:style>
-          <a:lnRef idx="1">
-            <a:schemeClr val="accent1"/>
-          </a:lnRef>
-          <a:fillRef idx="3">
-            <a:schemeClr val="accent1"/>
-          </a:fillRef>
-          <a:effectRef idx="2">
-            <a:schemeClr val="accent1"/>
-          </a:effectRef>
-          <a:fontRef idx="minor">
-            <a:schemeClr val="lt1"/>
-          </a:fontRef>
-        </p:style>
-        <p:txBody>
-          <a:bodyPr rtlCol="0" anchor="ctr"/>
-          <a:lstStyle/>
-          <a:p>
-            <a:pPr algn="ctr"/>
-          </a:p>
-        </p:txBody>
-      </p:sp>
-      <p:sp>
-        <p:nvSpPr>
-          <p:cNvPr id="1570" name="Oval 1569"/>
-          <p:cNvSpPr/>
-          <p:nvPr/>
-        </p:nvSpPr>
-        <p:spPr>
-          <a:xfrm>
-            <a:off x="8007452" y="4489540"/>
-            <a:ext cx="76000" cy="76000"/>
-          </a:xfrm>
-          <a:prstGeom prst="ellipse">
-            <a:avLst/>
-          </a:prstGeom>
-          <a:noFill/>
-          <a:ln w="13970">
-            <a:solidFill>
-              <a:srgbClr val="D4A300"/>
-            </a:solidFill>
-          </a:ln>
-          <a:effectLst/>
-        </p:spPr>
-        <p:style>
-          <a:lnRef idx="1">
-            <a:schemeClr val="accent1"/>
-          </a:lnRef>
-          <a:fillRef idx="3">
-            <a:schemeClr val="accent1"/>
-          </a:fillRef>
-          <a:effectRef idx="2">
-            <a:schemeClr val="accent1"/>
-          </a:effectRef>
-          <a:fontRef idx="minor">
-            <a:schemeClr val="lt1"/>
-          </a:fontRef>
-        </p:style>
-        <p:txBody>
-          <a:bodyPr rtlCol="0" anchor="ctr"/>
-          <a:lstStyle/>
-          <a:p>
-            <a:pPr algn="ctr"/>
-          </a:p>
-        </p:txBody>
-      </p:sp>
-      <p:sp>
-        <p:nvSpPr>
-          <p:cNvPr id="1571" name="Oval 1570"/>
-          <p:cNvSpPr/>
-          <p:nvPr/>
-        </p:nvSpPr>
-        <p:spPr>
-          <a:xfrm>
-            <a:off x="3901379" y="4491658"/>
-            <a:ext cx="76000" cy="76000"/>
-          </a:xfrm>
-          <a:prstGeom prst="ellipse">
-            <a:avLst/>
-          </a:prstGeom>
-          <a:noFill/>
-          <a:ln w="13970">
-            <a:solidFill>
-              <a:srgbClr val="D4A300"/>
-            </a:solidFill>
-          </a:ln>
-          <a:effectLst/>
-        </p:spPr>
-        <p:style>
-          <a:lnRef idx="1">
-            <a:schemeClr val="accent1"/>
-          </a:lnRef>
-          <a:fillRef idx="3">
-            <a:schemeClr val="accent1"/>
-          </a:fillRef>
-          <a:effectRef idx="2">
-            <a:schemeClr val="accent1"/>
-          </a:effectRef>
-          <a:fontRef idx="minor">
-            <a:schemeClr val="lt1"/>
-          </a:fontRef>
-        </p:style>
-        <p:txBody>
-          <a:bodyPr rtlCol="0" anchor="ctr"/>
-          <a:lstStyle/>
-          <a:p>
-            <a:pPr algn="ctr"/>
-          </a:p>
-        </p:txBody>
-      </p:sp>
-      <p:sp>
-        <p:nvSpPr>
-          <p:cNvPr id="1572" name="Oval 1571"/>
-          <p:cNvSpPr/>
-          <p:nvPr/>
-        </p:nvSpPr>
-        <p:spPr>
-          <a:xfrm>
-            <a:off x="4601199" y="4491771"/>
-            <a:ext cx="76000" cy="76000"/>
-          </a:xfrm>
-          <a:prstGeom prst="ellipse">
-            <a:avLst/>
-          </a:prstGeom>
-          <a:noFill/>
-          <a:ln w="13970">
-            <a:solidFill>
-              <a:srgbClr val="D4A300"/>
-            </a:solidFill>
-          </a:ln>
-          <a:effectLst/>
-        </p:spPr>
-        <p:style>
-          <a:lnRef idx="1">
-            <a:schemeClr val="accent1"/>
-          </a:lnRef>
-          <a:fillRef idx="3">
-            <a:schemeClr val="accent1"/>
-          </a:fillRef>
-          <a:effectRef idx="2">
-            <a:schemeClr val="accent1"/>
-          </a:effectRef>
-          <a:fontRef idx="minor">
-            <a:schemeClr val="lt1"/>
-          </a:fontRef>
-        </p:style>
-        <p:txBody>
-          <a:bodyPr rtlCol="0" anchor="ctr"/>
-          <a:lstStyle/>
-          <a:p>
-            <a:pPr algn="ctr"/>
-          </a:p>
-        </p:txBody>
-      </p:sp>
-      <p:sp>
-        <p:nvSpPr>
-          <p:cNvPr id="1573" name="Oval 1572"/>
-          <p:cNvSpPr/>
-          <p:nvPr/>
-        </p:nvSpPr>
-        <p:spPr>
-          <a:xfrm>
-            <a:off x="4600650" y="4493322"/>
-            <a:ext cx="76000" cy="76000"/>
-          </a:xfrm>
-          <a:prstGeom prst="ellipse">
-            <a:avLst/>
-          </a:prstGeom>
-          <a:noFill/>
-          <a:ln w="13970">
-            <a:solidFill>
-              <a:srgbClr val="D4A300"/>
-            </a:solidFill>
-          </a:ln>
-          <a:effectLst/>
-        </p:spPr>
-        <p:style>
-          <a:lnRef idx="1">
-            <a:schemeClr val="accent1"/>
-          </a:lnRef>
-          <a:fillRef idx="3">
-            <a:schemeClr val="accent1"/>
-          </a:fillRef>
-          <a:effectRef idx="2">
-            <a:schemeClr val="accent1"/>
-          </a:effectRef>
-          <a:fontRef idx="minor">
-            <a:schemeClr val="lt1"/>
-          </a:fontRef>
-        </p:style>
-        <p:txBody>
-          <a:bodyPr rtlCol="0" anchor="ctr"/>
-          <a:lstStyle/>
-          <a:p>
-            <a:pPr algn="ctr"/>
-          </a:p>
-        </p:txBody>
-      </p:sp>
-      <p:sp>
-        <p:nvSpPr>
-          <p:cNvPr id="1574" name="Oval 1573"/>
-          <p:cNvSpPr/>
-          <p:nvPr/>
-        </p:nvSpPr>
-        <p:spPr>
-          <a:xfrm>
-            <a:off x="6782072" y="4495051"/>
-            <a:ext cx="76000" cy="76000"/>
-          </a:xfrm>
-          <a:prstGeom prst="ellipse">
-            <a:avLst/>
-          </a:prstGeom>
-          <a:noFill/>
-          <a:ln w="13970">
-            <a:solidFill>
-              <a:srgbClr val="D4A300"/>
-            </a:solidFill>
-          </a:ln>
-          <a:effectLst/>
-        </p:spPr>
-        <p:style>
-          <a:lnRef idx="1">
-            <a:schemeClr val="accent1"/>
-          </a:lnRef>
-          <a:fillRef idx="3">
-            <a:schemeClr val="accent1"/>
-          </a:fillRef>
-          <a:effectRef idx="2">
-            <a:schemeClr val="accent1"/>
-          </a:effectRef>
-          <a:fontRef idx="minor">
-            <a:schemeClr val="lt1"/>
-          </a:fontRef>
-        </p:style>
-        <p:txBody>
-          <a:bodyPr rtlCol="0" anchor="ctr"/>
-          <a:lstStyle/>
-          <a:p>
-            <a:pPr algn="ctr"/>
-          </a:p>
-        </p:txBody>
-      </p:sp>
-      <p:sp>
-        <p:nvSpPr>
-          <p:cNvPr id="1575" name="Oval 1574"/>
-          <p:cNvSpPr/>
-          <p:nvPr/>
-        </p:nvSpPr>
-        <p:spPr>
-          <a:xfrm>
-            <a:off x="2766554" y="4498890"/>
-            <a:ext cx="76000" cy="76000"/>
-          </a:xfrm>
-          <a:prstGeom prst="ellipse">
-            <a:avLst/>
-          </a:prstGeom>
-          <a:noFill/>
-          <a:ln w="13970">
-            <a:solidFill>
-              <a:srgbClr val="D4A300"/>
-            </a:solidFill>
-          </a:ln>
-          <a:effectLst/>
-        </p:spPr>
-        <p:style>
-          <a:lnRef idx="1">
-            <a:schemeClr val="accent1"/>
-          </a:lnRef>
-          <a:fillRef idx="3">
-            <a:schemeClr val="accent1"/>
-          </a:fillRef>
-          <a:effectRef idx="2">
-            <a:schemeClr val="accent1"/>
-          </a:effectRef>
-          <a:fontRef idx="minor">
-            <a:schemeClr val="lt1"/>
-          </a:fontRef>
-        </p:style>
-        <p:txBody>
-          <a:bodyPr rtlCol="0" anchor="ctr"/>
-          <a:lstStyle/>
-          <a:p>
-            <a:pPr algn="ctr"/>
-          </a:p>
-        </p:txBody>
-      </p:sp>
-      <p:sp>
-        <p:nvSpPr>
-          <p:cNvPr id="1576" name="Oval 1575"/>
-          <p:cNvSpPr/>
-          <p:nvPr/>
-        </p:nvSpPr>
-        <p:spPr>
-          <a:xfrm>
-            <a:off x="7657153" y="4501358"/>
-            <a:ext cx="76000" cy="76000"/>
-          </a:xfrm>
-          <a:prstGeom prst="ellipse">
-            <a:avLst/>
-          </a:prstGeom>
-          <a:noFill/>
-          <a:ln w="13970">
-            <a:solidFill>
-              <a:srgbClr val="D4A300"/>
-            </a:solidFill>
-          </a:ln>
-          <a:effectLst/>
-        </p:spPr>
-        <p:style>
-          <a:lnRef idx="1">
-            <a:schemeClr val="accent1"/>
-          </a:lnRef>
-          <a:fillRef idx="3">
-            <a:schemeClr val="accent1"/>
-          </a:fillRef>
-          <a:effectRef idx="2">
-            <a:schemeClr val="accent1"/>
-          </a:effectRef>
-          <a:fontRef idx="minor">
-            <a:schemeClr val="lt1"/>
-          </a:fontRef>
-        </p:style>
-        <p:txBody>
-          <a:bodyPr rtlCol="0" anchor="ctr"/>
-          <a:lstStyle/>
-          <a:p>
-            <a:pPr algn="ctr"/>
-          </a:p>
-        </p:txBody>
-      </p:sp>
-      <p:sp>
-        <p:nvSpPr>
-          <p:cNvPr id="1577" name="Oval 1576"/>
-          <p:cNvSpPr/>
-          <p:nvPr/>
-        </p:nvSpPr>
-        <p:spPr>
-          <a:xfrm>
-            <a:off x="1737961" y="4503995"/>
-            <a:ext cx="76000" cy="76000"/>
-          </a:xfrm>
-          <a:prstGeom prst="ellipse">
-            <a:avLst/>
-          </a:prstGeom>
-          <a:noFill/>
-          <a:ln w="13970">
-            <a:solidFill>
-              <a:srgbClr val="D4A300"/>
-            </a:solidFill>
-          </a:ln>
-          <a:effectLst/>
-        </p:spPr>
-        <p:style>
-          <a:lnRef idx="1">
-            <a:schemeClr val="accent1"/>
-          </a:lnRef>
-          <a:fillRef idx="3">
-            <a:schemeClr val="accent1"/>
-          </a:fillRef>
-          <a:effectRef idx="2">
-            <a:schemeClr val="accent1"/>
-          </a:effectRef>
-          <a:fontRef idx="minor">
-            <a:schemeClr val="lt1"/>
-          </a:fontRef>
-        </p:style>
-        <p:txBody>
-          <a:bodyPr rtlCol="0" anchor="ctr"/>
-          <a:lstStyle/>
-          <a:p>
-            <a:pPr algn="ctr"/>
-          </a:p>
-        </p:txBody>
-      </p:sp>
-      <p:sp>
-        <p:nvSpPr>
-          <p:cNvPr id="1578" name="Oval 1577"/>
-          <p:cNvSpPr/>
-          <p:nvPr/>
-        </p:nvSpPr>
-        <p:spPr>
-          <a:xfrm>
-            <a:off x="4611177" y="4505367"/>
-            <a:ext cx="76000" cy="76000"/>
-          </a:xfrm>
-          <a:prstGeom prst="ellipse">
-            <a:avLst/>
-          </a:prstGeom>
-          <a:noFill/>
-          <a:ln w="13970">
-            <a:solidFill>
-              <a:srgbClr val="D4A300"/>
-            </a:solidFill>
-          </a:ln>
-          <a:effectLst/>
-        </p:spPr>
-        <p:style>
-          <a:lnRef idx="1">
-            <a:schemeClr val="accent1"/>
-          </a:lnRef>
-          <a:fillRef idx="3">
-            <a:schemeClr val="accent1"/>
-          </a:fillRef>
-          <a:effectRef idx="2">
-            <a:schemeClr val="accent1"/>
-          </a:effectRef>
-          <a:fontRef idx="minor">
-            <a:schemeClr val="lt1"/>
-          </a:fontRef>
-        </p:style>
-        <p:txBody>
-          <a:bodyPr rtlCol="0" anchor="ctr"/>
-          <a:lstStyle/>
-          <a:p>
-            <a:pPr algn="ctr"/>
-          </a:p>
-        </p:txBody>
-      </p:sp>
-      <p:sp>
-        <p:nvSpPr>
-          <p:cNvPr id="1579" name="Oval 1578"/>
-          <p:cNvSpPr/>
-          <p:nvPr/>
-        </p:nvSpPr>
-        <p:spPr>
-          <a:xfrm>
-            <a:off x="4580070" y="4506042"/>
-            <a:ext cx="76000" cy="76000"/>
-          </a:xfrm>
-          <a:prstGeom prst="ellipse">
-            <a:avLst/>
-          </a:prstGeom>
-          <a:noFill/>
-          <a:ln w="13970">
-            <a:solidFill>
-              <a:srgbClr val="D4A300"/>
-            </a:solidFill>
-          </a:ln>
-          <a:effectLst/>
-        </p:spPr>
-        <p:style>
-          <a:lnRef idx="1">
-            <a:schemeClr val="accent1"/>
-          </a:lnRef>
-          <a:fillRef idx="3">
-            <a:schemeClr val="accent1"/>
-          </a:fillRef>
-          <a:effectRef idx="2">
-            <a:schemeClr val="accent1"/>
-          </a:effectRef>
-          <a:fontRef idx="minor">
-            <a:schemeClr val="lt1"/>
-          </a:fontRef>
-        </p:style>
-        <p:txBody>
-          <a:bodyPr rtlCol="0" anchor="ctr"/>
-          <a:lstStyle/>
-          <a:p>
-            <a:pPr algn="ctr"/>
-          </a:p>
-        </p:txBody>
-      </p:sp>
-      <p:sp>
-        <p:nvSpPr>
-          <p:cNvPr id="1580" name="Oval 1579"/>
-          <p:cNvSpPr/>
-          <p:nvPr/>
-        </p:nvSpPr>
-        <p:spPr>
-          <a:xfrm>
-            <a:off x="9163398" y="4507927"/>
-            <a:ext cx="76000" cy="76000"/>
-          </a:xfrm>
-          <a:prstGeom prst="ellipse">
-            <a:avLst/>
-          </a:prstGeom>
-          <a:noFill/>
-          <a:ln w="13970">
-            <a:solidFill>
-              <a:srgbClr val="D4A300"/>
-            </a:solidFill>
-          </a:ln>
-          <a:effectLst/>
-        </p:spPr>
-        <p:style>
-          <a:lnRef idx="1">
-            <a:schemeClr val="accent1"/>
-          </a:lnRef>
-          <a:fillRef idx="3">
-            <a:schemeClr val="accent1"/>
-          </a:fillRef>
-          <a:effectRef idx="2">
-            <a:schemeClr val="accent1"/>
-          </a:effectRef>
-          <a:fontRef idx="minor">
-            <a:schemeClr val="lt1"/>
-          </a:fontRef>
-        </p:style>
-        <p:txBody>
-          <a:bodyPr rtlCol="0" anchor="ctr"/>
-          <a:lstStyle/>
-          <a:p>
-            <a:pPr algn="ctr"/>
-          </a:p>
-        </p:txBody>
-      </p:sp>
-      <p:sp>
-        <p:nvSpPr>
-          <p:cNvPr id="1581" name="Oval 1580"/>
-          <p:cNvSpPr/>
-          <p:nvPr/>
-        </p:nvSpPr>
-        <p:spPr>
-          <a:xfrm>
-            <a:off x="7066740" y="4508221"/>
-            <a:ext cx="76000" cy="76000"/>
-          </a:xfrm>
-          <a:prstGeom prst="ellipse">
-            <a:avLst/>
-          </a:prstGeom>
-          <a:noFill/>
-          <a:ln w="13970">
-            <a:solidFill>
-              <a:srgbClr val="D4A300"/>
-            </a:solidFill>
-          </a:ln>
-          <a:effectLst/>
-        </p:spPr>
-        <p:style>
-          <a:lnRef idx="1">
-            <a:schemeClr val="accent1"/>
-          </a:lnRef>
-          <a:fillRef idx="3">
-            <a:schemeClr val="accent1"/>
-          </a:fillRef>
-          <a:effectRef idx="2">
-            <a:schemeClr val="accent1"/>
-          </a:effectRef>
-          <a:fontRef idx="minor">
-            <a:schemeClr val="lt1"/>
-          </a:fontRef>
-        </p:style>
-        <p:txBody>
-          <a:bodyPr rtlCol="0" anchor="ctr"/>
-          <a:lstStyle/>
-          <a:p>
-            <a:pPr algn="ctr"/>
-          </a:p>
-        </p:txBody>
-      </p:sp>
-      <p:sp>
-        <p:nvSpPr>
-          <p:cNvPr id="1582" name="Oval 1581"/>
-          <p:cNvSpPr/>
-          <p:nvPr/>
-        </p:nvSpPr>
-        <p:spPr>
-          <a:xfrm>
-            <a:off x="3809628" y="4508588"/>
-            <a:ext cx="76000" cy="76000"/>
-          </a:xfrm>
-          <a:prstGeom prst="ellipse">
-            <a:avLst/>
-          </a:prstGeom>
-          <a:noFill/>
-          <a:ln w="13970">
-            <a:solidFill>
-              <a:srgbClr val="D4A300"/>
-            </a:solidFill>
-          </a:ln>
-          <a:effectLst/>
-        </p:spPr>
-        <p:style>
-          <a:lnRef idx="1">
-            <a:schemeClr val="accent1"/>
-          </a:lnRef>
-          <a:fillRef idx="3">
-            <a:schemeClr val="accent1"/>
-          </a:fillRef>
-          <a:effectRef idx="2">
-            <a:schemeClr val="accent1"/>
-          </a:effectRef>
-          <a:fontRef idx="minor">
-            <a:schemeClr val="lt1"/>
-          </a:fontRef>
-        </p:style>
-        <p:txBody>
-          <a:bodyPr rtlCol="0" anchor="ctr"/>
-          <a:lstStyle/>
-          <a:p>
-            <a:pPr algn="ctr"/>
-          </a:p>
-        </p:txBody>
-      </p:sp>
-      <p:sp>
-        <p:nvSpPr>
-          <p:cNvPr id="1583" name="Oval 1582"/>
-          <p:cNvSpPr/>
-          <p:nvPr/>
-        </p:nvSpPr>
-        <p:spPr>
-          <a:xfrm>
-            <a:off x="9717944" y="4509417"/>
-            <a:ext cx="76000" cy="76000"/>
-          </a:xfrm>
-          <a:prstGeom prst="ellipse">
-            <a:avLst/>
-          </a:prstGeom>
-          <a:noFill/>
-          <a:ln w="13970">
-            <a:solidFill>
-              <a:srgbClr val="D4A300"/>
-            </a:solidFill>
-          </a:ln>
-          <a:effectLst/>
-        </p:spPr>
-        <p:style>
-          <a:lnRef idx="1">
-            <a:schemeClr val="accent1"/>
-          </a:lnRef>
-          <a:fillRef idx="3">
-            <a:schemeClr val="accent1"/>
-          </a:fillRef>
-          <a:effectRef idx="2">
-            <a:schemeClr val="accent1"/>
-          </a:effectRef>
-          <a:fontRef idx="minor">
-            <a:schemeClr val="lt1"/>
-          </a:fontRef>
-        </p:style>
-        <p:txBody>
-          <a:bodyPr rtlCol="0" anchor="ctr"/>
-          <a:lstStyle/>
-          <a:p>
-            <a:pPr algn="ctr"/>
-          </a:p>
-        </p:txBody>
-      </p:sp>
-      <p:sp>
-        <p:nvSpPr>
-          <p:cNvPr id="1584" name="Oval 1583"/>
-          <p:cNvSpPr/>
-          <p:nvPr/>
-        </p:nvSpPr>
-        <p:spPr>
-          <a:xfrm>
-            <a:off x="6416283" y="4514319"/>
-            <a:ext cx="76000" cy="76000"/>
-          </a:xfrm>
-          <a:prstGeom prst="ellipse">
-            <a:avLst/>
-          </a:prstGeom>
-          <a:noFill/>
-          <a:ln w="13970">
-            <a:solidFill>
-              <a:srgbClr val="D4A300"/>
-            </a:solidFill>
-          </a:ln>
-          <a:effectLst/>
-        </p:spPr>
-        <p:style>
-          <a:lnRef idx="1">
-            <a:schemeClr val="accent1"/>
-          </a:lnRef>
-          <a:fillRef idx="3">
-            <a:schemeClr val="accent1"/>
-          </a:fillRef>
-          <a:effectRef idx="2">
-            <a:schemeClr val="accent1"/>
-          </a:effectRef>
-          <a:fontRef idx="minor">
-            <a:schemeClr val="lt1"/>
-          </a:fontRef>
-        </p:style>
-        <p:txBody>
-          <a:bodyPr rtlCol="0" anchor="ctr"/>
-          <a:lstStyle/>
-          <a:p>
-            <a:pPr algn="ctr"/>
-          </a:p>
-        </p:txBody>
-      </p:sp>
-      <p:sp>
-        <p:nvSpPr>
-          <p:cNvPr id="1585" name="Oval 1584"/>
-          <p:cNvSpPr/>
-          <p:nvPr/>
-        </p:nvSpPr>
-        <p:spPr>
-          <a:xfrm>
-            <a:off x="7733672" y="4514424"/>
-            <a:ext cx="76000" cy="76000"/>
-          </a:xfrm>
-          <a:prstGeom prst="ellipse">
-            <a:avLst/>
-          </a:prstGeom>
-          <a:noFill/>
-          <a:ln w="13970">
-            <a:solidFill>
-              <a:srgbClr val="D4A300"/>
-            </a:solidFill>
-          </a:ln>
-          <a:effectLst/>
-        </p:spPr>
-        <p:style>
-          <a:lnRef idx="1">
-            <a:schemeClr val="accent1"/>
-          </a:lnRef>
-          <a:fillRef idx="3">
-            <a:schemeClr val="accent1"/>
-          </a:fillRef>
-          <a:effectRef idx="2">
-            <a:schemeClr val="accent1"/>
-          </a:effectRef>
-          <a:fontRef idx="minor">
-            <a:schemeClr val="lt1"/>
-          </a:fontRef>
-        </p:style>
-        <p:txBody>
-          <a:bodyPr rtlCol="0" anchor="ctr"/>
-          <a:lstStyle/>
-          <a:p>
-            <a:pPr algn="ctr"/>
-          </a:p>
-        </p:txBody>
-      </p:sp>
-      <p:sp>
-        <p:nvSpPr>
-          <p:cNvPr id="1586" name="Oval 1585"/>
-          <p:cNvSpPr/>
-          <p:nvPr/>
-        </p:nvSpPr>
-        <p:spPr>
-          <a:xfrm>
-            <a:off x="8608044" y="4515414"/>
-            <a:ext cx="76000" cy="76000"/>
-          </a:xfrm>
-          <a:prstGeom prst="ellipse">
-            <a:avLst/>
-          </a:prstGeom>
-          <a:noFill/>
-          <a:ln w="13970">
-            <a:solidFill>
-              <a:srgbClr val="D4A300"/>
-            </a:solidFill>
-          </a:ln>
-          <a:effectLst/>
-        </p:spPr>
-        <p:style>
-          <a:lnRef idx="1">
-            <a:schemeClr val="accent1"/>
-          </a:lnRef>
-          <a:fillRef idx="3">
-            <a:schemeClr val="accent1"/>
-          </a:fillRef>
-          <a:effectRef idx="2">
-            <a:schemeClr val="accent1"/>
-          </a:effectRef>
-          <a:fontRef idx="minor">
-            <a:schemeClr val="lt1"/>
-          </a:fontRef>
-        </p:style>
-        <p:txBody>
-          <a:bodyPr rtlCol="0" anchor="ctr"/>
-          <a:lstStyle/>
-          <a:p>
-            <a:pPr algn="ctr"/>
-          </a:p>
-        </p:txBody>
-      </p:sp>
-      <p:sp>
-        <p:nvSpPr>
-          <p:cNvPr id="1587" name="Oval 1586"/>
-          <p:cNvSpPr/>
-          <p:nvPr/>
-        </p:nvSpPr>
-        <p:spPr>
-          <a:xfrm>
-            <a:off x="7081532" y="4516074"/>
-            <a:ext cx="76000" cy="76000"/>
-          </a:xfrm>
-          <a:prstGeom prst="ellipse">
-            <a:avLst/>
-          </a:prstGeom>
-          <a:noFill/>
-          <a:ln w="13970">
-            <a:solidFill>
-              <a:srgbClr val="D4A300"/>
-            </a:solidFill>
-          </a:ln>
-          <a:effectLst/>
-        </p:spPr>
-        <p:style>
-          <a:lnRef idx="1">
-            <a:schemeClr val="accent1"/>
-          </a:lnRef>
-          <a:fillRef idx="3">
-            <a:schemeClr val="accent1"/>
-          </a:fillRef>
-          <a:effectRef idx="2">
-            <a:schemeClr val="accent1"/>
-          </a:effectRef>
-          <a:fontRef idx="minor">
-            <a:schemeClr val="lt1"/>
-          </a:fontRef>
-        </p:style>
-        <p:txBody>
-          <a:bodyPr rtlCol="0" anchor="ctr"/>
-          <a:lstStyle/>
-          <a:p>
-            <a:pPr algn="ctr"/>
-          </a:p>
-        </p:txBody>
-      </p:sp>
-      <p:sp>
-        <p:nvSpPr>
-          <p:cNvPr id="1588" name="Oval 1587"/>
-          <p:cNvSpPr/>
-          <p:nvPr/>
-        </p:nvSpPr>
-        <p:spPr>
-          <a:xfrm>
-            <a:off x="3077432" y="4522711"/>
-            <a:ext cx="76000" cy="76000"/>
-          </a:xfrm>
-          <a:prstGeom prst="ellipse">
-            <a:avLst/>
-          </a:prstGeom>
-          <a:noFill/>
-          <a:ln w="13970">
-            <a:solidFill>
-              <a:srgbClr val="D4A300"/>
-            </a:solidFill>
-          </a:ln>
-          <a:effectLst/>
-        </p:spPr>
-        <p:style>
-          <a:lnRef idx="1">
-            <a:schemeClr val="accent1"/>
-          </a:lnRef>
-          <a:fillRef idx="3">
-            <a:schemeClr val="accent1"/>
-          </a:fillRef>
-          <a:effectRef idx="2">
-            <a:schemeClr val="accent1"/>
-          </a:effectRef>
-          <a:fontRef idx="minor">
-            <a:schemeClr val="lt1"/>
-          </a:fontRef>
-        </p:style>
-        <p:txBody>
-          <a:bodyPr rtlCol="0" anchor="ctr"/>
-          <a:lstStyle/>
-          <a:p>
-            <a:pPr algn="ctr"/>
-          </a:p>
-        </p:txBody>
-      </p:sp>
-      <p:sp>
-        <p:nvSpPr>
-          <p:cNvPr id="1589" name="Oval 1588"/>
-          <p:cNvSpPr/>
-          <p:nvPr/>
-        </p:nvSpPr>
-        <p:spPr>
-          <a:xfrm>
-            <a:off x="4148196" y="4525478"/>
-            <a:ext cx="76000" cy="76000"/>
-          </a:xfrm>
-          <a:prstGeom prst="ellipse">
-            <a:avLst/>
-          </a:prstGeom>
-          <a:noFill/>
-          <a:ln w="13970">
-            <a:solidFill>
-              <a:srgbClr val="D4A300"/>
-            </a:solidFill>
-          </a:ln>
-          <a:effectLst/>
-        </p:spPr>
-        <p:style>
-          <a:lnRef idx="1">
-            <a:schemeClr val="accent1"/>
-          </a:lnRef>
-          <a:fillRef idx="3">
-            <a:schemeClr val="accent1"/>
-          </a:fillRef>
-          <a:effectRef idx="2">
-            <a:schemeClr val="accent1"/>
-          </a:effectRef>
-          <a:fontRef idx="minor">
-            <a:schemeClr val="lt1"/>
-          </a:fontRef>
-        </p:style>
-        <p:txBody>
-          <a:bodyPr rtlCol="0" anchor="ctr"/>
-          <a:lstStyle/>
-          <a:p>
-            <a:pPr algn="ctr"/>
-          </a:p>
-        </p:txBody>
-      </p:sp>
-      <p:sp>
-        <p:nvSpPr>
-          <p:cNvPr id="1590" name="Oval 1589"/>
-          <p:cNvSpPr/>
-          <p:nvPr/>
-        </p:nvSpPr>
-        <p:spPr>
-          <a:xfrm>
-            <a:off x="3711770" y="4527105"/>
-            <a:ext cx="76000" cy="76000"/>
-          </a:xfrm>
-          <a:prstGeom prst="ellipse">
-            <a:avLst/>
-          </a:prstGeom>
-          <a:noFill/>
-          <a:ln w="13970">
-            <a:solidFill>
-              <a:srgbClr val="D4A300"/>
-            </a:solidFill>
-          </a:ln>
-          <a:effectLst/>
-        </p:spPr>
-        <p:style>
-          <a:lnRef idx="1">
-            <a:schemeClr val="accent1"/>
-          </a:lnRef>
-          <a:fillRef idx="3">
-            <a:schemeClr val="accent1"/>
-          </a:fillRef>
-          <a:effectRef idx="2">
-            <a:schemeClr val="accent1"/>
-          </a:effectRef>
-          <a:fontRef idx="minor">
-            <a:schemeClr val="lt1"/>
-          </a:fontRef>
-        </p:style>
-        <p:txBody>
-          <a:bodyPr rtlCol="0" anchor="ctr"/>
-          <a:lstStyle/>
-          <a:p>
-            <a:pPr algn="ctr"/>
-          </a:p>
-        </p:txBody>
-      </p:sp>
-      <p:sp>
-        <p:nvSpPr>
-          <p:cNvPr id="1591" name="Oval 1590"/>
-          <p:cNvSpPr/>
-          <p:nvPr/>
-        </p:nvSpPr>
-        <p:spPr>
-          <a:xfrm>
-            <a:off x="4191585" y="4534578"/>
-            <a:ext cx="76000" cy="76000"/>
-          </a:xfrm>
-          <a:prstGeom prst="ellipse">
-            <a:avLst/>
-          </a:prstGeom>
-          <a:noFill/>
-          <a:ln w="13970">
-            <a:solidFill>
-              <a:srgbClr val="D4A300"/>
-            </a:solidFill>
-          </a:ln>
-          <a:effectLst/>
-        </p:spPr>
-        <p:style>
-          <a:lnRef idx="1">
-            <a:schemeClr val="accent1"/>
-          </a:lnRef>
-          <a:fillRef idx="3">
-            <a:schemeClr val="accent1"/>
-          </a:fillRef>
-          <a:effectRef idx="2">
-            <a:schemeClr val="accent1"/>
-          </a:effectRef>
-          <a:fontRef idx="minor">
-            <a:schemeClr val="lt1"/>
-          </a:fontRef>
-        </p:style>
-        <p:txBody>
-          <a:bodyPr rtlCol="0" anchor="ctr"/>
-          <a:lstStyle/>
-          <a:p>
-            <a:pPr algn="ctr"/>
-          </a:p>
-        </p:txBody>
-      </p:sp>
-      <p:sp>
-        <p:nvSpPr>
-          <p:cNvPr id="1592" name="Oval 1591"/>
-          <p:cNvSpPr/>
-          <p:nvPr/>
-        </p:nvSpPr>
-        <p:spPr>
-          <a:xfrm>
-            <a:off x="2233861" y="4535328"/>
-            <a:ext cx="76000" cy="76000"/>
-          </a:xfrm>
-          <a:prstGeom prst="ellipse">
-            <a:avLst/>
-          </a:prstGeom>
-          <a:noFill/>
-          <a:ln w="13970">
-            <a:solidFill>
-              <a:srgbClr val="D4A300"/>
-            </a:solidFill>
-          </a:ln>
-          <a:effectLst/>
-        </p:spPr>
-        <p:style>
-          <a:lnRef idx="1">
-            <a:schemeClr val="accent1"/>
-          </a:lnRef>
-          <a:fillRef idx="3">
-            <a:schemeClr val="accent1"/>
-          </a:fillRef>
-          <a:effectRef idx="2">
-            <a:schemeClr val="accent1"/>
-          </a:effectRef>
-          <a:fontRef idx="minor">
-            <a:schemeClr val="lt1"/>
-          </a:fontRef>
-        </p:style>
-        <p:txBody>
-          <a:bodyPr rtlCol="0" anchor="ctr"/>
-          <a:lstStyle/>
-          <a:p>
-            <a:pPr algn="ctr"/>
-          </a:p>
-        </p:txBody>
-      </p:sp>
-      <p:sp>
-        <p:nvSpPr>
-          <p:cNvPr id="1593" name="Oval 1592"/>
-          <p:cNvSpPr/>
-          <p:nvPr/>
-        </p:nvSpPr>
-        <p:spPr>
-          <a:xfrm>
-            <a:off x="4456180" y="4539909"/>
-            <a:ext cx="76000" cy="76000"/>
-          </a:xfrm>
-          <a:prstGeom prst="ellipse">
-            <a:avLst/>
-          </a:prstGeom>
-          <a:noFill/>
-          <a:ln w="13970">
-            <a:solidFill>
-              <a:srgbClr val="D4A300"/>
-            </a:solidFill>
-          </a:ln>
-          <a:effectLst/>
-        </p:spPr>
-        <p:style>
-          <a:lnRef idx="1">
-            <a:schemeClr val="accent1"/>
-          </a:lnRef>
-          <a:fillRef idx="3">
-            <a:schemeClr val="accent1"/>
-          </a:fillRef>
-          <a:effectRef idx="2">
-            <a:schemeClr val="accent1"/>
-          </a:effectRef>
-          <a:fontRef idx="minor">
-            <a:schemeClr val="lt1"/>
-          </a:fontRef>
-        </p:style>
-        <p:txBody>
-          <a:bodyPr rtlCol="0" anchor="ctr"/>
-          <a:lstStyle/>
-          <a:p>
-            <a:pPr algn="ctr"/>
-          </a:p>
-        </p:txBody>
-      </p:sp>
-      <p:sp>
-        <p:nvSpPr>
-          <p:cNvPr id="1594" name="Oval 1593"/>
-          <p:cNvSpPr/>
-          <p:nvPr/>
-        </p:nvSpPr>
-        <p:spPr>
-          <a:xfrm>
-            <a:off x="3656643" y="4541834"/>
-            <a:ext cx="76000" cy="76000"/>
-          </a:xfrm>
-          <a:prstGeom prst="ellipse">
-            <a:avLst/>
-          </a:prstGeom>
-          <a:noFill/>
-          <a:ln w="13970">
-            <a:solidFill>
-              <a:srgbClr val="D4A300"/>
-            </a:solidFill>
-          </a:ln>
-          <a:effectLst/>
-        </p:spPr>
-        <p:style>
-          <a:lnRef idx="1">
-            <a:schemeClr val="accent1"/>
-          </a:lnRef>
-          <a:fillRef idx="3">
-            <a:schemeClr val="accent1"/>
-          </a:fillRef>
-          <a:effectRef idx="2">
-            <a:schemeClr val="accent1"/>
-          </a:effectRef>
-          <a:fontRef idx="minor">
-            <a:schemeClr val="lt1"/>
-          </a:fontRef>
-        </p:style>
-        <p:txBody>
-          <a:bodyPr rtlCol="0" anchor="ctr"/>
-          <a:lstStyle/>
-          <a:p>
-            <a:pPr algn="ctr"/>
-          </a:p>
-        </p:txBody>
-      </p:sp>
-      <p:sp>
-        <p:nvSpPr>
-          <p:cNvPr id="1595" name="Oval 1594"/>
-          <p:cNvSpPr/>
-          <p:nvPr/>
-        </p:nvSpPr>
-        <p:spPr>
-          <a:xfrm>
-            <a:off x="4236097" y="4542623"/>
-            <a:ext cx="76000" cy="76000"/>
-          </a:xfrm>
-          <a:prstGeom prst="ellipse">
-            <a:avLst/>
-          </a:prstGeom>
-          <a:noFill/>
-          <a:ln w="13970">
-            <a:solidFill>
-              <a:srgbClr val="D4A300"/>
-            </a:solidFill>
-          </a:ln>
-          <a:effectLst/>
-        </p:spPr>
-        <p:style>
-          <a:lnRef idx="1">
-            <a:schemeClr val="accent1"/>
-          </a:lnRef>
-          <a:fillRef idx="3">
-            <a:schemeClr val="accent1"/>
-          </a:fillRef>
-          <a:effectRef idx="2">
-            <a:schemeClr val="accent1"/>
-          </a:effectRef>
-          <a:fontRef idx="minor">
-            <a:schemeClr val="lt1"/>
-          </a:fontRef>
-        </p:style>
-        <p:txBody>
-          <a:bodyPr rtlCol="0" anchor="ctr"/>
-          <a:lstStyle/>
-          <a:p>
-            <a:pPr algn="ctr"/>
-          </a:p>
-        </p:txBody>
-      </p:sp>
-      <p:sp>
-        <p:nvSpPr>
-          <p:cNvPr id="1596" name="Oval 1595"/>
-          <p:cNvSpPr/>
-          <p:nvPr/>
-        </p:nvSpPr>
-        <p:spPr>
-          <a:xfrm>
-            <a:off x="6469032" y="4546355"/>
-            <a:ext cx="76000" cy="76000"/>
-          </a:xfrm>
-          <a:prstGeom prst="ellipse">
-            <a:avLst/>
-          </a:prstGeom>
-          <a:noFill/>
-          <a:ln w="13970">
-            <a:solidFill>
-              <a:srgbClr val="D4A300"/>
-            </a:solidFill>
-          </a:ln>
-          <a:effectLst/>
-        </p:spPr>
-        <p:style>
-          <a:lnRef idx="1">
-            <a:schemeClr val="accent1"/>
-          </a:lnRef>
-          <a:fillRef idx="3">
-            <a:schemeClr val="accent1"/>
-          </a:fillRef>
-          <a:effectRef idx="2">
-            <a:schemeClr val="accent1"/>
-          </a:effectRef>
-          <a:fontRef idx="minor">
-            <a:schemeClr val="lt1"/>
-          </a:fontRef>
-        </p:style>
-        <p:txBody>
-          <a:bodyPr rtlCol="0" anchor="ctr"/>
-          <a:lstStyle/>
-          <a:p>
-            <a:pPr algn="ctr"/>
-          </a:p>
-        </p:txBody>
-      </p:sp>
-      <p:sp>
-        <p:nvSpPr>
-          <p:cNvPr id="1597" name="Oval 1596"/>
-          <p:cNvSpPr/>
-          <p:nvPr/>
-        </p:nvSpPr>
-        <p:spPr>
-          <a:xfrm>
-            <a:off x="2910732" y="4546824"/>
-            <a:ext cx="76000" cy="76000"/>
-          </a:xfrm>
-          <a:prstGeom prst="ellipse">
-            <a:avLst/>
-          </a:prstGeom>
-          <a:noFill/>
-          <a:ln w="13970">
-            <a:solidFill>
-              <a:srgbClr val="D4A300"/>
-            </a:solidFill>
-          </a:ln>
-          <a:effectLst/>
-        </p:spPr>
-        <p:style>
-          <a:lnRef idx="1">
-            <a:schemeClr val="accent1"/>
-          </a:lnRef>
-          <a:fillRef idx="3">
-            <a:schemeClr val="accent1"/>
-          </a:fillRef>
-          <a:effectRef idx="2">
-            <a:schemeClr val="accent1"/>
-          </a:effectRef>
-          <a:fontRef idx="minor">
-            <a:schemeClr val="lt1"/>
-          </a:fontRef>
-        </p:style>
-        <p:txBody>
-          <a:bodyPr rtlCol="0" anchor="ctr"/>
-          <a:lstStyle/>
-          <a:p>
-            <a:pPr algn="ctr"/>
-          </a:p>
-        </p:txBody>
-      </p:sp>
-      <p:sp>
-        <p:nvSpPr>
-          <p:cNvPr id="1598" name="Oval 1597"/>
-          <p:cNvSpPr/>
-          <p:nvPr/>
-        </p:nvSpPr>
-        <p:spPr>
-          <a:xfrm>
-            <a:off x="4758580" y="4553405"/>
-            <a:ext cx="76000" cy="76000"/>
-          </a:xfrm>
-          <a:prstGeom prst="ellipse">
-            <a:avLst/>
-          </a:prstGeom>
-          <a:noFill/>
-          <a:ln w="13970">
-            <a:solidFill>
-              <a:srgbClr val="D4A300"/>
-            </a:solidFill>
-          </a:ln>
-          <a:effectLst/>
-        </p:spPr>
-        <p:style>
-          <a:lnRef idx="1">
-            <a:schemeClr val="accent1"/>
-          </a:lnRef>
-          <a:fillRef idx="3">
-            <a:schemeClr val="accent1"/>
-          </a:fillRef>
-          <a:effectRef idx="2">
-            <a:schemeClr val="accent1"/>
-          </a:effectRef>
-          <a:fontRef idx="minor">
-            <a:schemeClr val="lt1"/>
-          </a:fontRef>
-        </p:style>
-        <p:txBody>
-          <a:bodyPr rtlCol="0" anchor="ctr"/>
-          <a:lstStyle/>
-          <a:p>
-            <a:pPr algn="ctr"/>
-          </a:p>
-        </p:txBody>
-      </p:sp>
-      <p:sp>
-        <p:nvSpPr>
-          <p:cNvPr id="1599" name="Oval 1598"/>
-          <p:cNvSpPr/>
-          <p:nvPr/>
-        </p:nvSpPr>
-        <p:spPr>
-          <a:xfrm>
-            <a:off x="4750033" y="4558000"/>
-            <a:ext cx="76000" cy="76000"/>
-          </a:xfrm>
-          <a:prstGeom prst="ellipse">
-            <a:avLst/>
-          </a:prstGeom>
-          <a:noFill/>
-          <a:ln w="13970">
-            <a:solidFill>
-              <a:srgbClr val="D4A300"/>
-            </a:solidFill>
-          </a:ln>
-          <a:effectLst/>
-        </p:spPr>
-        <p:style>
-          <a:lnRef idx="1">
-            <a:schemeClr val="accent1"/>
-          </a:lnRef>
-          <a:fillRef idx="3">
-            <a:schemeClr val="accent1"/>
-          </a:fillRef>
-          <a:effectRef idx="2">
-            <a:schemeClr val="accent1"/>
-          </a:effectRef>
-          <a:fontRef idx="minor">
-            <a:schemeClr val="lt1"/>
-          </a:fontRef>
-        </p:style>
-        <p:txBody>
-          <a:bodyPr rtlCol="0" anchor="ctr"/>
-          <a:lstStyle/>
-          <a:p>
-            <a:pPr algn="ctr"/>
-          </a:p>
-        </p:txBody>
-      </p:sp>
-      <p:sp>
-        <p:nvSpPr>
-          <p:cNvPr id="1600" name="Oval 1599"/>
-          <p:cNvSpPr/>
-          <p:nvPr/>
-        </p:nvSpPr>
-        <p:spPr>
-          <a:xfrm>
-            <a:off x="6523997" y="4558491"/>
-            <a:ext cx="76000" cy="76000"/>
-          </a:xfrm>
-          <a:prstGeom prst="ellipse">
-            <a:avLst/>
-          </a:prstGeom>
-          <a:noFill/>
-          <a:ln w="13970">
-            <a:solidFill>
-              <a:srgbClr val="D4A300"/>
-            </a:solidFill>
-          </a:ln>
-          <a:effectLst/>
-        </p:spPr>
-        <p:style>
-          <a:lnRef idx="1">
-            <a:schemeClr val="accent1"/>
-          </a:lnRef>
-          <a:fillRef idx="3">
-            <a:schemeClr val="accent1"/>
-          </a:fillRef>
-          <a:effectRef idx="2">
-            <a:schemeClr val="accent1"/>
-          </a:effectRef>
-          <a:fontRef idx="minor">
-            <a:schemeClr val="lt1"/>
-          </a:fontRef>
-        </p:style>
-        <p:txBody>
-          <a:bodyPr rtlCol="0" anchor="ctr"/>
-          <a:lstStyle/>
-          <a:p>
-            <a:pPr algn="ctr"/>
-          </a:p>
-        </p:txBody>
-      </p:sp>
-      <p:sp>
-        <p:nvSpPr>
-          <p:cNvPr id="1601" name="Oval 1600"/>
-          <p:cNvSpPr/>
-          <p:nvPr/>
-        </p:nvSpPr>
-        <p:spPr>
-          <a:xfrm>
-            <a:off x="8322358" y="4572102"/>
-            <a:ext cx="76000" cy="76000"/>
-          </a:xfrm>
-          <a:prstGeom prst="ellipse">
-            <a:avLst/>
-          </a:prstGeom>
-          <a:noFill/>
-          <a:ln w="13970">
-            <a:solidFill>
-              <a:srgbClr val="D4A300"/>
-            </a:solidFill>
-          </a:ln>
-          <a:effectLst/>
-        </p:spPr>
-        <p:style>
-          <a:lnRef idx="1">
-            <a:schemeClr val="accent1"/>
-          </a:lnRef>
-          <a:fillRef idx="3">
-            <a:schemeClr val="accent1"/>
-          </a:fillRef>
-          <a:effectRef idx="2">
-            <a:schemeClr val="accent1"/>
-          </a:effectRef>
-          <a:fontRef idx="minor">
-            <a:schemeClr val="lt1"/>
-          </a:fontRef>
-        </p:style>
-        <p:txBody>
-          <a:bodyPr rtlCol="0" anchor="ctr"/>
-          <a:lstStyle/>
-          <a:p>
-            <a:pPr algn="ctr"/>
-          </a:p>
-        </p:txBody>
-      </p:sp>
-      <p:sp>
-        <p:nvSpPr>
-          <p:cNvPr id="1602" name="Oval 1601"/>
-          <p:cNvSpPr/>
-          <p:nvPr/>
-        </p:nvSpPr>
-        <p:spPr>
-          <a:xfrm>
-            <a:off x="6990563" y="4573720"/>
-            <a:ext cx="76000" cy="76000"/>
-          </a:xfrm>
-          <a:prstGeom prst="ellipse">
-            <a:avLst/>
-          </a:prstGeom>
-          <a:noFill/>
-          <a:ln w="13970">
-            <a:solidFill>
-              <a:srgbClr val="D4A300"/>
-            </a:solidFill>
-          </a:ln>
-          <a:effectLst/>
-        </p:spPr>
-        <p:style>
-          <a:lnRef idx="1">
-            <a:schemeClr val="accent1"/>
-          </a:lnRef>
-          <a:fillRef idx="3">
-            <a:schemeClr val="accent1"/>
-          </a:fillRef>
-          <a:effectRef idx="2">
-            <a:schemeClr val="accent1"/>
-          </a:effectRef>
-          <a:fontRef idx="minor">
-            <a:schemeClr val="lt1"/>
-          </a:fontRef>
-        </p:style>
-        <p:txBody>
-          <a:bodyPr rtlCol="0" anchor="ctr"/>
-          <a:lstStyle/>
-          <a:p>
-            <a:pPr algn="ctr"/>
-          </a:p>
-        </p:txBody>
-      </p:sp>
-      <p:sp>
-        <p:nvSpPr>
-          <p:cNvPr id="1603" name="Oval 1602"/>
-          <p:cNvSpPr/>
-          <p:nvPr/>
-        </p:nvSpPr>
-        <p:spPr>
-          <a:xfrm>
-            <a:off x="4585061" y="4576835"/>
-            <a:ext cx="76000" cy="76000"/>
-          </a:xfrm>
-          <a:prstGeom prst="ellipse">
-            <a:avLst/>
-          </a:prstGeom>
-          <a:noFill/>
-          <a:ln w="13970">
-            <a:solidFill>
-              <a:srgbClr val="D4A300"/>
-            </a:solidFill>
-          </a:ln>
-          <a:effectLst/>
-        </p:spPr>
-        <p:style>
-          <a:lnRef idx="1">
-            <a:schemeClr val="accent1"/>
-          </a:lnRef>
-          <a:fillRef idx="3">
-            <a:schemeClr val="accent1"/>
-          </a:fillRef>
-          <a:effectRef idx="2">
-            <a:schemeClr val="accent1"/>
-          </a:effectRef>
-          <a:fontRef idx="minor">
-            <a:schemeClr val="lt1"/>
-          </a:fontRef>
-        </p:style>
-        <p:txBody>
-          <a:bodyPr rtlCol="0" anchor="ctr"/>
-          <a:lstStyle/>
-          <a:p>
-            <a:pPr algn="ctr"/>
-          </a:p>
-        </p:txBody>
-      </p:sp>
-      <p:sp>
-        <p:nvSpPr>
-          <p:cNvPr id="1604" name="Oval 1603"/>
-          <p:cNvSpPr/>
-          <p:nvPr/>
-        </p:nvSpPr>
-        <p:spPr>
-          <a:xfrm>
-            <a:off x="6631405" y="4576909"/>
-            <a:ext cx="76000" cy="76000"/>
-          </a:xfrm>
-          <a:prstGeom prst="ellipse">
-            <a:avLst/>
-          </a:prstGeom>
-          <a:noFill/>
-          <a:ln w="13970">
-            <a:solidFill>
-              <a:srgbClr val="D4A300"/>
-            </a:solidFill>
-          </a:ln>
-          <a:effectLst/>
-        </p:spPr>
-        <p:style>
-          <a:lnRef idx="1">
-            <a:schemeClr val="accent1"/>
-          </a:lnRef>
-          <a:fillRef idx="3">
-            <a:schemeClr val="accent1"/>
-          </a:fillRef>
-          <a:effectRef idx="2">
-            <a:schemeClr val="accent1"/>
-          </a:effectRef>
-          <a:fontRef idx="minor">
-            <a:schemeClr val="lt1"/>
-          </a:fontRef>
-        </p:style>
-        <p:txBody>
-          <a:bodyPr rtlCol="0" anchor="ctr"/>
-          <a:lstStyle/>
-          <a:p>
-            <a:pPr algn="ctr"/>
-          </a:p>
-        </p:txBody>
-      </p:sp>
-      <p:sp>
-        <p:nvSpPr>
-          <p:cNvPr id="1605" name="Oval 1604"/>
-          <p:cNvSpPr/>
-          <p:nvPr/>
-        </p:nvSpPr>
-        <p:spPr>
-          <a:xfrm>
-            <a:off x="9717944" y="4578501"/>
-            <a:ext cx="76000" cy="76000"/>
-          </a:xfrm>
-          <a:prstGeom prst="ellipse">
-            <a:avLst/>
-          </a:prstGeom>
-          <a:noFill/>
-          <a:ln w="13970">
-            <a:solidFill>
-              <a:srgbClr val="D4A300"/>
-            </a:solidFill>
-          </a:ln>
-          <a:effectLst/>
-        </p:spPr>
-        <p:style>
-          <a:lnRef idx="1">
-            <a:schemeClr val="accent1"/>
-          </a:lnRef>
-          <a:fillRef idx="3">
-            <a:schemeClr val="accent1"/>
-          </a:fillRef>
-          <a:effectRef idx="2">
-            <a:schemeClr val="accent1"/>
-          </a:effectRef>
-          <a:fontRef idx="minor">
-            <a:schemeClr val="lt1"/>
-          </a:fontRef>
-        </p:style>
-        <p:txBody>
-          <a:bodyPr rtlCol="0" anchor="ctr"/>
-          <a:lstStyle/>
-          <a:p>
-            <a:pPr algn="ctr"/>
-          </a:p>
-        </p:txBody>
-      </p:sp>
-      <p:sp>
-        <p:nvSpPr>
-          <p:cNvPr id="1606" name="Oval 1605"/>
-          <p:cNvSpPr/>
-          <p:nvPr/>
-        </p:nvSpPr>
-        <p:spPr>
-          <a:xfrm>
-            <a:off x="4411503" y="4581862"/>
-            <a:ext cx="76000" cy="76000"/>
-          </a:xfrm>
-          <a:prstGeom prst="ellipse">
-            <a:avLst/>
-          </a:prstGeom>
-          <a:noFill/>
-          <a:ln w="13970">
-            <a:solidFill>
-              <a:srgbClr val="D4A300"/>
-            </a:solidFill>
-          </a:ln>
-          <a:effectLst/>
-        </p:spPr>
-        <p:style>
-          <a:lnRef idx="1">
-            <a:schemeClr val="accent1"/>
-          </a:lnRef>
-          <a:fillRef idx="3">
-            <a:schemeClr val="accent1"/>
-          </a:fillRef>
-          <a:effectRef idx="2">
-            <a:schemeClr val="accent1"/>
-          </a:effectRef>
-          <a:fontRef idx="minor">
-            <a:schemeClr val="lt1"/>
-          </a:fontRef>
-        </p:style>
-        <p:txBody>
-          <a:bodyPr rtlCol="0" anchor="ctr"/>
-          <a:lstStyle/>
-          <a:p>
-            <a:pPr algn="ctr"/>
-          </a:p>
-        </p:txBody>
-      </p:sp>
-      <p:sp>
-        <p:nvSpPr>
-          <p:cNvPr id="1607" name="Oval 1606"/>
-          <p:cNvSpPr/>
-          <p:nvPr/>
-        </p:nvSpPr>
-        <p:spPr>
-          <a:xfrm>
-            <a:off x="6485707" y="4583736"/>
-            <a:ext cx="76000" cy="76000"/>
-          </a:xfrm>
-          <a:prstGeom prst="ellipse">
-            <a:avLst/>
-          </a:prstGeom>
-          <a:noFill/>
-          <a:ln w="13970">
-            <a:solidFill>
-              <a:srgbClr val="D4A300"/>
-            </a:solidFill>
-          </a:ln>
-          <a:effectLst/>
-        </p:spPr>
-        <p:style>
-          <a:lnRef idx="1">
-            <a:schemeClr val="accent1"/>
-          </a:lnRef>
-          <a:fillRef idx="3">
-            <a:schemeClr val="accent1"/>
-          </a:fillRef>
-          <a:effectRef idx="2">
-            <a:schemeClr val="accent1"/>
-          </a:effectRef>
-          <a:fontRef idx="minor">
-            <a:schemeClr val="lt1"/>
-          </a:fontRef>
-        </p:style>
-        <p:txBody>
-          <a:bodyPr rtlCol="0" anchor="ctr"/>
-          <a:lstStyle/>
-          <a:p>
-            <a:pPr algn="ctr"/>
-          </a:p>
-        </p:txBody>
-      </p:sp>
-      <p:sp>
-        <p:nvSpPr>
-          <p:cNvPr id="1608" name="Oval 1607"/>
-          <p:cNvSpPr/>
-          <p:nvPr/>
-        </p:nvSpPr>
-        <p:spPr>
-          <a:xfrm>
-            <a:off x="7298978" y="4586494"/>
-            <a:ext cx="76000" cy="76000"/>
-          </a:xfrm>
-          <a:prstGeom prst="ellipse">
-            <a:avLst/>
-          </a:prstGeom>
-          <a:noFill/>
-          <a:ln w="13970">
-            <a:solidFill>
-              <a:srgbClr val="D4A300"/>
-            </a:solidFill>
-          </a:ln>
-          <a:effectLst/>
-        </p:spPr>
-        <p:style>
-          <a:lnRef idx="1">
-            <a:schemeClr val="accent1"/>
-          </a:lnRef>
-          <a:fillRef idx="3">
-            <a:schemeClr val="accent1"/>
-          </a:fillRef>
-          <a:effectRef idx="2">
-            <a:schemeClr val="accent1"/>
-          </a:effectRef>
-          <a:fontRef idx="minor">
-            <a:schemeClr val="lt1"/>
-          </a:fontRef>
-        </p:style>
-        <p:txBody>
-          <a:bodyPr rtlCol="0" anchor="ctr"/>
-          <a:lstStyle/>
-          <a:p>
-            <a:pPr algn="ctr"/>
-          </a:p>
-        </p:txBody>
-      </p:sp>
-      <p:sp>
-        <p:nvSpPr>
-          <p:cNvPr id="1609" name="TextBox 1608"/>
+          <p:cNvPr id="1477" name="TextBox 1476"/>
           <p:cNvSpPr txBox="1"/>
           <p:nvPr/>
         </p:nvSpPr>
@@ -73904,7 +68096,7 @@
             <a:r>
               <a:rPr sz="750" b="1" i="0">
                 <a:solidFill>
-                  <a:srgbClr val="C11456"/>
+                  <a:srgbClr val="118AB2"/>
                 </a:solidFill>
                 <a:latin typeface="Arial"/>
               </a:rPr>
@@ -73915,7 +68107,7 @@
       </p:sp>
       <p:sp>
         <p:nvSpPr>
-          <p:cNvPr id="1610" name="TextBox 1609"/>
+          <p:cNvPr id="1478" name="TextBox 1477"/>
           <p:cNvSpPr txBox="1"/>
           <p:nvPr/>
         </p:nvSpPr>
@@ -73940,7 +68132,7 @@
             <a:r>
               <a:rPr sz="750" b="1" i="0">
                 <a:solidFill>
-                  <a:srgbClr val="B03219"/>
+                  <a:srgbClr val="5A8261"/>
                 </a:solidFill>
                 <a:latin typeface="Arial"/>
               </a:rPr>
@@ -73951,7 +68143,7 @@
       </p:sp>
       <p:sp>
         <p:nvSpPr>
-          <p:cNvPr id="1611" name="TextBox 1610"/>
+          <p:cNvPr id="1479" name="TextBox 1478"/>
           <p:cNvSpPr txBox="1"/>
           <p:nvPr/>
         </p:nvSpPr>
@@ -73976,7 +68168,7 @@
             <a:r>
               <a:rPr sz="750" b="1" i="0">
                 <a:solidFill>
-                  <a:srgbClr val="00567D"/>
+                  <a:srgbClr val="A24E78"/>
                 </a:solidFill>
                 <a:latin typeface="Arial"/>
               </a:rPr>
@@ -73987,7 +68179,7 @@
       </p:sp>
       <p:sp>
         <p:nvSpPr>
-          <p:cNvPr id="1612" name="TextBox 1611"/>
+          <p:cNvPr id="1480" name="TextBox 1479"/>
           <p:cNvSpPr txBox="1"/>
           <p:nvPr/>
         </p:nvSpPr>
@@ -74012,7 +68204,7 @@
             <a:r>
               <a:rPr sz="750" b="1" i="0">
                 <a:solidFill>
-                  <a:srgbClr val="B03219"/>
+                  <a:srgbClr val="5A8261"/>
                 </a:solidFill>
                 <a:latin typeface="Arial"/>
               </a:rPr>
@@ -74023,7 +68215,7 @@
       </p:sp>
       <p:sp>
         <p:nvSpPr>
-          <p:cNvPr id="1613" name="TextBox 1612"/>
+          <p:cNvPr id="1481" name="TextBox 1480"/>
           <p:cNvSpPr txBox="1"/>
           <p:nvPr/>
         </p:nvSpPr>
@@ -74048,7 +68240,7 @@
             <a:r>
               <a:rPr sz="750" b="1" i="0">
                 <a:solidFill>
-                  <a:srgbClr val="00567D"/>
+                  <a:srgbClr val="A24E78"/>
                 </a:solidFill>
                 <a:latin typeface="Arial"/>
               </a:rPr>
@@ -74059,7 +68251,7 @@
       </p:sp>
       <p:sp>
         <p:nvSpPr>
-          <p:cNvPr id="1614" name="TextBox 1613"/>
+          <p:cNvPr id="1482" name="TextBox 1481"/>
           <p:cNvSpPr txBox="1"/>
           <p:nvPr/>
         </p:nvSpPr>
@@ -74084,7 +68276,7 @@
             <a:r>
               <a:rPr sz="750" b="1" i="0">
                 <a:solidFill>
-                  <a:srgbClr val="C11456"/>
+                  <a:srgbClr val="118AB2"/>
                 </a:solidFill>
                 <a:latin typeface="Arial"/>
               </a:rPr>
@@ -74095,7 +68287,7 @@
       </p:sp>
       <p:sp>
         <p:nvSpPr>
-          <p:cNvPr id="1615" name="TextBox 1614"/>
+          <p:cNvPr id="1483" name="TextBox 1482"/>
           <p:cNvSpPr txBox="1"/>
           <p:nvPr/>
         </p:nvSpPr>
@@ -74120,7 +68312,7 @@
             <a:r>
               <a:rPr sz="750" b="1" i="0">
                 <a:solidFill>
-                  <a:srgbClr val="B03219"/>
+                  <a:srgbClr val="5A8261"/>
                 </a:solidFill>
                 <a:latin typeface="Arial"/>
               </a:rPr>
@@ -74131,7 +68323,7 @@
       </p:sp>
       <p:sp>
         <p:nvSpPr>
-          <p:cNvPr id="1616" name="TextBox 1615"/>
+          <p:cNvPr id="1484" name="TextBox 1483"/>
           <p:cNvSpPr txBox="1"/>
           <p:nvPr/>
         </p:nvSpPr>
@@ -74156,7 +68348,7 @@
             <a:r>
               <a:rPr sz="750" b="1" i="0">
                 <a:solidFill>
-                  <a:srgbClr val="B03219"/>
+                  <a:srgbClr val="5A8261"/>
                 </a:solidFill>
                 <a:latin typeface="Arial"/>
               </a:rPr>
@@ -74167,7 +68359,7 @@
       </p:sp>
       <p:sp>
         <p:nvSpPr>
-          <p:cNvPr id="1617" name="TextBox 1616"/>
+          <p:cNvPr id="1485" name="TextBox 1484"/>
           <p:cNvSpPr txBox="1"/>
           <p:nvPr/>
         </p:nvSpPr>
@@ -74192,7 +68384,7 @@
             <a:r>
               <a:rPr sz="750" b="1" i="0">
                 <a:solidFill>
-                  <a:srgbClr val="B03219"/>
+                  <a:srgbClr val="5A8261"/>
                 </a:solidFill>
                 <a:latin typeface="Arial"/>
               </a:rPr>
@@ -74203,7 +68395,7 @@
       </p:sp>
       <p:sp>
         <p:nvSpPr>
-          <p:cNvPr id="1618" name="TextBox 1617"/>
+          <p:cNvPr id="1486" name="TextBox 1485"/>
           <p:cNvSpPr txBox="1"/>
           <p:nvPr/>
         </p:nvSpPr>
@@ -74228,7 +68420,7 @@
             <a:r>
               <a:rPr sz="750" b="1" i="0">
                 <a:solidFill>
-                  <a:srgbClr val="C11456"/>
+                  <a:srgbClr val="118AB2"/>
                 </a:solidFill>
                 <a:latin typeface="Arial"/>
               </a:rPr>
@@ -74239,7 +68431,7 @@
       </p:sp>
       <p:sp>
         <p:nvSpPr>
-          <p:cNvPr id="1619" name="TextBox 1618"/>
+          <p:cNvPr id="1487" name="TextBox 1486"/>
           <p:cNvSpPr txBox="1"/>
           <p:nvPr/>
         </p:nvSpPr>
@@ -74264,7 +68456,7 @@
             <a:r>
               <a:rPr sz="750" b="1" i="0">
                 <a:solidFill>
-                  <a:srgbClr val="C11456"/>
+                  <a:srgbClr val="118AB2"/>
                 </a:solidFill>
                 <a:latin typeface="Arial"/>
               </a:rPr>
@@ -74275,7 +68467,7 @@
       </p:sp>
       <p:sp>
         <p:nvSpPr>
-          <p:cNvPr id="1620" name="TextBox 1619"/>
+          <p:cNvPr id="1488" name="TextBox 1487"/>
           <p:cNvSpPr txBox="1"/>
           <p:nvPr/>
         </p:nvSpPr>
@@ -74300,7 +68492,7 @@
             <a:r>
               <a:rPr sz="750" b="1" i="0">
                 <a:solidFill>
-                  <a:srgbClr val="C11456"/>
+                  <a:srgbClr val="118AB2"/>
                 </a:solidFill>
                 <a:latin typeface="Arial"/>
               </a:rPr>
@@ -74311,7 +68503,7 @@
       </p:sp>
       <p:sp>
         <p:nvSpPr>
-          <p:cNvPr id="1621" name="TextBox 1620"/>
+          <p:cNvPr id="1489" name="TextBox 1488"/>
           <p:cNvSpPr txBox="1"/>
           <p:nvPr/>
         </p:nvSpPr>
@@ -74336,7 +68528,7 @@
             <a:r>
               <a:rPr sz="750" b="1" i="0">
                 <a:solidFill>
-                  <a:srgbClr val="C11456"/>
+                  <a:srgbClr val="118AB2"/>
                 </a:solidFill>
                 <a:latin typeface="Arial"/>
               </a:rPr>
@@ -74347,7 +68539,7 @@
       </p:sp>
       <p:sp>
         <p:nvSpPr>
-          <p:cNvPr id="1622" name="TextBox 1621"/>
+          <p:cNvPr id="1490" name="TextBox 1489"/>
           <p:cNvSpPr txBox="1"/>
           <p:nvPr/>
         </p:nvSpPr>
@@ -74372,7 +68564,7 @@
             <a:r>
               <a:rPr sz="750" b="1" i="0">
                 <a:solidFill>
-                  <a:srgbClr val="C11456"/>
+                  <a:srgbClr val="118AB2"/>
                 </a:solidFill>
                 <a:latin typeface="Arial"/>
               </a:rPr>
@@ -74383,7 +68575,7 @@
       </p:sp>
       <p:sp>
         <p:nvSpPr>
-          <p:cNvPr id="1623" name="TextBox 1622"/>
+          <p:cNvPr id="1491" name="TextBox 1490"/>
           <p:cNvSpPr txBox="1"/>
           <p:nvPr/>
         </p:nvSpPr>
@@ -74408,7 +68600,7 @@
             <a:r>
               <a:rPr sz="750" b="1" i="0">
                 <a:solidFill>
-                  <a:srgbClr val="00567D"/>
+                  <a:srgbClr val="A24E78"/>
                 </a:solidFill>
                 <a:latin typeface="Arial"/>
               </a:rPr>
@@ -74419,7 +68611,7 @@
       </p:sp>
       <p:sp>
         <p:nvSpPr>
-          <p:cNvPr id="1624" name="TextBox 1623"/>
+          <p:cNvPr id="1492" name="TextBox 1491"/>
           <p:cNvSpPr txBox="1"/>
           <p:nvPr/>
         </p:nvSpPr>
@@ -74444,7 +68636,7 @@
             <a:r>
               <a:rPr sz="750" b="1" i="0">
                 <a:solidFill>
-                  <a:srgbClr val="057A64"/>
+                  <a:srgbClr val="E39A1E"/>
                 </a:solidFill>
                 <a:latin typeface="Arial"/>
               </a:rPr>
@@ -74455,7 +68647,7 @@
       </p:sp>
       <p:sp>
         <p:nvSpPr>
-          <p:cNvPr id="1625" name="TextBox 1624"/>
+          <p:cNvPr id="1493" name="TextBox 1492"/>
           <p:cNvSpPr txBox="1"/>
           <p:nvPr/>
         </p:nvSpPr>
@@ -74480,7 +68672,7 @@
             <a:r>
               <a:rPr sz="750" b="1" i="0">
                 <a:solidFill>
-                  <a:srgbClr val="00567D"/>
+                  <a:srgbClr val="A24E78"/>
                 </a:solidFill>
                 <a:latin typeface="Arial"/>
               </a:rPr>
@@ -74491,7 +68683,7 @@
       </p:sp>
       <p:sp>
         <p:nvSpPr>
-          <p:cNvPr id="1626" name="TextBox 1625"/>
+          <p:cNvPr id="1494" name="TextBox 1493"/>
           <p:cNvSpPr txBox="1"/>
           <p:nvPr/>
         </p:nvSpPr>
@@ -74516,7 +68708,7 @@
             <a:r>
               <a:rPr sz="750" b="1" i="0">
                 <a:solidFill>
-                  <a:srgbClr val="C11456"/>
+                  <a:srgbClr val="118AB2"/>
                 </a:solidFill>
                 <a:latin typeface="Arial"/>
               </a:rPr>
@@ -74527,7 +68719,7 @@
       </p:sp>
       <p:sp>
         <p:nvSpPr>
-          <p:cNvPr id="1627" name="TextBox 1626"/>
+          <p:cNvPr id="1495" name="TextBox 1494"/>
           <p:cNvSpPr txBox="1"/>
           <p:nvPr/>
         </p:nvSpPr>
@@ -74552,7 +68744,7 @@
             <a:r>
               <a:rPr sz="750" b="1" i="0">
                 <a:solidFill>
-                  <a:srgbClr val="00567D"/>
+                  <a:srgbClr val="A24E78"/>
                 </a:solidFill>
                 <a:latin typeface="Arial"/>
               </a:rPr>
@@ -74563,7 +68755,7 @@
       </p:sp>
       <p:sp>
         <p:nvSpPr>
-          <p:cNvPr id="1628" name="TextBox 1627"/>
+          <p:cNvPr id="1496" name="TextBox 1495"/>
           <p:cNvSpPr txBox="1"/>
           <p:nvPr/>
         </p:nvSpPr>
@@ -74588,7 +68780,7 @@
             <a:r>
               <a:rPr sz="750" b="1" i="0">
                 <a:solidFill>
-                  <a:srgbClr val="00567D"/>
+                  <a:srgbClr val="A24E78"/>
                 </a:solidFill>
                 <a:latin typeface="Arial"/>
               </a:rPr>
@@ -74599,7 +68791,7 @@
       </p:sp>
       <p:sp>
         <p:nvSpPr>
-          <p:cNvPr id="1629" name="TextBox 1628"/>
+          <p:cNvPr id="1497" name="TextBox 1496"/>
           <p:cNvSpPr txBox="1"/>
           <p:nvPr/>
         </p:nvSpPr>
@@ -74624,7 +68816,7 @@
             <a:r>
               <a:rPr sz="750" b="1" i="0">
                 <a:solidFill>
-                  <a:srgbClr val="B03219"/>
+                  <a:srgbClr val="5A8261"/>
                 </a:solidFill>
                 <a:latin typeface="Arial"/>
               </a:rPr>
@@ -74635,7 +68827,7 @@
       </p:sp>
       <p:sp>
         <p:nvSpPr>
-          <p:cNvPr id="1630" name="TextBox 1629"/>
+          <p:cNvPr id="1498" name="TextBox 1497"/>
           <p:cNvSpPr txBox="1"/>
           <p:nvPr/>
         </p:nvSpPr>
@@ -74660,7 +68852,7 @@
             <a:r>
               <a:rPr sz="750" b="1" i="0">
                 <a:solidFill>
-                  <a:srgbClr val="00567D"/>
+                  <a:srgbClr val="A24E78"/>
                 </a:solidFill>
                 <a:latin typeface="Arial"/>
               </a:rPr>
@@ -74671,7 +68863,7 @@
       </p:sp>
       <p:sp>
         <p:nvSpPr>
-          <p:cNvPr id="1631" name="TextBox 1630"/>
+          <p:cNvPr id="1499" name="TextBox 1498"/>
           <p:cNvSpPr txBox="1"/>
           <p:nvPr/>
         </p:nvSpPr>
@@ -74707,7 +68899,7 @@
       </p:sp>
       <p:sp>
         <p:nvSpPr>
-          <p:cNvPr id="1632" name="TextBox 1631"/>
+          <p:cNvPr id="1500" name="TextBox 1499"/>
           <p:cNvSpPr txBox="1"/>
           <p:nvPr/>
         </p:nvSpPr>
@@ -74743,7 +68935,7 @@
       </p:sp>
       <p:sp>
         <p:nvSpPr>
-          <p:cNvPr id="1633" name="TextBox 1632"/>
+          <p:cNvPr id="1501" name="TextBox 1500"/>
           <p:cNvSpPr txBox="1"/>
           <p:nvPr/>
         </p:nvSpPr>
@@ -74779,7 +68971,7 @@
       </p:sp>
       <p:sp>
         <p:nvSpPr>
-          <p:cNvPr id="1634" name="TextBox 1633"/>
+          <p:cNvPr id="1502" name="TextBox 1501"/>
           <p:cNvSpPr txBox="1"/>
           <p:nvPr/>
         </p:nvSpPr>
@@ -74815,7 +69007,7 @@
       </p:sp>
       <p:sp>
         <p:nvSpPr>
-          <p:cNvPr id="1635" name="TextBox 1634"/>
+          <p:cNvPr id="1503" name="TextBox 1502"/>
           <p:cNvSpPr txBox="1"/>
           <p:nvPr/>
         </p:nvSpPr>
@@ -74851,7 +69043,7 @@
       </p:sp>
       <p:sp>
         <p:nvSpPr>
-          <p:cNvPr id="1636" name="TextBox 1635"/>
+          <p:cNvPr id="1504" name="TextBox 1503"/>
           <p:cNvSpPr txBox="1"/>
           <p:nvPr/>
         </p:nvSpPr>
@@ -74887,7 +69079,7 @@
       </p:sp>
       <p:sp>
         <p:nvSpPr>
-          <p:cNvPr id="1637" name="TextBox 1636"/>
+          <p:cNvPr id="1505" name="TextBox 1504"/>
           <p:cNvSpPr txBox="1"/>
           <p:nvPr/>
         </p:nvSpPr>
@@ -74923,7 +69115,7 @@
       </p:sp>
       <p:sp>
         <p:nvSpPr>
-          <p:cNvPr id="1638" name="TextBox 1637"/>
+          <p:cNvPr id="1506" name="TextBox 1505"/>
           <p:cNvSpPr txBox="1"/>
           <p:nvPr/>
         </p:nvSpPr>
@@ -74959,7 +69151,7 @@
       </p:sp>
       <p:sp>
         <p:nvSpPr>
-          <p:cNvPr id="1639" name="TextBox 1638"/>
+          <p:cNvPr id="1507" name="TextBox 1506"/>
           <p:cNvSpPr txBox="1"/>
           <p:nvPr/>
         </p:nvSpPr>
@@ -74995,7 +69187,7 @@
       </p:sp>
       <p:sp>
         <p:nvSpPr>
-          <p:cNvPr id="1640" name="TextBox 1639"/>
+          <p:cNvPr id="1508" name="TextBox 1507"/>
           <p:cNvSpPr txBox="1"/>
           <p:nvPr/>
         </p:nvSpPr>
@@ -75031,7 +69223,7 @@
       </p:sp>
       <p:sp>
         <p:nvSpPr>
-          <p:cNvPr id="1641" name="TextBox 1640"/>
+          <p:cNvPr id="1509" name="TextBox 1508"/>
           <p:cNvSpPr txBox="1"/>
           <p:nvPr/>
         </p:nvSpPr>
@@ -75067,7 +69259,7 @@
       </p:sp>
       <p:sp>
         <p:nvSpPr>
-          <p:cNvPr id="1642" name="TextBox 1641"/>
+          <p:cNvPr id="1510" name="TextBox 1509"/>
           <p:cNvSpPr txBox="1"/>
           <p:nvPr/>
         </p:nvSpPr>
@@ -75103,7 +69295,7 @@
       </p:sp>
       <p:sp>
         <p:nvSpPr>
-          <p:cNvPr id="1643" name="TextBox 1642"/>
+          <p:cNvPr id="1511" name="TextBox 1510"/>
           <p:cNvSpPr txBox="1"/>
           <p:nvPr/>
         </p:nvSpPr>
@@ -75139,7 +69331,7 @@
       </p:sp>
       <p:sp>
         <p:nvSpPr>
-          <p:cNvPr id="1644" name="TextBox 1643"/>
+          <p:cNvPr id="1512" name="TextBox 1511"/>
           <p:cNvSpPr txBox="1"/>
           <p:nvPr/>
         </p:nvSpPr>
@@ -75175,7 +69367,7 @@
       </p:sp>
       <p:sp>
         <p:nvSpPr>
-          <p:cNvPr id="1645" name="TextBox 1644"/>
+          <p:cNvPr id="1513" name="TextBox 1512"/>
           <p:cNvSpPr txBox="1"/>
           <p:nvPr/>
         </p:nvSpPr>
@@ -75211,7 +69403,7 @@
       </p:sp>
       <p:sp>
         <p:nvSpPr>
-          <p:cNvPr id="1646" name="TextBox 1645"/>
+          <p:cNvPr id="1514" name="TextBox 1513"/>
           <p:cNvSpPr txBox="1"/>
           <p:nvPr/>
         </p:nvSpPr>
@@ -75247,7 +69439,7 @@
       </p:sp>
       <p:sp>
         <p:nvSpPr>
-          <p:cNvPr id="1647" name="TextBox 1646"/>
+          <p:cNvPr id="1515" name="TextBox 1514"/>
           <p:cNvSpPr txBox="1"/>
           <p:nvPr/>
         </p:nvSpPr>
@@ -75283,7 +69475,7 @@
       </p:sp>
       <p:sp>
         <p:nvSpPr>
-          <p:cNvPr id="1648" name="TextBox 1647"/>
+          <p:cNvPr id="1516" name="TextBox 1515"/>
           <p:cNvSpPr txBox="1"/>
           <p:nvPr/>
         </p:nvSpPr>
@@ -75319,7 +69511,7 @@
       </p:sp>
       <p:sp>
         <p:nvSpPr>
-          <p:cNvPr id="1649" name="TextBox 1648"/>
+          <p:cNvPr id="1517" name="TextBox 1516"/>
           <p:cNvSpPr txBox="1"/>
           <p:nvPr/>
         </p:nvSpPr>
@@ -75355,7 +69547,7 @@
       </p:sp>
       <p:sp>
         <p:nvSpPr>
-          <p:cNvPr id="1650" name="TextBox 1649"/>
+          <p:cNvPr id="1518" name="TextBox 1517"/>
           <p:cNvSpPr txBox="1"/>
           <p:nvPr/>
         </p:nvSpPr>
@@ -75391,7 +69583,7 @@
       </p:sp>
       <p:sp>
         <p:nvSpPr>
-          <p:cNvPr id="1651" name="TextBox 1650"/>
+          <p:cNvPr id="1519" name="TextBox 1518"/>
           <p:cNvSpPr txBox="1"/>
           <p:nvPr/>
         </p:nvSpPr>
@@ -75427,7 +69619,7 @@
       </p:sp>
       <p:sp>
         <p:nvSpPr>
-          <p:cNvPr id="1652" name="TextBox 1651"/>
+          <p:cNvPr id="1520" name="TextBox 1519"/>
           <p:cNvSpPr txBox="1"/>
           <p:nvPr/>
         </p:nvSpPr>
@@ -75463,7 +69655,7 @@
       </p:sp>
       <p:sp>
         <p:nvSpPr>
-          <p:cNvPr id="1653" name="TextBox 1652"/>
+          <p:cNvPr id="1521" name="TextBox 1520"/>
           <p:cNvSpPr txBox="1"/>
           <p:nvPr/>
         </p:nvSpPr>
@@ -75499,7 +69691,7 @@
       </p:sp>
       <p:sp>
         <p:nvSpPr>
-          <p:cNvPr id="1654" name="TextBox 1653"/>
+          <p:cNvPr id="1522" name="TextBox 1521"/>
           <p:cNvSpPr txBox="1"/>
           <p:nvPr/>
         </p:nvSpPr>
@@ -75535,7 +69727,7 @@
       </p:sp>
       <p:sp>
         <p:nvSpPr>
-          <p:cNvPr id="1655" name="TextBox 1654"/>
+          <p:cNvPr id="1523" name="TextBox 1522"/>
           <p:cNvSpPr txBox="1"/>
           <p:nvPr/>
         </p:nvSpPr>
@@ -75571,7 +69763,7 @@
       </p:sp>
       <p:sp>
         <p:nvSpPr>
-          <p:cNvPr id="1656" name="TextBox 1655"/>
+          <p:cNvPr id="1524" name="TextBox 1523"/>
           <p:cNvSpPr txBox="1"/>
           <p:nvPr/>
         </p:nvSpPr>
@@ -75607,7 +69799,7 @@
       </p:sp>
       <p:sp>
         <p:nvSpPr>
-          <p:cNvPr id="1657" name="TextBox 1656"/>
+          <p:cNvPr id="1525" name="TextBox 1524"/>
           <p:cNvSpPr txBox="1"/>
           <p:nvPr/>
         </p:nvSpPr>
@@ -75643,7 +69835,7 @@
       </p:sp>
       <p:sp>
         <p:nvSpPr>
-          <p:cNvPr id="1658" name="TextBox 1657"/>
+          <p:cNvPr id="1526" name="TextBox 1525"/>
           <p:cNvSpPr txBox="1"/>
           <p:nvPr/>
         </p:nvSpPr>
@@ -75679,7 +69871,7 @@
       </p:sp>
       <p:sp>
         <p:nvSpPr>
-          <p:cNvPr id="1659" name="TextBox 1658"/>
+          <p:cNvPr id="1527" name="TextBox 1526"/>
           <p:cNvSpPr txBox="1"/>
           <p:nvPr/>
         </p:nvSpPr>
@@ -75715,7 +69907,7 @@
       </p:sp>
       <p:sp>
         <p:nvSpPr>
-          <p:cNvPr id="1660" name="TextBox 1659"/>
+          <p:cNvPr id="1528" name="TextBox 1527"/>
           <p:cNvSpPr txBox="1"/>
           <p:nvPr/>
         </p:nvSpPr>
@@ -75751,7 +69943,7 @@
       </p:sp>
       <p:sp>
         <p:nvSpPr>
-          <p:cNvPr id="1661" name="TextBox 1660"/>
+          <p:cNvPr id="1529" name="TextBox 1528"/>
           <p:cNvSpPr txBox="1"/>
           <p:nvPr/>
         </p:nvSpPr>
@@ -75787,7 +69979,7 @@
       </p:sp>
       <p:sp>
         <p:nvSpPr>
-          <p:cNvPr id="1662" name="TextBox 1661"/>
+          <p:cNvPr id="1530" name="TextBox 1529"/>
           <p:cNvSpPr txBox="1"/>
           <p:nvPr/>
         </p:nvSpPr>
@@ -75823,7 +70015,7 @@
       </p:sp>
       <p:sp>
         <p:nvSpPr>
-          <p:cNvPr id="1663" name="TextBox 1662"/>
+          <p:cNvPr id="1531" name="TextBox 1530"/>
           <p:cNvSpPr txBox="1"/>
           <p:nvPr/>
         </p:nvSpPr>
@@ -75859,7 +70051,7 @@
       </p:sp>
       <p:cxnSp>
         <p:nvCxnSpPr>
-          <p:cNvPr id="1664" name="Connector 1663"/>
+          <p:cNvPr id="1532" name="Connector 1531"/>
           <p:cNvCxnSpPr/>
           <p:nvPr/>
         </p:nvCxnSpPr>
@@ -75895,7 +70087,7 @@
       </p:cxnSp>
       <p:sp>
         <p:nvSpPr>
-          <p:cNvPr id="1665" name="Right Triangle 1664"/>
+          <p:cNvPr id="1533" name="Right Triangle 1532"/>
           <p:cNvSpPr/>
           <p:nvPr/>
         </p:nvSpPr>
@@ -75939,7 +70131,7 @@
       </p:sp>
       <p:sp>
         <p:nvSpPr>
-          <p:cNvPr id="1666" name="TextBox 1665"/>
+          <p:cNvPr id="1534" name="TextBox 1533"/>
           <p:cNvSpPr txBox="1"/>
           <p:nvPr/>
         </p:nvSpPr>
@@ -75975,7 +70167,7 @@
       </p:sp>
       <p:cxnSp>
         <p:nvCxnSpPr>
-          <p:cNvPr id="1667" name="Connector 1666"/>
+          <p:cNvPr id="1535" name="Connector 1534"/>
           <p:cNvCxnSpPr/>
           <p:nvPr/>
         </p:nvCxnSpPr>
@@ -76011,7 +70203,7 @@
       </p:cxnSp>
       <p:sp>
         <p:nvSpPr>
-          <p:cNvPr id="1668" name="Right Triangle 1667"/>
+          <p:cNvPr id="1536" name="Right Triangle 1535"/>
           <p:cNvSpPr/>
           <p:nvPr/>
         </p:nvSpPr>
@@ -76055,7 +70247,7 @@
       </p:sp>
       <p:sp>
         <p:nvSpPr>
-          <p:cNvPr id="1669" name="TextBox 1668"/>
+          <p:cNvPr id="1537" name="TextBox 1536"/>
           <p:cNvSpPr txBox="1"/>
           <p:nvPr/>
         </p:nvSpPr>
@@ -76091,7 +70283,7 @@
       </p:sp>
       <p:sp>
         <p:nvSpPr>
-          <p:cNvPr id="1670" name="Oval 1669"/>
+          <p:cNvPr id="1538" name="Oval 1537"/>
           <p:cNvSpPr/>
           <p:nvPr/>
         </p:nvSpPr>
@@ -76104,7 +70296,7 @@
             <a:avLst/>
           </a:prstGeom>
           <a:solidFill>
-            <a:srgbClr val="057A64"/>
+            <a:srgbClr val="E39A1E"/>
           </a:solidFill>
           <a:ln w="3810">
             <a:solidFill>
@@ -76137,7 +70329,7 @@
       </p:sp>
       <p:sp>
         <p:nvSpPr>
-          <p:cNvPr id="1671" name="TextBox 1670"/>
+          <p:cNvPr id="1539" name="TextBox 1538"/>
           <p:cNvSpPr txBox="1"/>
           <p:nvPr/>
         </p:nvSpPr>
@@ -76173,7 +70365,7 @@
       </p:sp>
       <p:sp>
         <p:nvSpPr>
-          <p:cNvPr id="1672" name="Oval 1671"/>
+          <p:cNvPr id="1540" name="Oval 1539"/>
           <p:cNvSpPr/>
           <p:nvPr/>
         </p:nvSpPr>
@@ -76186,7 +70378,7 @@
             <a:avLst/>
           </a:prstGeom>
           <a:solidFill>
-            <a:srgbClr val="00567D"/>
+            <a:srgbClr val="A24E78"/>
           </a:solidFill>
           <a:ln w="3810">
             <a:solidFill>
@@ -76219,7 +70411,7 @@
       </p:sp>
       <p:sp>
         <p:nvSpPr>
-          <p:cNvPr id="1673" name="TextBox 1672"/>
+          <p:cNvPr id="1541" name="TextBox 1540"/>
           <p:cNvSpPr txBox="1"/>
           <p:nvPr/>
         </p:nvSpPr>
@@ -76255,7 +70447,7 @@
       </p:sp>
       <p:sp>
         <p:nvSpPr>
-          <p:cNvPr id="1674" name="Oval 1673"/>
+          <p:cNvPr id="1542" name="Oval 1541"/>
           <p:cNvSpPr/>
           <p:nvPr/>
         </p:nvSpPr>
@@ -76268,7 +70460,7 @@
             <a:avLst/>
           </a:prstGeom>
           <a:solidFill>
-            <a:srgbClr val="C11456"/>
+            <a:srgbClr val="118AB2"/>
           </a:solidFill>
           <a:ln w="3810">
             <a:solidFill>
@@ -76301,7 +70493,7 @@
       </p:sp>
       <p:sp>
         <p:nvSpPr>
-          <p:cNvPr id="1675" name="TextBox 1674"/>
+          <p:cNvPr id="1543" name="TextBox 1542"/>
           <p:cNvSpPr txBox="1"/>
           <p:nvPr/>
         </p:nvSpPr>
@@ -76337,7 +70529,7 @@
       </p:sp>
       <p:sp>
         <p:nvSpPr>
-          <p:cNvPr id="1676" name="Oval 1675"/>
+          <p:cNvPr id="1544" name="Oval 1543"/>
           <p:cNvSpPr/>
           <p:nvPr/>
         </p:nvSpPr>
@@ -76350,7 +70542,7 @@
             <a:avLst/>
           </a:prstGeom>
           <a:solidFill>
-            <a:srgbClr val="B03219"/>
+            <a:srgbClr val="5A8261"/>
           </a:solidFill>
           <a:ln w="3810">
             <a:solidFill>
@@ -76383,7 +70575,7 @@
       </p:sp>
       <p:sp>
         <p:nvSpPr>
-          <p:cNvPr id="1677" name="TextBox 1676"/>
+          <p:cNvPr id="1545" name="TextBox 1544"/>
           <p:cNvSpPr txBox="1"/>
           <p:nvPr/>
         </p:nvSpPr>
@@ -76419,7 +70611,7 @@
       </p:sp>
       <p:sp>
         <p:nvSpPr>
-          <p:cNvPr id="1678" name="Oval 1677"/>
+          <p:cNvPr id="1546" name="Oval 1545"/>
           <p:cNvSpPr/>
           <p:nvPr/>
         </p:nvSpPr>
@@ -76465,7 +70657,7 @@
       </p:sp>
       <p:sp>
         <p:nvSpPr>
-          <p:cNvPr id="1679" name="TextBox 1678"/>
+          <p:cNvPr id="1547" name="TextBox 1546"/>
           <p:cNvSpPr txBox="1"/>
           <p:nvPr/>
         </p:nvSpPr>
@@ -76501,7 +70693,7 @@
       </p:sp>
       <p:sp>
         <p:nvSpPr>
-          <p:cNvPr id="1680" name="Oval 1679"/>
+          <p:cNvPr id="1548" name="Oval 1547"/>
           <p:cNvSpPr/>
           <p:nvPr/>
         </p:nvSpPr>
@@ -76547,7 +70739,7 @@
       </p:sp>
       <p:sp>
         <p:nvSpPr>
-          <p:cNvPr id="1681" name="TextBox 1680"/>
+          <p:cNvPr id="1549" name="TextBox 1548"/>
           <p:cNvSpPr txBox="1"/>
           <p:nvPr/>
         </p:nvSpPr>
@@ -76583,93 +70775,13 @@
       </p:sp>
       <p:sp>
         <p:nvSpPr>
-          <p:cNvPr id="1682" name="Oval 1681"/>
-          <p:cNvSpPr/>
-          <p:nvPr/>
-        </p:nvSpPr>
-        <p:spPr>
-          <a:xfrm>
-            <a:off x="5730720" y="6745704"/>
-            <a:ext cx="60000" cy="60000"/>
-          </a:xfrm>
-          <a:prstGeom prst="ellipse">
-            <a:avLst/>
-          </a:prstGeom>
-          <a:noFill/>
-          <a:ln w="12700">
-            <a:solidFill>
-              <a:srgbClr val="D4A300"/>
-            </a:solidFill>
-          </a:ln>
-          <a:effectLst/>
-        </p:spPr>
-        <p:style>
-          <a:lnRef idx="1">
-            <a:schemeClr val="accent1"/>
-          </a:lnRef>
-          <a:fillRef idx="3">
-            <a:schemeClr val="accent1"/>
-          </a:fillRef>
-          <a:effectRef idx="2">
-            <a:schemeClr val="accent1"/>
-          </a:effectRef>
-          <a:fontRef idx="minor">
-            <a:schemeClr val="lt1"/>
-          </a:fontRef>
-        </p:style>
-        <p:txBody>
-          <a:bodyPr rtlCol="0" anchor="ctr"/>
-          <a:lstStyle/>
-          <a:p>
-            <a:pPr algn="ctr"/>
-          </a:p>
-        </p:txBody>
-      </p:sp>
-      <p:sp>
-        <p:nvSpPr>
-          <p:cNvPr id="1683" name="TextBox 1682"/>
-          <p:cNvSpPr txBox="1"/>
-          <p:nvPr/>
-        </p:nvSpPr>
-        <p:spPr>
-          <a:xfrm>
-            <a:off x="5897880" y="6693408"/>
-            <a:ext cx="1874520" cy="164592"/>
-          </a:xfrm>
-          <a:prstGeom prst="rect">
-            <a:avLst/>
-          </a:prstGeom>
-          <a:noFill/>
-          <a:effectLst/>
-        </p:spPr>
-        <p:txBody>
-          <a:bodyPr wrap="square" lIns="0" rIns="0" tIns="0" bIns="0" anchor="ctr">
-            <a:spAutoFit/>
-          </a:bodyPr>
-          <a:lstStyle/>
-          <a:p>
-            <a:pPr algn="l"/>
-            <a:r>
-              <a:rPr sz="750" b="0" i="0">
-                <a:solidFill>
-                  <a:srgbClr val="0E2A47"/>
-                </a:solidFill>
-                <a:latin typeface="Arial"/>
-              </a:rPr>
-              <a:t>|log₂ FC| ≥ 1  (n = 132)</a:t>
-            </a:r>
-          </a:p>
-        </p:txBody>
-      </p:sp>
-      <p:sp>
-        <p:nvSpPr>
-          <p:cNvPr id="1684" name="Oval 1683"/>
-          <p:cNvSpPr/>
-          <p:nvPr/>
-        </p:nvSpPr>
-        <p:spPr>
-          <a:xfrm>
-            <a:off x="7891560" y="6757704"/>
+          <p:cNvPr id="1550" name="Oval 1549"/>
+          <p:cNvSpPr/>
+          <p:nvPr/>
+        </p:nvSpPr>
+        <p:spPr>
+          <a:xfrm>
+            <a:off x="5742720" y="6757704"/>
             <a:ext cx="36000" cy="36000"/>
           </a:xfrm>
           <a:prstGeom prst="ellipse">
@@ -76709,13 +70821,13 @@
       </p:sp>
       <p:sp>
         <p:nvSpPr>
-          <p:cNvPr id="1685" name="TextBox 1684"/>
+          <p:cNvPr id="1551" name="TextBox 1550"/>
           <p:cNvSpPr txBox="1"/>
           <p:nvPr/>
         </p:nvSpPr>
         <p:spPr>
           <a:xfrm>
-            <a:off x="8046720" y="6693408"/>
+            <a:off x="5897880" y="6693408"/>
             <a:ext cx="1874520" cy="164592"/>
           </a:xfrm>
           <a:prstGeom prst="rect">

--- a/260418_add/ppt/SuppFig_volcano_gene_pathwaycat_detailed_native_editable.pptx
+++ b/260418_add/ppt/SuppFig_volcano_gene_pathwaycat_detailed_native_editable.pptx
@@ -57596,7 +57596,7 @@
             <a:avLst/>
           </a:prstGeom>
           <a:solidFill>
-            <a:srgbClr val="C53E1F"/>
+            <a:srgbClr val="6C757D"/>
           </a:solidFill>
           <a:ln w="4445">
             <a:solidFill>
@@ -57642,7 +57642,7 @@
             <a:avLst/>
           </a:prstGeom>
           <a:solidFill>
-            <a:srgbClr val="0A7D6E"/>
+            <a:srgbClr val="6C757D"/>
           </a:solidFill>
           <a:ln w="4445">
             <a:solidFill>
@@ -57688,7 +57688,7 @@
             <a:avLst/>
           </a:prstGeom>
           <a:solidFill>
-            <a:srgbClr val="C53E1F"/>
+            <a:srgbClr val="6C757D"/>
           </a:solidFill>
           <a:ln w="4445">
             <a:solidFill>
@@ -57734,7 +57734,7 @@
             <a:avLst/>
           </a:prstGeom>
           <a:solidFill>
-            <a:srgbClr val="0A7D6E"/>
+            <a:srgbClr val="6C757D"/>
           </a:solidFill>
           <a:ln w="4445">
             <a:solidFill>
@@ -57780,7 +57780,7 @@
             <a:avLst/>
           </a:prstGeom>
           <a:solidFill>
-            <a:srgbClr val="C53E1F"/>
+            <a:srgbClr val="6C757D"/>
           </a:solidFill>
           <a:ln w="4445">
             <a:solidFill>
@@ -57826,7 +57826,7 @@
             <a:avLst/>
           </a:prstGeom>
           <a:solidFill>
-            <a:srgbClr val="0A7D6E"/>
+            <a:srgbClr val="6C757D"/>
           </a:solidFill>
           <a:ln w="4445">
             <a:solidFill>
@@ -57872,7 +57872,7 @@
             <a:avLst/>
           </a:prstGeom>
           <a:solidFill>
-            <a:srgbClr val="C53E1F"/>
+            <a:srgbClr val="6C757D"/>
           </a:solidFill>
           <a:ln w="4445">
             <a:solidFill>
@@ -57918,7 +57918,7 @@
             <a:avLst/>
           </a:prstGeom>
           <a:solidFill>
-            <a:srgbClr val="0A7D6E"/>
+            <a:srgbClr val="6C757D"/>
           </a:solidFill>
           <a:ln w="4445">
             <a:solidFill>
@@ -57964,7 +57964,7 @@
             <a:avLst/>
           </a:prstGeom>
           <a:solidFill>
-            <a:srgbClr val="0A7D6E"/>
+            <a:srgbClr val="6C757D"/>
           </a:solidFill>
           <a:ln w="4445">
             <a:solidFill>
@@ -58010,7 +58010,7 @@
             <a:avLst/>
           </a:prstGeom>
           <a:solidFill>
-            <a:srgbClr val="C53E1F"/>
+            <a:srgbClr val="6C757D"/>
           </a:solidFill>
           <a:ln w="4445">
             <a:solidFill>
@@ -58056,7 +58056,7 @@
             <a:avLst/>
           </a:prstGeom>
           <a:solidFill>
-            <a:srgbClr val="0A7D6E"/>
+            <a:srgbClr val="6C757D"/>
           </a:solidFill>
           <a:ln w="4445">
             <a:solidFill>
@@ -58102,7 +58102,7 @@
             <a:avLst/>
           </a:prstGeom>
           <a:solidFill>
-            <a:srgbClr val="C53E1F"/>
+            <a:srgbClr val="6C757D"/>
           </a:solidFill>
           <a:ln w="4445">
             <a:solidFill>
@@ -58148,7 +58148,7 @@
             <a:avLst/>
           </a:prstGeom>
           <a:solidFill>
-            <a:srgbClr val="0A7D6E"/>
+            <a:srgbClr val="6C757D"/>
           </a:solidFill>
           <a:ln w="4445">
             <a:solidFill>
@@ -58194,7 +58194,7 @@
             <a:avLst/>
           </a:prstGeom>
           <a:solidFill>
-            <a:srgbClr val="0A7D6E"/>
+            <a:srgbClr val="6C757D"/>
           </a:solidFill>
           <a:ln w="4445">
             <a:solidFill>
@@ -58240,7 +58240,7 @@
             <a:avLst/>
           </a:prstGeom>
           <a:solidFill>
-            <a:srgbClr val="C53E1F"/>
+            <a:srgbClr val="6C757D"/>
           </a:solidFill>
           <a:ln w="4445">
             <a:solidFill>
@@ -58286,7 +58286,7 @@
             <a:avLst/>
           </a:prstGeom>
           <a:solidFill>
-            <a:srgbClr val="0A7D6E"/>
+            <a:srgbClr val="6C757D"/>
           </a:solidFill>
           <a:ln w="4445">
             <a:solidFill>
@@ -58332,7 +58332,7 @@
             <a:avLst/>
           </a:prstGeom>
           <a:solidFill>
-            <a:srgbClr val="0A7D6E"/>
+            <a:srgbClr val="6C757D"/>
           </a:solidFill>
           <a:ln w="4445">
             <a:solidFill>
@@ -58378,7 +58378,7 @@
             <a:avLst/>
           </a:prstGeom>
           <a:solidFill>
-            <a:srgbClr val="0A7D6E"/>
+            <a:srgbClr val="6C757D"/>
           </a:solidFill>
           <a:ln w="4445">
             <a:solidFill>
@@ -58424,7 +58424,7 @@
             <a:avLst/>
           </a:prstGeom>
           <a:solidFill>
-            <a:srgbClr val="C53E1F"/>
+            <a:srgbClr val="6C757D"/>
           </a:solidFill>
           <a:ln w="4445">
             <a:solidFill>
@@ -58470,7 +58470,7 @@
             <a:avLst/>
           </a:prstGeom>
           <a:solidFill>
-            <a:srgbClr val="0A7D6E"/>
+            <a:srgbClr val="6C757D"/>
           </a:solidFill>
           <a:ln w="4445">
             <a:solidFill>
@@ -58516,7 +58516,7 @@
             <a:avLst/>
           </a:prstGeom>
           <a:solidFill>
-            <a:srgbClr val="0A7D6E"/>
+            <a:srgbClr val="6C757D"/>
           </a:solidFill>
           <a:ln w="4445">
             <a:solidFill>
@@ -58562,7 +58562,7 @@
             <a:avLst/>
           </a:prstGeom>
           <a:solidFill>
-            <a:srgbClr val="0A7D6E"/>
+            <a:srgbClr val="6C757D"/>
           </a:solidFill>
           <a:ln w="4445">
             <a:solidFill>
@@ -58608,7 +58608,7 @@
             <a:avLst/>
           </a:prstGeom>
           <a:solidFill>
-            <a:srgbClr val="0A7D6E"/>
+            <a:srgbClr val="6C757D"/>
           </a:solidFill>
           <a:ln w="4445">
             <a:solidFill>
@@ -58654,7 +58654,7 @@
             <a:avLst/>
           </a:prstGeom>
           <a:solidFill>
-            <a:srgbClr val="0A7D6E"/>
+            <a:srgbClr val="6C757D"/>
           </a:solidFill>
           <a:ln w="4445">
             <a:solidFill>
@@ -58700,7 +58700,7 @@
             <a:avLst/>
           </a:prstGeom>
           <a:solidFill>
-            <a:srgbClr val="C53E1F"/>
+            <a:srgbClr val="6C757D"/>
           </a:solidFill>
           <a:ln w="4445">
             <a:solidFill>
@@ -58746,7 +58746,7 @@
             <a:avLst/>
           </a:prstGeom>
           <a:solidFill>
-            <a:srgbClr val="C53E1F"/>
+            <a:srgbClr val="6C757D"/>
           </a:solidFill>
           <a:ln w="4445">
             <a:solidFill>
@@ -58792,7 +58792,7 @@
             <a:avLst/>
           </a:prstGeom>
           <a:solidFill>
-            <a:srgbClr val="0A7D6E"/>
+            <a:srgbClr val="6C757D"/>
           </a:solidFill>
           <a:ln w="4445">
             <a:solidFill>
@@ -58838,7 +58838,7 @@
             <a:avLst/>
           </a:prstGeom>
           <a:solidFill>
-            <a:srgbClr val="C53E1F"/>
+            <a:srgbClr val="6C757D"/>
           </a:solidFill>
           <a:ln w="4445">
             <a:solidFill>
@@ -58884,7 +58884,7 @@
             <a:avLst/>
           </a:prstGeom>
           <a:solidFill>
-            <a:srgbClr val="C53E1F"/>
+            <a:srgbClr val="6C757D"/>
           </a:solidFill>
           <a:ln w="4445">
             <a:solidFill>
@@ -58930,7 +58930,7 @@
             <a:avLst/>
           </a:prstGeom>
           <a:solidFill>
-            <a:srgbClr val="C53E1F"/>
+            <a:srgbClr val="6C757D"/>
           </a:solidFill>
           <a:ln w="4445">
             <a:solidFill>
@@ -58976,7 +58976,7 @@
             <a:avLst/>
           </a:prstGeom>
           <a:solidFill>
-            <a:srgbClr val="C53E1F"/>
+            <a:srgbClr val="6C757D"/>
           </a:solidFill>
           <a:ln w="4445">
             <a:solidFill>
@@ -59022,7 +59022,7 @@
             <a:avLst/>
           </a:prstGeom>
           <a:solidFill>
-            <a:srgbClr val="0A7D6E"/>
+            <a:srgbClr val="6C757D"/>
           </a:solidFill>
           <a:ln w="4445">
             <a:solidFill>
@@ -59068,7 +59068,7 @@
             <a:avLst/>
           </a:prstGeom>
           <a:solidFill>
-            <a:srgbClr val="0A7D6E"/>
+            <a:srgbClr val="6C757D"/>
           </a:solidFill>
           <a:ln w="4445">
             <a:solidFill>
@@ -59114,7 +59114,7 @@
             <a:avLst/>
           </a:prstGeom>
           <a:solidFill>
-            <a:srgbClr val="C53E1F"/>
+            <a:srgbClr val="6C757D"/>
           </a:solidFill>
           <a:ln w="4445">
             <a:solidFill>
@@ -59160,7 +59160,7 @@
             <a:avLst/>
           </a:prstGeom>
           <a:solidFill>
-            <a:srgbClr val="C53E1F"/>
+            <a:srgbClr val="6C757D"/>
           </a:solidFill>
           <a:ln w="4445">
             <a:solidFill>
@@ -59206,7 +59206,7 @@
             <a:avLst/>
           </a:prstGeom>
           <a:solidFill>
-            <a:srgbClr val="0A7D6E"/>
+            <a:srgbClr val="6C757D"/>
           </a:solidFill>
           <a:ln w="4445">
             <a:solidFill>
@@ -59252,7 +59252,7 @@
             <a:avLst/>
           </a:prstGeom>
           <a:solidFill>
-            <a:srgbClr val="0A7D6E"/>
+            <a:srgbClr val="6C757D"/>
           </a:solidFill>
           <a:ln w="4445">
             <a:solidFill>
@@ -59298,7 +59298,7 @@
             <a:avLst/>
           </a:prstGeom>
           <a:solidFill>
-            <a:srgbClr val="C53E1F"/>
+            <a:srgbClr val="6C757D"/>
           </a:solidFill>
           <a:ln w="4445">
             <a:solidFill>
@@ -59344,7 +59344,7 @@
             <a:avLst/>
           </a:prstGeom>
           <a:solidFill>
-            <a:srgbClr val="C53E1F"/>
+            <a:srgbClr val="6C757D"/>
           </a:solidFill>
           <a:ln w="4445">
             <a:solidFill>
@@ -59390,7 +59390,7 @@
             <a:avLst/>
           </a:prstGeom>
           <a:solidFill>
-            <a:srgbClr val="C53E1F"/>
+            <a:srgbClr val="6C757D"/>
           </a:solidFill>
           <a:ln w="4445">
             <a:solidFill>
@@ -59436,7 +59436,7 @@
             <a:avLst/>
           </a:prstGeom>
           <a:solidFill>
-            <a:srgbClr val="0A7D6E"/>
+            <a:srgbClr val="6C757D"/>
           </a:solidFill>
           <a:ln w="4445">
             <a:solidFill>
@@ -59482,7 +59482,7 @@
             <a:avLst/>
           </a:prstGeom>
           <a:solidFill>
-            <a:srgbClr val="0A7D6E"/>
+            <a:srgbClr val="6C757D"/>
           </a:solidFill>
           <a:ln w="4445">
             <a:solidFill>
@@ -59528,7 +59528,7 @@
             <a:avLst/>
           </a:prstGeom>
           <a:solidFill>
-            <a:srgbClr val="C53E1F"/>
+            <a:srgbClr val="6C757D"/>
           </a:solidFill>
           <a:ln w="4445">
             <a:solidFill>
@@ -59574,7 +59574,7 @@
             <a:avLst/>
           </a:prstGeom>
           <a:solidFill>
-            <a:srgbClr val="C53E1F"/>
+            <a:srgbClr val="6C757D"/>
           </a:solidFill>
           <a:ln w="4445">
             <a:solidFill>
@@ -59620,7 +59620,7 @@
             <a:avLst/>
           </a:prstGeom>
           <a:solidFill>
-            <a:srgbClr val="C53E1F"/>
+            <a:srgbClr val="6C757D"/>
           </a:solidFill>
           <a:ln w="4445">
             <a:solidFill>
@@ -59666,7 +59666,7 @@
             <a:avLst/>
           </a:prstGeom>
           <a:solidFill>
-            <a:srgbClr val="C53E1F"/>
+            <a:srgbClr val="6C757D"/>
           </a:solidFill>
           <a:ln w="4445">
             <a:solidFill>
@@ -59712,7 +59712,7 @@
             <a:avLst/>
           </a:prstGeom>
           <a:solidFill>
-            <a:srgbClr val="C53E1F"/>
+            <a:srgbClr val="6C757D"/>
           </a:solidFill>
           <a:ln w="4445">
             <a:solidFill>
@@ -59758,7 +59758,7 @@
             <a:avLst/>
           </a:prstGeom>
           <a:solidFill>
-            <a:srgbClr val="C53E1F"/>
+            <a:srgbClr val="6C757D"/>
           </a:solidFill>
           <a:ln w="4445">
             <a:solidFill>
@@ -59804,7 +59804,7 @@
             <a:avLst/>
           </a:prstGeom>
           <a:solidFill>
-            <a:srgbClr val="C53E1F"/>
+            <a:srgbClr val="6C757D"/>
           </a:solidFill>
           <a:ln w="4445">
             <a:solidFill>
@@ -59850,7 +59850,7 @@
             <a:avLst/>
           </a:prstGeom>
           <a:solidFill>
-            <a:srgbClr val="0A7D6E"/>
+            <a:srgbClr val="6C757D"/>
           </a:solidFill>
           <a:ln w="4445">
             <a:solidFill>
@@ -59896,7 +59896,7 @@
             <a:avLst/>
           </a:prstGeom>
           <a:solidFill>
-            <a:srgbClr val="0A7D6E"/>
+            <a:srgbClr val="6C757D"/>
           </a:solidFill>
           <a:ln w="4445">
             <a:solidFill>
@@ -59942,7 +59942,7 @@
             <a:avLst/>
           </a:prstGeom>
           <a:solidFill>
-            <a:srgbClr val="0A7D6E"/>
+            <a:srgbClr val="6C757D"/>
           </a:solidFill>
           <a:ln w="4445">
             <a:solidFill>
@@ -59988,7 +59988,7 @@
             <a:avLst/>
           </a:prstGeom>
           <a:solidFill>
-            <a:srgbClr val="0A7D6E"/>
+            <a:srgbClr val="6C757D"/>
           </a:solidFill>
           <a:ln w="4445">
             <a:solidFill>
@@ -60034,7 +60034,7 @@
             <a:avLst/>
           </a:prstGeom>
           <a:solidFill>
-            <a:srgbClr val="C53E1F"/>
+            <a:srgbClr val="6C757D"/>
           </a:solidFill>
           <a:ln w="4445">
             <a:solidFill>
@@ -60080,7 +60080,7 @@
             <a:avLst/>
           </a:prstGeom>
           <a:solidFill>
-            <a:srgbClr val="C53E1F"/>
+            <a:srgbClr val="6C757D"/>
           </a:solidFill>
           <a:ln w="4445">
             <a:solidFill>
@@ -60126,7 +60126,7 @@
             <a:avLst/>
           </a:prstGeom>
           <a:solidFill>
-            <a:srgbClr val="C53E1F"/>
+            <a:srgbClr val="6C757D"/>
           </a:solidFill>
           <a:ln w="4445">
             <a:solidFill>
@@ -60172,7 +60172,7 @@
             <a:avLst/>
           </a:prstGeom>
           <a:solidFill>
-            <a:srgbClr val="C53E1F"/>
+            <a:srgbClr val="6C757D"/>
           </a:solidFill>
           <a:ln w="4445">
             <a:solidFill>
@@ -60218,7 +60218,7 @@
             <a:avLst/>
           </a:prstGeom>
           <a:solidFill>
-            <a:srgbClr val="0A7D6E"/>
+            <a:srgbClr val="6C757D"/>
           </a:solidFill>
           <a:ln w="4445">
             <a:solidFill>
@@ -60264,7 +60264,7 @@
             <a:avLst/>
           </a:prstGeom>
           <a:solidFill>
-            <a:srgbClr val="C53E1F"/>
+            <a:srgbClr val="6C757D"/>
           </a:solidFill>
           <a:ln w="4445">
             <a:solidFill>
@@ -60310,7 +60310,7 @@
             <a:avLst/>
           </a:prstGeom>
           <a:solidFill>
-            <a:srgbClr val="0A7D6E"/>
+            <a:srgbClr val="6C757D"/>
           </a:solidFill>
           <a:ln w="4445">
             <a:solidFill>
@@ -60356,7 +60356,7 @@
             <a:avLst/>
           </a:prstGeom>
           <a:solidFill>
-            <a:srgbClr val="0A7D6E"/>
+            <a:srgbClr val="6C757D"/>
           </a:solidFill>
           <a:ln w="4445">
             <a:solidFill>
@@ -60402,7 +60402,7 @@
             <a:avLst/>
           </a:prstGeom>
           <a:solidFill>
-            <a:srgbClr val="C53E1F"/>
+            <a:srgbClr val="6C757D"/>
           </a:solidFill>
           <a:ln w="4445">
             <a:solidFill>
@@ -60448,7 +60448,7 @@
             <a:avLst/>
           </a:prstGeom>
           <a:solidFill>
-            <a:srgbClr val="0A7D6E"/>
+            <a:srgbClr val="6C757D"/>
           </a:solidFill>
           <a:ln w="4445">
             <a:solidFill>
@@ -60494,7 +60494,7 @@
             <a:avLst/>
           </a:prstGeom>
           <a:solidFill>
-            <a:srgbClr val="0A7D6E"/>
+            <a:srgbClr val="6C757D"/>
           </a:solidFill>
           <a:ln w="4445">
             <a:solidFill>
@@ -60540,7 +60540,7 @@
             <a:avLst/>
           </a:prstGeom>
           <a:solidFill>
-            <a:srgbClr val="0A7D6E"/>
+            <a:srgbClr val="6C757D"/>
           </a:solidFill>
           <a:ln w="4445">
             <a:solidFill>
@@ -60586,7 +60586,7 @@
             <a:avLst/>
           </a:prstGeom>
           <a:solidFill>
-            <a:srgbClr val="0A7D6E"/>
+            <a:srgbClr val="6C757D"/>
           </a:solidFill>
           <a:ln w="4445">
             <a:solidFill>
@@ -60632,7 +60632,7 @@
             <a:avLst/>
           </a:prstGeom>
           <a:solidFill>
-            <a:srgbClr val="0A7D6E"/>
+            <a:srgbClr val="6C757D"/>
           </a:solidFill>
           <a:ln w="4445">
             <a:solidFill>
@@ -60678,7 +60678,7 @@
             <a:avLst/>
           </a:prstGeom>
           <a:solidFill>
-            <a:srgbClr val="C53E1F"/>
+            <a:srgbClr val="6C757D"/>
           </a:solidFill>
           <a:ln w="4445">
             <a:solidFill>
@@ -60724,7 +60724,7 @@
             <a:avLst/>
           </a:prstGeom>
           <a:solidFill>
-            <a:srgbClr val="0A7D6E"/>
+            <a:srgbClr val="6C757D"/>
           </a:solidFill>
           <a:ln w="4445">
             <a:solidFill>
@@ -60770,7 +60770,7 @@
             <a:avLst/>
           </a:prstGeom>
           <a:solidFill>
-            <a:srgbClr val="0A7D6E"/>
+            <a:srgbClr val="6C757D"/>
           </a:solidFill>
           <a:ln w="4445">
             <a:solidFill>
@@ -60816,7 +60816,7 @@
             <a:avLst/>
           </a:prstGeom>
           <a:solidFill>
-            <a:srgbClr val="C53E1F"/>
+            <a:srgbClr val="6C757D"/>
           </a:solidFill>
           <a:ln w="4445">
             <a:solidFill>
@@ -60862,7 +60862,7 @@
             <a:avLst/>
           </a:prstGeom>
           <a:solidFill>
-            <a:srgbClr val="C53E1F"/>
+            <a:srgbClr val="6C757D"/>
           </a:solidFill>
           <a:ln w="4445">
             <a:solidFill>
@@ -60908,7 +60908,7 @@
             <a:avLst/>
           </a:prstGeom>
           <a:solidFill>
-            <a:srgbClr val="0A7D6E"/>
+            <a:srgbClr val="6C757D"/>
           </a:solidFill>
           <a:ln w="4445">
             <a:solidFill>
@@ -60954,7 +60954,7 @@
             <a:avLst/>
           </a:prstGeom>
           <a:solidFill>
-            <a:srgbClr val="0A7D6E"/>
+            <a:srgbClr val="6C757D"/>
           </a:solidFill>
           <a:ln w="4445">
             <a:solidFill>
@@ -61000,7 +61000,7 @@
             <a:avLst/>
           </a:prstGeom>
           <a:solidFill>
-            <a:srgbClr val="0A7D6E"/>
+            <a:srgbClr val="6C757D"/>
           </a:solidFill>
           <a:ln w="4445">
             <a:solidFill>
@@ -61046,7 +61046,7 @@
             <a:avLst/>
           </a:prstGeom>
           <a:solidFill>
-            <a:srgbClr val="C53E1F"/>
+            <a:srgbClr val="6C757D"/>
           </a:solidFill>
           <a:ln w="4445">
             <a:solidFill>
@@ -61092,7 +61092,7 @@
             <a:avLst/>
           </a:prstGeom>
           <a:solidFill>
-            <a:srgbClr val="C53E1F"/>
+            <a:srgbClr val="6C757D"/>
           </a:solidFill>
           <a:ln w="4445">
             <a:solidFill>
@@ -61138,7 +61138,7 @@
             <a:avLst/>
           </a:prstGeom>
           <a:solidFill>
-            <a:srgbClr val="C53E1F"/>
+            <a:srgbClr val="6C757D"/>
           </a:solidFill>
           <a:ln w="4445">
             <a:solidFill>
@@ -61184,7 +61184,7 @@
             <a:avLst/>
           </a:prstGeom>
           <a:solidFill>
-            <a:srgbClr val="0A7D6E"/>
+            <a:srgbClr val="6C757D"/>
           </a:solidFill>
           <a:ln w="4445">
             <a:solidFill>
@@ -61230,7 +61230,7 @@
             <a:avLst/>
           </a:prstGeom>
           <a:solidFill>
-            <a:srgbClr val="C53E1F"/>
+            <a:srgbClr val="6C757D"/>
           </a:solidFill>
           <a:ln w="4445">
             <a:solidFill>
@@ -61276,7 +61276,7 @@
             <a:avLst/>
           </a:prstGeom>
           <a:solidFill>
-            <a:srgbClr val="C53E1F"/>
+            <a:srgbClr val="6C757D"/>
           </a:solidFill>
           <a:ln w="4445">
             <a:solidFill>
@@ -61322,7 +61322,7 @@
             <a:avLst/>
           </a:prstGeom>
           <a:solidFill>
-            <a:srgbClr val="0A7D6E"/>
+            <a:srgbClr val="6C757D"/>
           </a:solidFill>
           <a:ln w="4445">
             <a:solidFill>
@@ -61368,7 +61368,7 @@
             <a:avLst/>
           </a:prstGeom>
           <a:solidFill>
-            <a:srgbClr val="0A7D6E"/>
+            <a:srgbClr val="6C757D"/>
           </a:solidFill>
           <a:ln w="4445">
             <a:solidFill>
@@ -61414,7 +61414,7 @@
             <a:avLst/>
           </a:prstGeom>
           <a:solidFill>
-            <a:srgbClr val="C53E1F"/>
+            <a:srgbClr val="6C757D"/>
           </a:solidFill>
           <a:ln w="4445">
             <a:solidFill>
@@ -61460,7 +61460,7 @@
             <a:avLst/>
           </a:prstGeom>
           <a:solidFill>
-            <a:srgbClr val="0A7D6E"/>
+            <a:srgbClr val="6C757D"/>
           </a:solidFill>
           <a:ln w="4445">
             <a:solidFill>
@@ -61506,7 +61506,7 @@
             <a:avLst/>
           </a:prstGeom>
           <a:solidFill>
-            <a:srgbClr val="0A7D6E"/>
+            <a:srgbClr val="6C757D"/>
           </a:solidFill>
           <a:ln w="4445">
             <a:solidFill>
@@ -61552,7 +61552,7 @@
             <a:avLst/>
           </a:prstGeom>
           <a:solidFill>
-            <a:srgbClr val="C53E1F"/>
+            <a:srgbClr val="6C757D"/>
           </a:solidFill>
           <a:ln w="4445">
             <a:solidFill>
@@ -61598,7 +61598,7 @@
             <a:avLst/>
           </a:prstGeom>
           <a:solidFill>
-            <a:srgbClr val="0A7D6E"/>
+            <a:srgbClr val="6C757D"/>
           </a:solidFill>
           <a:ln w="4445">
             <a:solidFill>
@@ -61644,7 +61644,7 @@
             <a:avLst/>
           </a:prstGeom>
           <a:solidFill>
-            <a:srgbClr val="0A7D6E"/>
+            <a:srgbClr val="6C757D"/>
           </a:solidFill>
           <a:ln w="4445">
             <a:solidFill>
@@ -61690,7 +61690,7 @@
             <a:avLst/>
           </a:prstGeom>
           <a:solidFill>
-            <a:srgbClr val="C53E1F"/>
+            <a:srgbClr val="6C757D"/>
           </a:solidFill>
           <a:ln w="4445">
             <a:solidFill>
@@ -61736,7 +61736,7 @@
             <a:avLst/>
           </a:prstGeom>
           <a:solidFill>
-            <a:srgbClr val="0A7D6E"/>
+            <a:srgbClr val="6C757D"/>
           </a:solidFill>
           <a:ln w="4445">
             <a:solidFill>
@@ -61782,7 +61782,7 @@
             <a:avLst/>
           </a:prstGeom>
           <a:solidFill>
-            <a:srgbClr val="C53E1F"/>
+            <a:srgbClr val="6C757D"/>
           </a:solidFill>
           <a:ln w="4445">
             <a:solidFill>
@@ -61828,7 +61828,7 @@
             <a:avLst/>
           </a:prstGeom>
           <a:solidFill>
-            <a:srgbClr val="C53E1F"/>
+            <a:srgbClr val="6C757D"/>
           </a:solidFill>
           <a:ln w="4445">
             <a:solidFill>
@@ -61874,7 +61874,7 @@
             <a:avLst/>
           </a:prstGeom>
           <a:solidFill>
-            <a:srgbClr val="C53E1F"/>
+            <a:srgbClr val="6C757D"/>
           </a:solidFill>
           <a:ln w="4445">
             <a:solidFill>
@@ -61920,7 +61920,7 @@
             <a:avLst/>
           </a:prstGeom>
           <a:solidFill>
-            <a:srgbClr val="C53E1F"/>
+            <a:srgbClr val="6C757D"/>
           </a:solidFill>
           <a:ln w="4445">
             <a:solidFill>
@@ -61966,7 +61966,7 @@
             <a:avLst/>
           </a:prstGeom>
           <a:solidFill>
-            <a:srgbClr val="0A7D6E"/>
+            <a:srgbClr val="6C757D"/>
           </a:solidFill>
           <a:ln w="4445">
             <a:solidFill>
@@ -62012,7 +62012,7 @@
             <a:avLst/>
           </a:prstGeom>
           <a:solidFill>
-            <a:srgbClr val="0A7D6E"/>
+            <a:srgbClr val="6C757D"/>
           </a:solidFill>
           <a:ln w="4445">
             <a:solidFill>
@@ -62058,7 +62058,7 @@
             <a:avLst/>
           </a:prstGeom>
           <a:solidFill>
-            <a:srgbClr val="C53E1F"/>
+            <a:srgbClr val="6C757D"/>
           </a:solidFill>
           <a:ln w="4445">
             <a:solidFill>
@@ -62104,7 +62104,7 @@
             <a:avLst/>
           </a:prstGeom>
           <a:solidFill>
-            <a:srgbClr val="0A7D6E"/>
+            <a:srgbClr val="6C757D"/>
           </a:solidFill>
           <a:ln w="4445">
             <a:solidFill>
@@ -62150,7 +62150,7 @@
             <a:avLst/>
           </a:prstGeom>
           <a:solidFill>
-            <a:srgbClr val="0A7D6E"/>
+            <a:srgbClr val="6C757D"/>
           </a:solidFill>
           <a:ln w="4445">
             <a:solidFill>
@@ -62196,7 +62196,7 @@
             <a:avLst/>
           </a:prstGeom>
           <a:solidFill>
-            <a:srgbClr val="0A7D6E"/>
+            <a:srgbClr val="6C757D"/>
           </a:solidFill>
           <a:ln w="4445">
             <a:solidFill>
@@ -62242,7 +62242,7 @@
             <a:avLst/>
           </a:prstGeom>
           <a:solidFill>
-            <a:srgbClr val="0A7D6E"/>
+            <a:srgbClr val="6C757D"/>
           </a:solidFill>
           <a:ln w="4445">
             <a:solidFill>
@@ -62288,7 +62288,7 @@
             <a:avLst/>
           </a:prstGeom>
           <a:solidFill>
-            <a:srgbClr val="0A7D6E"/>
+            <a:srgbClr val="6C757D"/>
           </a:solidFill>
           <a:ln w="4445">
             <a:solidFill>
@@ -62334,7 +62334,7 @@
             <a:avLst/>
           </a:prstGeom>
           <a:solidFill>
-            <a:srgbClr val="C53E1F"/>
+            <a:srgbClr val="6C757D"/>
           </a:solidFill>
           <a:ln w="4445">
             <a:solidFill>
@@ -62380,7 +62380,7 @@
             <a:avLst/>
           </a:prstGeom>
           <a:solidFill>
-            <a:srgbClr val="C53E1F"/>
+            <a:srgbClr val="6C757D"/>
           </a:solidFill>
           <a:ln w="4445">
             <a:solidFill>
@@ -62426,7 +62426,7 @@
             <a:avLst/>
           </a:prstGeom>
           <a:solidFill>
-            <a:srgbClr val="C53E1F"/>
+            <a:srgbClr val="6C757D"/>
           </a:solidFill>
           <a:ln w="4445">
             <a:solidFill>
@@ -62472,7 +62472,7 @@
             <a:avLst/>
           </a:prstGeom>
           <a:solidFill>
-            <a:srgbClr val="C53E1F"/>
+            <a:srgbClr val="6C757D"/>
           </a:solidFill>
           <a:ln w="4445">
             <a:solidFill>
@@ -62518,7 +62518,7 @@
             <a:avLst/>
           </a:prstGeom>
           <a:solidFill>
-            <a:srgbClr val="0A7D6E"/>
+            <a:srgbClr val="6C757D"/>
           </a:solidFill>
           <a:ln w="4445">
             <a:solidFill>
@@ -62564,7 +62564,7 @@
             <a:avLst/>
           </a:prstGeom>
           <a:solidFill>
-            <a:srgbClr val="0A7D6E"/>
+            <a:srgbClr val="6C757D"/>
           </a:solidFill>
           <a:ln w="4445">
             <a:solidFill>
@@ -62610,7 +62610,7 @@
             <a:avLst/>
           </a:prstGeom>
           <a:solidFill>
-            <a:srgbClr val="C53E1F"/>
+            <a:srgbClr val="6C757D"/>
           </a:solidFill>
           <a:ln w="4445">
             <a:solidFill>
@@ -62656,7 +62656,7 @@
             <a:avLst/>
           </a:prstGeom>
           <a:solidFill>
-            <a:srgbClr val="C53E1F"/>
+            <a:srgbClr val="6C757D"/>
           </a:solidFill>
           <a:ln w="4445">
             <a:solidFill>
@@ -62702,7 +62702,7 @@
             <a:avLst/>
           </a:prstGeom>
           <a:solidFill>
-            <a:srgbClr val="C53E1F"/>
+            <a:srgbClr val="6C757D"/>
           </a:solidFill>
           <a:ln w="4445">
             <a:solidFill>
@@ -62748,7 +62748,7 @@
             <a:avLst/>
           </a:prstGeom>
           <a:solidFill>
-            <a:srgbClr val="C53E1F"/>
+            <a:srgbClr val="6C757D"/>
           </a:solidFill>
           <a:ln w="4445">
             <a:solidFill>
@@ -62794,7 +62794,7 @@
             <a:avLst/>
           </a:prstGeom>
           <a:solidFill>
-            <a:srgbClr val="0A7D6E"/>
+            <a:srgbClr val="6C757D"/>
           </a:solidFill>
           <a:ln w="4445">
             <a:solidFill>
@@ -62840,7 +62840,7 @@
             <a:avLst/>
           </a:prstGeom>
           <a:solidFill>
-            <a:srgbClr val="C53E1F"/>
+            <a:srgbClr val="6C757D"/>
           </a:solidFill>
           <a:ln w="4445">
             <a:solidFill>
@@ -62886,7 +62886,7 @@
             <a:avLst/>
           </a:prstGeom>
           <a:solidFill>
-            <a:srgbClr val="C53E1F"/>
+            <a:srgbClr val="6C757D"/>
           </a:solidFill>
           <a:ln w="4445">
             <a:solidFill>
@@ -62932,7 +62932,7 @@
             <a:avLst/>
           </a:prstGeom>
           <a:solidFill>
-            <a:srgbClr val="0A7D6E"/>
+            <a:srgbClr val="6C757D"/>
           </a:solidFill>
           <a:ln w="4445">
             <a:solidFill>
@@ -62978,7 +62978,7 @@
             <a:avLst/>
           </a:prstGeom>
           <a:solidFill>
-            <a:srgbClr val="C53E1F"/>
+            <a:srgbClr val="6C757D"/>
           </a:solidFill>
           <a:ln w="4445">
             <a:solidFill>
@@ -63024,7 +63024,7 @@
             <a:avLst/>
           </a:prstGeom>
           <a:solidFill>
-            <a:srgbClr val="C53E1F"/>
+            <a:srgbClr val="6C757D"/>
           </a:solidFill>
           <a:ln w="4445">
             <a:solidFill>
@@ -63070,7 +63070,7 @@
             <a:avLst/>
           </a:prstGeom>
           <a:solidFill>
-            <a:srgbClr val="0A7D6E"/>
+            <a:srgbClr val="6C757D"/>
           </a:solidFill>
           <a:ln w="4445">
             <a:solidFill>
@@ -63116,7 +63116,7 @@
             <a:avLst/>
           </a:prstGeom>
           <a:solidFill>
-            <a:srgbClr val="0A7D6E"/>
+            <a:srgbClr val="6C757D"/>
           </a:solidFill>
           <a:ln w="4445">
             <a:solidFill>
@@ -63162,7 +63162,7 @@
             <a:avLst/>
           </a:prstGeom>
           <a:solidFill>
-            <a:srgbClr val="C53E1F"/>
+            <a:srgbClr val="6C757D"/>
           </a:solidFill>
           <a:ln w="4445">
             <a:solidFill>
@@ -63208,7 +63208,7 @@
             <a:avLst/>
           </a:prstGeom>
           <a:solidFill>
-            <a:srgbClr val="C53E1F"/>
+            <a:srgbClr val="6C757D"/>
           </a:solidFill>
           <a:ln w="4445">
             <a:solidFill>
@@ -63254,7 +63254,7 @@
             <a:avLst/>
           </a:prstGeom>
           <a:solidFill>
-            <a:srgbClr val="0A7D6E"/>
+            <a:srgbClr val="6C757D"/>
           </a:solidFill>
           <a:ln w="4445">
             <a:solidFill>
@@ -63300,7 +63300,7 @@
             <a:avLst/>
           </a:prstGeom>
           <a:solidFill>
-            <a:srgbClr val="0A7D6E"/>
+            <a:srgbClr val="6C757D"/>
           </a:solidFill>
           <a:ln w="4445">
             <a:solidFill>
@@ -63346,7 +63346,7 @@
             <a:avLst/>
           </a:prstGeom>
           <a:solidFill>
-            <a:srgbClr val="0A7D6E"/>
+            <a:srgbClr val="6C757D"/>
           </a:solidFill>
           <a:ln w="4445">
             <a:solidFill>
@@ -63392,7 +63392,7 @@
             <a:avLst/>
           </a:prstGeom>
           <a:solidFill>
-            <a:srgbClr val="0A7D6E"/>
+            <a:srgbClr val="6C757D"/>
           </a:solidFill>
           <a:ln w="4445">
             <a:solidFill>
@@ -63438,7 +63438,7 @@
             <a:avLst/>
           </a:prstGeom>
           <a:solidFill>
-            <a:srgbClr val="C53E1F"/>
+            <a:srgbClr val="6C757D"/>
           </a:solidFill>
           <a:ln w="4445">
             <a:solidFill>
@@ -63484,7 +63484,7 @@
             <a:avLst/>
           </a:prstGeom>
           <a:solidFill>
-            <a:srgbClr val="0A7D6E"/>
+            <a:srgbClr val="6C757D"/>
           </a:solidFill>
           <a:ln w="4445">
             <a:solidFill>
@@ -63530,7 +63530,7 @@
             <a:avLst/>
           </a:prstGeom>
           <a:solidFill>
-            <a:srgbClr val="0A7D6E"/>
+            <a:srgbClr val="6C757D"/>
           </a:solidFill>
           <a:ln w="4445">
             <a:solidFill>
@@ -63576,7 +63576,7 @@
             <a:avLst/>
           </a:prstGeom>
           <a:solidFill>
-            <a:srgbClr val="0A7D6E"/>
+            <a:srgbClr val="6C757D"/>
           </a:solidFill>
           <a:ln w="4445">
             <a:solidFill>
@@ -63622,7 +63622,7 @@
             <a:avLst/>
           </a:prstGeom>
           <a:solidFill>
-            <a:srgbClr val="C53E1F"/>
+            <a:srgbClr val="6C757D"/>
           </a:solidFill>
           <a:ln w="4445">
             <a:solidFill>
@@ -63668,7 +63668,7 @@
             <a:avLst/>
           </a:prstGeom>
           <a:solidFill>
-            <a:srgbClr val="0A7D6E"/>
+            <a:srgbClr val="6C757D"/>
           </a:solidFill>
           <a:ln w="4445">
             <a:solidFill>
@@ -63714,7 +63714,7 @@
             <a:avLst/>
           </a:prstGeom>
           <a:solidFill>
-            <a:srgbClr val="0A7D6E"/>
+            <a:srgbClr val="6C757D"/>
           </a:solidFill>
           <a:ln w="4445">
             <a:solidFill>
@@ -63760,7 +63760,7 @@
             <a:avLst/>
           </a:prstGeom>
           <a:solidFill>
-            <a:srgbClr val="0A7D6E"/>
+            <a:srgbClr val="6C757D"/>
           </a:solidFill>
           <a:ln w="4445">
             <a:solidFill>
@@ -63806,7 +63806,7 @@
             <a:avLst/>
           </a:prstGeom>
           <a:solidFill>
-            <a:srgbClr val="0A7D6E"/>
+            <a:srgbClr val="6C757D"/>
           </a:solidFill>
           <a:ln w="4445">
             <a:solidFill>
@@ -63852,7 +63852,7 @@
             <a:avLst/>
           </a:prstGeom>
           <a:solidFill>
-            <a:srgbClr val="C53E1F"/>
+            <a:srgbClr val="6C757D"/>
           </a:solidFill>
           <a:ln w="4445">
             <a:solidFill>
@@ -63898,7 +63898,7 @@
             <a:avLst/>
           </a:prstGeom>
           <a:solidFill>
-            <a:srgbClr val="C53E1F"/>
+            <a:srgbClr val="6C757D"/>
           </a:solidFill>
           <a:ln w="4445">
             <a:solidFill>
@@ -63944,7 +63944,7 @@
             <a:avLst/>
           </a:prstGeom>
           <a:solidFill>
-            <a:srgbClr val="0A7D6E"/>
+            <a:srgbClr val="6C757D"/>
           </a:solidFill>
           <a:ln w="4445">
             <a:solidFill>
@@ -63990,7 +63990,7 @@
             <a:avLst/>
           </a:prstGeom>
           <a:solidFill>
-            <a:srgbClr val="C53E1F"/>
+            <a:srgbClr val="6C757D"/>
           </a:solidFill>
           <a:ln w="4445">
             <a:solidFill>
@@ -64036,7 +64036,7 @@
             <a:avLst/>
           </a:prstGeom>
           <a:solidFill>
-            <a:srgbClr val="C53E1F"/>
+            <a:srgbClr val="6C757D"/>
           </a:solidFill>
           <a:ln w="4445">
             <a:solidFill>
@@ -64082,7 +64082,7 @@
             <a:avLst/>
           </a:prstGeom>
           <a:solidFill>
-            <a:srgbClr val="0A7D6E"/>
+            <a:srgbClr val="6C757D"/>
           </a:solidFill>
           <a:ln w="4445">
             <a:solidFill>
@@ -64128,7 +64128,7 @@
             <a:avLst/>
           </a:prstGeom>
           <a:solidFill>
-            <a:srgbClr val="C53E1F"/>
+            <a:srgbClr val="6C757D"/>
           </a:solidFill>
           <a:ln w="4445">
             <a:solidFill>
@@ -64174,7 +64174,7 @@
             <a:avLst/>
           </a:prstGeom>
           <a:solidFill>
-            <a:srgbClr val="0A7D6E"/>
+            <a:srgbClr val="6C757D"/>
           </a:solidFill>
           <a:ln w="4445">
             <a:solidFill>
@@ -64220,7 +64220,7 @@
             <a:avLst/>
           </a:prstGeom>
           <a:solidFill>
-            <a:srgbClr val="0A7D6E"/>
+            <a:srgbClr val="6C757D"/>
           </a:solidFill>
           <a:ln w="4445">
             <a:solidFill>
@@ -64266,7 +64266,7 @@
             <a:avLst/>
           </a:prstGeom>
           <a:solidFill>
-            <a:srgbClr val="C53E1F"/>
+            <a:srgbClr val="6C757D"/>
           </a:solidFill>
           <a:ln w="4445">
             <a:solidFill>
@@ -64312,7 +64312,7 @@
             <a:avLst/>
           </a:prstGeom>
           <a:solidFill>
-            <a:srgbClr val="0A7D6E"/>
+            <a:srgbClr val="6C757D"/>
           </a:solidFill>
           <a:ln w="4445">
             <a:solidFill>
@@ -64358,7 +64358,7 @@
             <a:avLst/>
           </a:prstGeom>
           <a:solidFill>
-            <a:srgbClr val="0A7D6E"/>
+            <a:srgbClr val="6C757D"/>
           </a:solidFill>
           <a:ln w="4445">
             <a:solidFill>
@@ -64404,7 +64404,7 @@
             <a:avLst/>
           </a:prstGeom>
           <a:solidFill>
-            <a:srgbClr val="C53E1F"/>
+            <a:srgbClr val="6C757D"/>
           </a:solidFill>
           <a:ln w="4445">
             <a:solidFill>
@@ -64450,7 +64450,7 @@
             <a:avLst/>
           </a:prstGeom>
           <a:solidFill>
-            <a:srgbClr val="C53E1F"/>
+            <a:srgbClr val="6C757D"/>
           </a:solidFill>
           <a:ln w="4445">
             <a:solidFill>
@@ -64496,7 +64496,7 @@
             <a:avLst/>
           </a:prstGeom>
           <a:solidFill>
-            <a:srgbClr val="C53E1F"/>
+            <a:srgbClr val="6C757D"/>
           </a:solidFill>
           <a:ln w="4445">
             <a:solidFill>
@@ -64542,7 +64542,7 @@
             <a:avLst/>
           </a:prstGeom>
           <a:solidFill>
-            <a:srgbClr val="0A7D6E"/>
+            <a:srgbClr val="6C757D"/>
           </a:solidFill>
           <a:ln w="4445">
             <a:solidFill>
@@ -64588,7 +64588,7 @@
             <a:avLst/>
           </a:prstGeom>
           <a:solidFill>
-            <a:srgbClr val="C53E1F"/>
+            <a:srgbClr val="6C757D"/>
           </a:solidFill>
           <a:ln w="4445">
             <a:solidFill>
@@ -64634,7 +64634,7 @@
             <a:avLst/>
           </a:prstGeom>
           <a:solidFill>
-            <a:srgbClr val="0A7D6E"/>
+            <a:srgbClr val="6C757D"/>
           </a:solidFill>
           <a:ln w="4445">
             <a:solidFill>
@@ -64680,7 +64680,7 @@
             <a:avLst/>
           </a:prstGeom>
           <a:solidFill>
-            <a:srgbClr val="C53E1F"/>
+            <a:srgbClr val="6C757D"/>
           </a:solidFill>
           <a:ln w="4445">
             <a:solidFill>
@@ -64726,7 +64726,7 @@
             <a:avLst/>
           </a:prstGeom>
           <a:solidFill>
-            <a:srgbClr val="0A7D6E"/>
+            <a:srgbClr val="6C757D"/>
           </a:solidFill>
           <a:ln w="4445">
             <a:solidFill>
@@ -64772,7 +64772,7 @@
             <a:avLst/>
           </a:prstGeom>
           <a:solidFill>
-            <a:srgbClr val="0A7D6E"/>
+            <a:srgbClr val="6C757D"/>
           </a:solidFill>
           <a:ln w="4445">
             <a:solidFill>
@@ -64818,7 +64818,7 @@
             <a:avLst/>
           </a:prstGeom>
           <a:solidFill>
-            <a:srgbClr val="C53E1F"/>
+            <a:srgbClr val="6C757D"/>
           </a:solidFill>
           <a:ln w="4445">
             <a:solidFill>
@@ -64864,7 +64864,7 @@
             <a:avLst/>
           </a:prstGeom>
           <a:solidFill>
-            <a:srgbClr val="C53E1F"/>
+            <a:srgbClr val="6C757D"/>
           </a:solidFill>
           <a:ln w="4445">
             <a:solidFill>
@@ -64910,7 +64910,7 @@
             <a:avLst/>
           </a:prstGeom>
           <a:solidFill>
-            <a:srgbClr val="0A7D6E"/>
+            <a:srgbClr val="6C757D"/>
           </a:solidFill>
           <a:ln w="4445">
             <a:solidFill>
@@ -64956,7 +64956,7 @@
             <a:avLst/>
           </a:prstGeom>
           <a:solidFill>
-            <a:srgbClr val="0A7D6E"/>
+            <a:srgbClr val="6C757D"/>
           </a:solidFill>
           <a:ln w="4445">
             <a:solidFill>
@@ -65002,7 +65002,7 @@
             <a:avLst/>
           </a:prstGeom>
           <a:solidFill>
-            <a:srgbClr val="0A7D6E"/>
+            <a:srgbClr val="6C757D"/>
           </a:solidFill>
           <a:ln w="4445">
             <a:solidFill>
@@ -65048,7 +65048,7 @@
             <a:avLst/>
           </a:prstGeom>
           <a:solidFill>
-            <a:srgbClr val="C53E1F"/>
+            <a:srgbClr val="6C757D"/>
           </a:solidFill>
           <a:ln w="4445">
             <a:solidFill>
@@ -65094,7 +65094,7 @@
             <a:avLst/>
           </a:prstGeom>
           <a:solidFill>
-            <a:srgbClr val="0A7D6E"/>
+            <a:srgbClr val="6C757D"/>
           </a:solidFill>
           <a:ln w="4445">
             <a:solidFill>
@@ -65140,7 +65140,7 @@
             <a:avLst/>
           </a:prstGeom>
           <a:solidFill>
-            <a:srgbClr val="0A7D6E"/>
+            <a:srgbClr val="6C757D"/>
           </a:solidFill>
           <a:ln w="4445">
             <a:solidFill>
@@ -65186,7 +65186,7 @@
             <a:avLst/>
           </a:prstGeom>
           <a:solidFill>
-            <a:srgbClr val="0A7D6E"/>
+            <a:srgbClr val="6C757D"/>
           </a:solidFill>
           <a:ln w="4445">
             <a:solidFill>
@@ -65232,7 +65232,7 @@
             <a:avLst/>
           </a:prstGeom>
           <a:solidFill>
-            <a:srgbClr val="C53E1F"/>
+            <a:srgbClr val="6C757D"/>
           </a:solidFill>
           <a:ln w="4445">
             <a:solidFill>
@@ -65278,7 +65278,7 @@
             <a:avLst/>
           </a:prstGeom>
           <a:solidFill>
-            <a:srgbClr val="0A7D6E"/>
+            <a:srgbClr val="6C757D"/>
           </a:solidFill>
           <a:ln w="4445">
             <a:solidFill>
@@ -65324,7 +65324,7 @@
             <a:avLst/>
           </a:prstGeom>
           <a:solidFill>
-            <a:srgbClr val="0A7D6E"/>
+            <a:srgbClr val="6C757D"/>
           </a:solidFill>
           <a:ln w="4445">
             <a:solidFill>
@@ -65370,7 +65370,7 @@
             <a:avLst/>
           </a:prstGeom>
           <a:solidFill>
-            <a:srgbClr val="0A7D6E"/>
+            <a:srgbClr val="6C757D"/>
           </a:solidFill>
           <a:ln w="4445">
             <a:solidFill>
@@ -65416,7 +65416,7 @@
             <a:avLst/>
           </a:prstGeom>
           <a:solidFill>
-            <a:srgbClr val="0A7D6E"/>
+            <a:srgbClr val="6C757D"/>
           </a:solidFill>
           <a:ln w="4445">
             <a:solidFill>
@@ -65462,7 +65462,7 @@
             <a:avLst/>
           </a:prstGeom>
           <a:solidFill>
-            <a:srgbClr val="0A7D6E"/>
+            <a:srgbClr val="6C757D"/>
           </a:solidFill>
           <a:ln w="4445">
             <a:solidFill>
@@ -65508,7 +65508,7 @@
             <a:avLst/>
           </a:prstGeom>
           <a:solidFill>
-            <a:srgbClr val="C53E1F"/>
+            <a:srgbClr val="6C757D"/>
           </a:solidFill>
           <a:ln w="4445">
             <a:solidFill>
@@ -65554,7 +65554,7 @@
             <a:avLst/>
           </a:prstGeom>
           <a:solidFill>
-            <a:srgbClr val="C53E1F"/>
+            <a:srgbClr val="6C757D"/>
           </a:solidFill>
           <a:ln w="4445">
             <a:solidFill>
@@ -65600,7 +65600,7 @@
             <a:avLst/>
           </a:prstGeom>
           <a:solidFill>
-            <a:srgbClr val="0A7D6E"/>
+            <a:srgbClr val="6C757D"/>
           </a:solidFill>
           <a:ln w="4445">
             <a:solidFill>
@@ -65646,7 +65646,7 @@
             <a:avLst/>
           </a:prstGeom>
           <a:solidFill>
-            <a:srgbClr val="C53E1F"/>
+            <a:srgbClr val="6C757D"/>
           </a:solidFill>
           <a:ln w="4445">
             <a:solidFill>
@@ -65692,7 +65692,7 @@
             <a:avLst/>
           </a:prstGeom>
           <a:solidFill>
-            <a:srgbClr val="C53E1F"/>
+            <a:srgbClr val="6C757D"/>
           </a:solidFill>
           <a:ln w="4445">
             <a:solidFill>
@@ -65738,7 +65738,7 @@
             <a:avLst/>
           </a:prstGeom>
           <a:solidFill>
-            <a:srgbClr val="C53E1F"/>
+            <a:srgbClr val="6C757D"/>
           </a:solidFill>
           <a:ln w="4445">
             <a:solidFill>
@@ -65784,7 +65784,7 @@
             <a:avLst/>
           </a:prstGeom>
           <a:solidFill>
-            <a:srgbClr val="C53E1F"/>
+            <a:srgbClr val="6C757D"/>
           </a:solidFill>
           <a:ln w="4445">
             <a:solidFill>
@@ -65830,7 +65830,7 @@
             <a:avLst/>
           </a:prstGeom>
           <a:solidFill>
-            <a:srgbClr val="C53E1F"/>
+            <a:srgbClr val="6C757D"/>
           </a:solidFill>
           <a:ln w="4445">
             <a:solidFill>
@@ -65876,7 +65876,7 @@
             <a:avLst/>
           </a:prstGeom>
           <a:solidFill>
-            <a:srgbClr val="C53E1F"/>
+            <a:srgbClr val="6C757D"/>
           </a:solidFill>
           <a:ln w="4445">
             <a:solidFill>
@@ -65922,7 +65922,7 @@
             <a:avLst/>
           </a:prstGeom>
           <a:solidFill>
-            <a:srgbClr val="C53E1F"/>
+            <a:srgbClr val="6C757D"/>
           </a:solidFill>
           <a:ln w="4445">
             <a:solidFill>
@@ -65968,7 +65968,7 @@
             <a:avLst/>
           </a:prstGeom>
           <a:solidFill>
-            <a:srgbClr val="C53E1F"/>
+            <a:srgbClr val="6C757D"/>
           </a:solidFill>
           <a:ln w="4445">
             <a:solidFill>
@@ -66014,7 +66014,7 @@
             <a:avLst/>
           </a:prstGeom>
           <a:solidFill>
-            <a:srgbClr val="0A7D6E"/>
+            <a:srgbClr val="6C757D"/>
           </a:solidFill>
           <a:ln w="4445">
             <a:solidFill>
@@ -66060,7 +66060,7 @@
             <a:avLst/>
           </a:prstGeom>
           <a:solidFill>
-            <a:srgbClr val="C53E1F"/>
+            <a:srgbClr val="6C757D"/>
           </a:solidFill>
           <a:ln w="4445">
             <a:solidFill>
@@ -66106,7 +66106,7 @@
             <a:avLst/>
           </a:prstGeom>
           <a:solidFill>
-            <a:srgbClr val="0A7D6E"/>
+            <a:srgbClr val="6C757D"/>
           </a:solidFill>
           <a:ln w="4445">
             <a:solidFill>
@@ -66152,7 +66152,7 @@
             <a:avLst/>
           </a:prstGeom>
           <a:solidFill>
-            <a:srgbClr val="0A7D6E"/>
+            <a:srgbClr val="6C757D"/>
           </a:solidFill>
           <a:ln w="4445">
             <a:solidFill>
@@ -66198,7 +66198,7 @@
             <a:avLst/>
           </a:prstGeom>
           <a:solidFill>
-            <a:srgbClr val="C53E1F"/>
+            <a:srgbClr val="6C757D"/>
           </a:solidFill>
           <a:ln w="4445">
             <a:solidFill>
@@ -66244,7 +66244,7 @@
             <a:avLst/>
           </a:prstGeom>
           <a:solidFill>
-            <a:srgbClr val="C53E1F"/>
+            <a:srgbClr val="6C757D"/>
           </a:solidFill>
           <a:ln w="4445">
             <a:solidFill>
@@ -66290,7 +66290,7 @@
             <a:avLst/>
           </a:prstGeom>
           <a:solidFill>
-            <a:srgbClr val="0A7D6E"/>
+            <a:srgbClr val="6C757D"/>
           </a:solidFill>
           <a:ln w="4445">
             <a:solidFill>
@@ -66336,7 +66336,7 @@
             <a:avLst/>
           </a:prstGeom>
           <a:solidFill>
-            <a:srgbClr val="C53E1F"/>
+            <a:srgbClr val="6C757D"/>
           </a:solidFill>
           <a:ln w="4445">
             <a:solidFill>
@@ -66382,7 +66382,7 @@
             <a:avLst/>
           </a:prstGeom>
           <a:solidFill>
-            <a:srgbClr val="0A7D6E"/>
+            <a:srgbClr val="6C757D"/>
           </a:solidFill>
           <a:ln w="4445">
             <a:solidFill>
@@ -66428,7 +66428,7 @@
             <a:avLst/>
           </a:prstGeom>
           <a:solidFill>
-            <a:srgbClr val="C53E1F"/>
+            <a:srgbClr val="6C757D"/>
           </a:solidFill>
           <a:ln w="4445">
             <a:solidFill>
@@ -66474,7 +66474,7 @@
             <a:avLst/>
           </a:prstGeom>
           <a:solidFill>
-            <a:srgbClr val="C53E1F"/>
+            <a:srgbClr val="6C757D"/>
           </a:solidFill>
           <a:ln w="4445">
             <a:solidFill>
@@ -66520,7 +66520,7 @@
             <a:avLst/>
           </a:prstGeom>
           <a:solidFill>
-            <a:srgbClr val="C53E1F"/>
+            <a:srgbClr val="6C757D"/>
           </a:solidFill>
           <a:ln w="4445">
             <a:solidFill>
@@ -66566,7 +66566,7 @@
             <a:avLst/>
           </a:prstGeom>
           <a:solidFill>
-            <a:srgbClr val="0A7D6E"/>
+            <a:srgbClr val="6C757D"/>
           </a:solidFill>
           <a:ln w="4445">
             <a:solidFill>
@@ -66612,7 +66612,7 @@
             <a:avLst/>
           </a:prstGeom>
           <a:solidFill>
-            <a:srgbClr val="0A7D6E"/>
+            <a:srgbClr val="6C757D"/>
           </a:solidFill>
           <a:ln w="4445">
             <a:solidFill>
@@ -66658,7 +66658,7 @@
             <a:avLst/>
           </a:prstGeom>
           <a:solidFill>
-            <a:srgbClr val="C53E1F"/>
+            <a:srgbClr val="6C757D"/>
           </a:solidFill>
           <a:ln w="4445">
             <a:solidFill>
@@ -66704,7 +66704,7 @@
             <a:avLst/>
           </a:prstGeom>
           <a:solidFill>
-            <a:srgbClr val="0A7D6E"/>
+            <a:srgbClr val="6C757D"/>
           </a:solidFill>
           <a:ln w="4445">
             <a:solidFill>
@@ -66750,7 +66750,7 @@
             <a:avLst/>
           </a:prstGeom>
           <a:solidFill>
-            <a:srgbClr val="0A7D6E"/>
+            <a:srgbClr val="6C757D"/>
           </a:solidFill>
           <a:ln w="4445">
             <a:solidFill>
@@ -66796,7 +66796,7 @@
             <a:avLst/>
           </a:prstGeom>
           <a:solidFill>
-            <a:srgbClr val="0A7D6E"/>
+            <a:srgbClr val="6C757D"/>
           </a:solidFill>
           <a:ln w="4445">
             <a:solidFill>
@@ -66842,7 +66842,7 @@
             <a:avLst/>
           </a:prstGeom>
           <a:solidFill>
-            <a:srgbClr val="C53E1F"/>
+            <a:srgbClr val="6C757D"/>
           </a:solidFill>
           <a:ln w="4445">
             <a:solidFill>
@@ -66888,7 +66888,7 @@
             <a:avLst/>
           </a:prstGeom>
           <a:solidFill>
-            <a:srgbClr val="0A7D6E"/>
+            <a:srgbClr val="6C757D"/>
           </a:solidFill>
           <a:ln w="4445">
             <a:solidFill>
@@ -66934,7 +66934,7 @@
             <a:avLst/>
           </a:prstGeom>
           <a:solidFill>
-            <a:srgbClr val="C53E1F"/>
+            <a:srgbClr val="6C757D"/>
           </a:solidFill>
           <a:ln w="4445">
             <a:solidFill>
@@ -66980,7 +66980,7 @@
             <a:avLst/>
           </a:prstGeom>
           <a:solidFill>
-            <a:srgbClr val="0A7D6E"/>
+            <a:srgbClr val="6C757D"/>
           </a:solidFill>
           <a:ln w="4445">
             <a:solidFill>
@@ -67026,7 +67026,7 @@
             <a:avLst/>
           </a:prstGeom>
           <a:solidFill>
-            <a:srgbClr val="C53E1F"/>
+            <a:srgbClr val="6C757D"/>
           </a:solidFill>
           <a:ln w="4445">
             <a:solidFill>
@@ -68888,7 +68888,7 @@
             <a:r>
               <a:rPr sz="750" b="1" i="0">
                 <a:solidFill>
-                  <a:srgbClr val="C53E1F"/>
+                  <a:srgbClr val="6C757D"/>
                 </a:solidFill>
                 <a:latin typeface="Arial"/>
               </a:rPr>
@@ -68924,7 +68924,7 @@
             <a:r>
               <a:rPr sz="750" b="1" i="0">
                 <a:solidFill>
-                  <a:srgbClr val="0A7D6E"/>
+                  <a:srgbClr val="6C757D"/>
                 </a:solidFill>
                 <a:latin typeface="Arial"/>
               </a:rPr>
@@ -68960,7 +68960,7 @@
             <a:r>
               <a:rPr sz="750" b="1" i="0">
                 <a:solidFill>
-                  <a:srgbClr val="0A7D6E"/>
+                  <a:srgbClr val="6C757D"/>
                 </a:solidFill>
                 <a:latin typeface="Arial"/>
               </a:rPr>
@@ -68996,7 +68996,7 @@
             <a:r>
               <a:rPr sz="750" b="1" i="0">
                 <a:solidFill>
-                  <a:srgbClr val="0A7D6E"/>
+                  <a:srgbClr val="6C757D"/>
                 </a:solidFill>
                 <a:latin typeface="Arial"/>
               </a:rPr>
@@ -69032,7 +69032,7 @@
             <a:r>
               <a:rPr sz="750" b="1" i="0">
                 <a:solidFill>
-                  <a:srgbClr val="0A7D6E"/>
+                  <a:srgbClr val="6C757D"/>
                 </a:solidFill>
                 <a:latin typeface="Arial"/>
               </a:rPr>
@@ -69068,7 +69068,7 @@
             <a:r>
               <a:rPr sz="750" b="1" i="0">
                 <a:solidFill>
-                  <a:srgbClr val="C53E1F"/>
+                  <a:srgbClr val="6C757D"/>
                 </a:solidFill>
                 <a:latin typeface="Arial"/>
               </a:rPr>
@@ -69104,7 +69104,7 @@
             <a:r>
               <a:rPr sz="750" b="1" i="0">
                 <a:solidFill>
-                  <a:srgbClr val="C53E1F"/>
+                  <a:srgbClr val="6C757D"/>
                 </a:solidFill>
                 <a:latin typeface="Arial"/>
               </a:rPr>
@@ -69140,7 +69140,7 @@
             <a:r>
               <a:rPr sz="750" b="1" i="0">
                 <a:solidFill>
-                  <a:srgbClr val="0A7D6E"/>
+                  <a:srgbClr val="6C757D"/>
                 </a:solidFill>
                 <a:latin typeface="Arial"/>
               </a:rPr>
@@ -69176,7 +69176,7 @@
             <a:r>
               <a:rPr sz="750" b="1" i="0">
                 <a:solidFill>
-                  <a:srgbClr val="0A7D6E"/>
+                  <a:srgbClr val="6C757D"/>
                 </a:solidFill>
                 <a:latin typeface="Arial"/>
               </a:rPr>
@@ -69212,7 +69212,7 @@
             <a:r>
               <a:rPr sz="750" b="1" i="0">
                 <a:solidFill>
-                  <a:srgbClr val="0A7D6E"/>
+                  <a:srgbClr val="6C757D"/>
                 </a:solidFill>
                 <a:latin typeface="Arial"/>
               </a:rPr>
@@ -69248,7 +69248,7 @@
             <a:r>
               <a:rPr sz="750" b="1" i="0">
                 <a:solidFill>
-                  <a:srgbClr val="C53E1F"/>
+                  <a:srgbClr val="6C757D"/>
                 </a:solidFill>
                 <a:latin typeface="Arial"/>
               </a:rPr>
@@ -69284,7 +69284,7 @@
             <a:r>
               <a:rPr sz="750" b="1" i="0">
                 <a:solidFill>
-                  <a:srgbClr val="C53E1F"/>
+                  <a:srgbClr val="6C757D"/>
                 </a:solidFill>
                 <a:latin typeface="Arial"/>
               </a:rPr>
@@ -69320,7 +69320,7 @@
             <a:r>
               <a:rPr sz="750" b="1" i="0">
                 <a:solidFill>
-                  <a:srgbClr val="C53E1F"/>
+                  <a:srgbClr val="6C757D"/>
                 </a:solidFill>
                 <a:latin typeface="Arial"/>
               </a:rPr>
@@ -69356,7 +69356,7 @@
             <a:r>
               <a:rPr sz="750" b="1" i="0">
                 <a:solidFill>
-                  <a:srgbClr val="C53E1F"/>
+                  <a:srgbClr val="6C757D"/>
                 </a:solidFill>
                 <a:latin typeface="Arial"/>
               </a:rPr>
@@ -69392,7 +69392,7 @@
             <a:r>
               <a:rPr sz="750" b="1" i="0">
                 <a:solidFill>
-                  <a:srgbClr val="C53E1F"/>
+                  <a:srgbClr val="6C757D"/>
                 </a:solidFill>
                 <a:latin typeface="Arial"/>
               </a:rPr>
@@ -69428,7 +69428,7 @@
             <a:r>
               <a:rPr sz="750" b="1" i="0">
                 <a:solidFill>
-                  <a:srgbClr val="0A7D6E"/>
+                  <a:srgbClr val="6C757D"/>
                 </a:solidFill>
                 <a:latin typeface="Arial"/>
               </a:rPr>
@@ -69464,7 +69464,7 @@
             <a:r>
               <a:rPr sz="750" b="1" i="0">
                 <a:solidFill>
-                  <a:srgbClr val="0A7D6E"/>
+                  <a:srgbClr val="6C757D"/>
                 </a:solidFill>
                 <a:latin typeface="Arial"/>
               </a:rPr>
@@ -69500,7 +69500,7 @@
             <a:r>
               <a:rPr sz="750" b="1" i="0">
                 <a:solidFill>
-                  <a:srgbClr val="0A7D6E"/>
+                  <a:srgbClr val="6C757D"/>
                 </a:solidFill>
                 <a:latin typeface="Arial"/>
               </a:rPr>
@@ -69536,7 +69536,7 @@
             <a:r>
               <a:rPr sz="750" b="1" i="0">
                 <a:solidFill>
-                  <a:srgbClr val="0A7D6E"/>
+                  <a:srgbClr val="6C757D"/>
                 </a:solidFill>
                 <a:latin typeface="Arial"/>
               </a:rPr>
@@ -69572,7 +69572,7 @@
             <a:r>
               <a:rPr sz="750" b="1" i="0">
                 <a:solidFill>
-                  <a:srgbClr val="C53E1F"/>
+                  <a:srgbClr val="6C757D"/>
                 </a:solidFill>
                 <a:latin typeface="Arial"/>
               </a:rPr>
@@ -69608,7 +69608,7 @@
             <a:r>
               <a:rPr sz="750" b="1" i="0">
                 <a:solidFill>
-                  <a:srgbClr val="0A7D6E"/>
+                  <a:srgbClr val="6C757D"/>
                 </a:solidFill>
                 <a:latin typeface="Arial"/>
               </a:rPr>
@@ -69644,7 +69644,7 @@
             <a:r>
               <a:rPr sz="750" b="1" i="0">
                 <a:solidFill>
-                  <a:srgbClr val="C53E1F"/>
+                  <a:srgbClr val="6C757D"/>
                 </a:solidFill>
                 <a:latin typeface="Arial"/>
               </a:rPr>
@@ -69680,7 +69680,7 @@
             <a:r>
               <a:rPr sz="750" b="1" i="0">
                 <a:solidFill>
-                  <a:srgbClr val="0A7D6E"/>
+                  <a:srgbClr val="6C757D"/>
                 </a:solidFill>
                 <a:latin typeface="Arial"/>
               </a:rPr>
@@ -69716,7 +69716,7 @@
             <a:r>
               <a:rPr sz="750" b="1" i="0">
                 <a:solidFill>
-                  <a:srgbClr val="C53E1F"/>
+                  <a:srgbClr val="6C757D"/>
                 </a:solidFill>
                 <a:latin typeface="Arial"/>
               </a:rPr>
@@ -69752,7 +69752,7 @@
             <a:r>
               <a:rPr sz="750" b="1" i="0">
                 <a:solidFill>
-                  <a:srgbClr val="0A7D6E"/>
+                  <a:srgbClr val="6C757D"/>
                 </a:solidFill>
                 <a:latin typeface="Arial"/>
               </a:rPr>
@@ -69788,7 +69788,7 @@
             <a:r>
               <a:rPr sz="750" b="1" i="0">
                 <a:solidFill>
-                  <a:srgbClr val="C53E1F"/>
+                  <a:srgbClr val="6C757D"/>
                 </a:solidFill>
                 <a:latin typeface="Arial"/>
               </a:rPr>
@@ -69824,7 +69824,7 @@
             <a:r>
               <a:rPr sz="750" b="1" i="0">
                 <a:solidFill>
-                  <a:srgbClr val="0A7D6E"/>
+                  <a:srgbClr val="6C757D"/>
                 </a:solidFill>
                 <a:latin typeface="Arial"/>
               </a:rPr>
@@ -69860,7 +69860,7 @@
             <a:r>
               <a:rPr sz="750" b="1" i="0">
                 <a:solidFill>
-                  <a:srgbClr val="0A7D6E"/>
+                  <a:srgbClr val="6C757D"/>
                 </a:solidFill>
                 <a:latin typeface="Arial"/>
               </a:rPr>
@@ -69896,7 +69896,7 @@
             <a:r>
               <a:rPr sz="750" b="1" i="0">
                 <a:solidFill>
-                  <a:srgbClr val="0A7D6E"/>
+                  <a:srgbClr val="6C757D"/>
                 </a:solidFill>
                 <a:latin typeface="Arial"/>
               </a:rPr>
@@ -69932,7 +69932,7 @@
             <a:r>
               <a:rPr sz="750" b="1" i="0">
                 <a:solidFill>
-                  <a:srgbClr val="C53E1F"/>
+                  <a:srgbClr val="6C757D"/>
                 </a:solidFill>
                 <a:latin typeface="Arial"/>
               </a:rPr>
@@ -69968,7 +69968,7 @@
             <a:r>
               <a:rPr sz="750" b="1" i="0">
                 <a:solidFill>
-                  <a:srgbClr val="C53E1F"/>
+                  <a:srgbClr val="6C757D"/>
                 </a:solidFill>
                 <a:latin typeface="Arial"/>
               </a:rPr>
@@ -70004,7 +70004,7 @@
             <a:r>
               <a:rPr sz="750" b="1" i="0">
                 <a:solidFill>
-                  <a:srgbClr val="0A7D6E"/>
+                  <a:srgbClr val="6C757D"/>
                 </a:solidFill>
                 <a:latin typeface="Arial"/>
               </a:rPr>
@@ -70040,7 +70040,7 @@
             <a:r>
               <a:rPr sz="750" b="1" i="0">
                 <a:solidFill>
-                  <a:srgbClr val="C53E1F"/>
+                  <a:srgbClr val="6C757D"/>
                 </a:solidFill>
                 <a:latin typeface="Arial"/>
               </a:rPr>
@@ -70624,7 +70624,7 @@
             <a:avLst/>
           </a:prstGeom>
           <a:solidFill>
-            <a:srgbClr val="0A7D6E"/>
+            <a:srgbClr val="6C757D"/>
           </a:solidFill>
           <a:ln w="3810">
             <a:solidFill>
@@ -70686,7 +70686,7 @@
                 </a:solidFill>
                 <a:latin typeface="Arial"/>
               </a:rPr>
-              <a:t>Other, up-good  (n = 106)</a:t>
+              <a:t>Other (no pathway)  (n = 206)</a:t>
             </a:r>
           </a:p>
         </p:txBody>
@@ -70699,14 +70699,14 @@
         </p:nvSpPr>
         <p:spPr>
           <a:xfrm>
-            <a:off x="3589880" y="6753704"/>
-            <a:ext cx="44000" cy="44000"/>
-          </a:xfrm>
-          <a:prstGeom prst="ellipse">
-            <a:avLst/>
-          </a:prstGeom>
-          <a:solidFill>
-            <a:srgbClr val="C53E1F"/>
+            <a:off x="3593880" y="6757704"/>
+            <a:ext cx="36000" cy="36000"/>
+          </a:xfrm>
+          <a:prstGeom prst="ellipse">
+            <a:avLst/>
+          </a:prstGeom>
+          <a:solidFill>
+            <a:srgbClr val="DDE2E8"/>
           </a:solidFill>
           <a:ln w="3810">
             <a:solidFill>
@@ -70746,88 +70746,6 @@
         <p:spPr>
           <a:xfrm>
             <a:off x="3749040" y="6693408"/>
-            <a:ext cx="1874520" cy="164592"/>
-          </a:xfrm>
-          <a:prstGeom prst="rect">
-            <a:avLst/>
-          </a:prstGeom>
-          <a:noFill/>
-          <a:effectLst/>
-        </p:spPr>
-        <p:txBody>
-          <a:bodyPr wrap="square" lIns="0" rIns="0" tIns="0" bIns="0" anchor="ctr">
-            <a:spAutoFit/>
-          </a:bodyPr>
-          <a:lstStyle/>
-          <a:p>
-            <a:pPr algn="l"/>
-            <a:r>
-              <a:rPr sz="750" b="0" i="0">
-                <a:solidFill>
-                  <a:srgbClr val="0E2A47"/>
-                </a:solidFill>
-                <a:latin typeface="Arial"/>
-              </a:rPr>
-              <a:t>Other, up-poor  (n = 100)</a:t>
-            </a:r>
-          </a:p>
-        </p:txBody>
-      </p:sp>
-      <p:sp>
-        <p:nvSpPr>
-          <p:cNvPr id="1550" name="Oval 1549"/>
-          <p:cNvSpPr/>
-          <p:nvPr/>
-        </p:nvSpPr>
-        <p:spPr>
-          <a:xfrm>
-            <a:off x="5742720" y="6757704"/>
-            <a:ext cx="36000" cy="36000"/>
-          </a:xfrm>
-          <a:prstGeom prst="ellipse">
-            <a:avLst/>
-          </a:prstGeom>
-          <a:solidFill>
-            <a:srgbClr val="DDE2E8"/>
-          </a:solidFill>
-          <a:ln w="3810">
-            <a:solidFill>
-              <a:srgbClr val="0E2A47"/>
-            </a:solidFill>
-          </a:ln>
-          <a:effectLst/>
-        </p:spPr>
-        <p:style>
-          <a:lnRef idx="1">
-            <a:schemeClr val="accent1"/>
-          </a:lnRef>
-          <a:fillRef idx="3">
-            <a:schemeClr val="accent1"/>
-          </a:fillRef>
-          <a:effectRef idx="2">
-            <a:schemeClr val="accent1"/>
-          </a:effectRef>
-          <a:fontRef idx="minor">
-            <a:schemeClr val="lt1"/>
-          </a:fontRef>
-        </p:style>
-        <p:txBody>
-          <a:bodyPr rtlCol="0" anchor="ctr"/>
-          <a:lstStyle/>
-          <a:p>
-            <a:pPr algn="ctr"/>
-          </a:p>
-        </p:txBody>
-      </p:sp>
-      <p:sp>
-        <p:nvSpPr>
-          <p:cNvPr id="1551" name="TextBox 1550"/>
-          <p:cNvSpPr txBox="1"/>
-          <p:nvPr/>
-        </p:nvSpPr>
-        <p:spPr>
-          <a:xfrm>
-            <a:off x="5897880" y="6693408"/>
             <a:ext cx="1874520" cy="164592"/>
           </a:xfrm>
           <a:prstGeom prst="rect">
